--- a/docs/Progress_Report_2_AutoRepairAgent.pptx
+++ b/docs/Progress_Report_2_AutoRepairAgent.pptx
@@ -5,26 +5,25 @@
     <p:sldMasterId id="2147483648" r:id="rId1"/>
   </p:sldMasterIdLst>
   <p:sldIdLst>
-    <p:sldId id="256" r:id="rId7"/>
-    <p:sldId id="257" r:id="rId8"/>
-    <p:sldId id="258" r:id="rId9"/>
-    <p:sldId id="259" r:id="rId10"/>
-    <p:sldId id="260" r:id="rId11"/>
-    <p:sldId id="261" r:id="rId12"/>
-    <p:sldId id="262" r:id="rId13"/>
-    <p:sldId id="263" r:id="rId14"/>
-    <p:sldId id="264" r:id="rId15"/>
-    <p:sldId id="265" r:id="rId16"/>
-    <p:sldId id="266" r:id="rId17"/>
-    <p:sldId id="267" r:id="rId18"/>
-    <p:sldId id="268" r:id="rId19"/>
-    <p:sldId id="269" r:id="rId20"/>
-    <p:sldId id="270" r:id="rId21"/>
-    <p:sldId id="271" r:id="rId22"/>
-    <p:sldId id="272" r:id="rId23"/>
-    <p:sldId id="273" r:id="rId24"/>
-    <p:sldId id="274" r:id="rId25"/>
-    <p:sldId id="275" r:id="rId26"/>
+    <p:sldId id="256" r:id="rId2"/>
+    <p:sldId id="257" r:id="rId3"/>
+    <p:sldId id="258" r:id="rId4"/>
+    <p:sldId id="259" r:id="rId5"/>
+    <p:sldId id="260" r:id="rId6"/>
+    <p:sldId id="261" r:id="rId7"/>
+    <p:sldId id="262" r:id="rId8"/>
+    <p:sldId id="263" r:id="rId9"/>
+    <p:sldId id="264" r:id="rId10"/>
+    <p:sldId id="265" r:id="rId11"/>
+    <p:sldId id="266" r:id="rId12"/>
+    <p:sldId id="267" r:id="rId13"/>
+    <p:sldId id="268" r:id="rId14"/>
+    <p:sldId id="269" r:id="rId15"/>
+    <p:sldId id="270" r:id="rId16"/>
+    <p:sldId id="271" r:id="rId17"/>
+    <p:sldId id="272" r:id="rId18"/>
+    <p:sldId id="273" r:id="rId19"/>
+    <p:sldId id="275" r:id="rId20"/>
   </p:sldIdLst>
   <p:sldSz cx="9144000" cy="6858000" type="screen4x3"/>
   <p:notesSz cx="6858000" cy="9144000"/>
@@ -123,6 +122,22 @@
       </a:defRPr>
     </a:lvl9pPr>
   </p:defaultTextStyle>
+  <p:extLst>
+    <p:ext uri="{EFAFB233-063F-42B5-8137-9DF3F51BA10A}">
+      <p15:sldGuideLst xmlns:p15="http://schemas.microsoft.com/office/powerpoint/2012/main">
+        <p15:guide id="1" orient="horz" pos="2160">
+          <p15:clr>
+            <a:srgbClr val="A4A3A4"/>
+          </p15:clr>
+        </p15:guide>
+        <p15:guide id="2" pos="2880">
+          <p15:clr>
+            <a:srgbClr val="A4A3A4"/>
+          </p15:clr>
+        </p15:guide>
+      </p15:sldGuideLst>
+    </p:ext>
+  </p:extLst>
 </p:presentation>
 </file>
 
@@ -164,10 +179,9 @@
           <a:lstStyle/>
           <a:p>
             <a:r>
-              <a:rPr lang="en-US" smtClean="0"/>
+              <a:rPr lang="en-US"/>
               <a:t>Click to edit Master title style</a:t>
             </a:r>
-            <a:endParaRPr lang="en-US"/>
           </a:p>
         </p:txBody>
       </p:sp>
@@ -283,10 +297,9 @@
           </a:lstStyle>
           <a:p>
             <a:r>
-              <a:rPr lang="en-US" smtClean="0"/>
+              <a:rPr lang="en-US"/>
               <a:t>Click to edit Master subtitle style</a:t>
             </a:r>
-            <a:endParaRPr lang="en-US"/>
           </a:p>
         </p:txBody>
       </p:sp>
@@ -307,7 +320,7 @@
           <a:p>
             <a:fld id="{5BCAD085-E8A6-8845-BD4E-CB4CCA059FC4}" type="datetimeFigureOut">
               <a:rPr lang="en-US" smtClean="0"/>
-              <a:t>1/27/13</a:t>
+              <a:t>7/22/2026</a:t>
             </a:fld>
             <a:endParaRPr lang="en-US"/>
           </a:p>
@@ -401,10 +414,9 @@
           <a:lstStyle/>
           <a:p>
             <a:r>
-              <a:rPr lang="en-US" smtClean="0"/>
+              <a:rPr lang="en-US"/>
               <a:t>Click to edit Master title style</a:t>
             </a:r>
-            <a:endParaRPr lang="en-US"/>
           </a:p>
         </p:txBody>
       </p:sp>
@@ -425,38 +437,37 @@
           <a:p>
             <a:pPr lvl="0"/>
             <a:r>
-              <a:rPr lang="en-US" smtClean="0"/>
+              <a:rPr lang="en-US"/>
               <a:t>Click to edit Master text styles</a:t>
             </a:r>
           </a:p>
           <a:p>
             <a:pPr lvl="1"/>
             <a:r>
-              <a:rPr lang="en-US" smtClean="0"/>
+              <a:rPr lang="en-US"/>
               <a:t>Second level</a:t>
             </a:r>
           </a:p>
           <a:p>
             <a:pPr lvl="2"/>
             <a:r>
-              <a:rPr lang="en-US" smtClean="0"/>
+              <a:rPr lang="en-US"/>
               <a:t>Third level</a:t>
             </a:r>
           </a:p>
           <a:p>
             <a:pPr lvl="3"/>
             <a:r>
-              <a:rPr lang="en-US" smtClean="0"/>
+              <a:rPr lang="en-US"/>
               <a:t>Fourth level</a:t>
             </a:r>
           </a:p>
           <a:p>
             <a:pPr lvl="4"/>
             <a:r>
-              <a:rPr lang="en-US" smtClean="0"/>
+              <a:rPr lang="en-US"/>
               <a:t>Fifth level</a:t>
             </a:r>
-            <a:endParaRPr lang="en-US"/>
           </a:p>
         </p:txBody>
       </p:sp>
@@ -477,7 +488,7 @@
           <a:p>
             <a:fld id="{5BCAD085-E8A6-8845-BD4E-CB4CCA059FC4}" type="datetimeFigureOut">
               <a:rPr lang="en-US" smtClean="0"/>
-              <a:t>1/27/13</a:t>
+              <a:t>7/22/2026</a:t>
             </a:fld>
             <a:endParaRPr lang="en-US"/>
           </a:p>
@@ -576,10 +587,9 @@
           <a:lstStyle/>
           <a:p>
             <a:r>
-              <a:rPr lang="en-US" smtClean="0"/>
+              <a:rPr lang="en-US"/>
               <a:t>Click to edit Master title style</a:t>
             </a:r>
-            <a:endParaRPr lang="en-US"/>
           </a:p>
         </p:txBody>
       </p:sp>
@@ -605,38 +615,37 @@
           <a:p>
             <a:pPr lvl="0"/>
             <a:r>
-              <a:rPr lang="en-US" smtClean="0"/>
+              <a:rPr lang="en-US"/>
               <a:t>Click to edit Master text styles</a:t>
             </a:r>
           </a:p>
           <a:p>
             <a:pPr lvl="1"/>
             <a:r>
-              <a:rPr lang="en-US" smtClean="0"/>
+              <a:rPr lang="en-US"/>
               <a:t>Second level</a:t>
             </a:r>
           </a:p>
           <a:p>
             <a:pPr lvl="2"/>
             <a:r>
-              <a:rPr lang="en-US" smtClean="0"/>
+              <a:rPr lang="en-US"/>
               <a:t>Third level</a:t>
             </a:r>
           </a:p>
           <a:p>
             <a:pPr lvl="3"/>
             <a:r>
-              <a:rPr lang="en-US" smtClean="0"/>
+              <a:rPr lang="en-US"/>
               <a:t>Fourth level</a:t>
             </a:r>
           </a:p>
           <a:p>
             <a:pPr lvl="4"/>
             <a:r>
-              <a:rPr lang="en-US" smtClean="0"/>
+              <a:rPr lang="en-US"/>
               <a:t>Fifth level</a:t>
             </a:r>
-            <a:endParaRPr lang="en-US"/>
           </a:p>
         </p:txBody>
       </p:sp>
@@ -657,7 +666,7 @@
           <a:p>
             <a:fld id="{5BCAD085-E8A6-8845-BD4E-CB4CCA059FC4}" type="datetimeFigureOut">
               <a:rPr lang="en-US" smtClean="0"/>
-              <a:t>1/27/13</a:t>
+              <a:t>7/22/2026</a:t>
             </a:fld>
             <a:endParaRPr lang="en-US"/>
           </a:p>
@@ -751,10 +760,9 @@
           <a:lstStyle/>
           <a:p>
             <a:r>
-              <a:rPr lang="en-US" smtClean="0"/>
+              <a:rPr lang="en-US"/>
               <a:t>Click to edit Master title style</a:t>
             </a:r>
-            <a:endParaRPr lang="en-US"/>
           </a:p>
         </p:txBody>
       </p:sp>
@@ -775,38 +783,37 @@
           <a:p>
             <a:pPr lvl="0"/>
             <a:r>
-              <a:rPr lang="en-US" smtClean="0"/>
+              <a:rPr lang="en-US"/>
               <a:t>Click to edit Master text styles</a:t>
             </a:r>
           </a:p>
           <a:p>
             <a:pPr lvl="1"/>
             <a:r>
-              <a:rPr lang="en-US" smtClean="0"/>
+              <a:rPr lang="en-US"/>
               <a:t>Second level</a:t>
             </a:r>
           </a:p>
           <a:p>
             <a:pPr lvl="2"/>
             <a:r>
-              <a:rPr lang="en-US" smtClean="0"/>
+              <a:rPr lang="en-US"/>
               <a:t>Third level</a:t>
             </a:r>
           </a:p>
           <a:p>
             <a:pPr lvl="3"/>
             <a:r>
-              <a:rPr lang="en-US" smtClean="0"/>
+              <a:rPr lang="en-US"/>
               <a:t>Fourth level</a:t>
             </a:r>
           </a:p>
           <a:p>
             <a:pPr lvl="4"/>
             <a:r>
-              <a:rPr lang="en-US" smtClean="0"/>
+              <a:rPr lang="en-US"/>
               <a:t>Fifth level</a:t>
             </a:r>
-            <a:endParaRPr lang="en-US"/>
           </a:p>
         </p:txBody>
       </p:sp>
@@ -827,7 +834,7 @@
           <a:p>
             <a:fld id="{5BCAD085-E8A6-8845-BD4E-CB4CCA059FC4}" type="datetimeFigureOut">
               <a:rPr lang="en-US" smtClean="0"/>
-              <a:t>1/27/13</a:t>
+              <a:t>7/22/2026</a:t>
             </a:fld>
             <a:endParaRPr lang="en-US"/>
           </a:p>
@@ -930,10 +937,9 @@
           </a:lstStyle>
           <a:p>
             <a:r>
-              <a:rPr lang="en-US" smtClean="0"/>
+              <a:rPr lang="en-US"/>
               <a:t>Click to edit Master title style</a:t>
             </a:r>
-            <a:endParaRPr lang="en-US"/>
           </a:p>
         </p:txBody>
       </p:sp>
@@ -1050,7 +1056,7 @@
           <a:p>
             <a:pPr lvl="0"/>
             <a:r>
-              <a:rPr lang="en-US" smtClean="0"/>
+              <a:rPr lang="en-US"/>
               <a:t>Click to edit Master text styles</a:t>
             </a:r>
           </a:p>
@@ -1073,7 +1079,7 @@
           <a:p>
             <a:fld id="{5BCAD085-E8A6-8845-BD4E-CB4CCA059FC4}" type="datetimeFigureOut">
               <a:rPr lang="en-US" smtClean="0"/>
-              <a:t>1/27/13</a:t>
+              <a:t>7/22/2026</a:t>
             </a:fld>
             <a:endParaRPr lang="en-US"/>
           </a:p>
@@ -1167,10 +1173,9 @@
           <a:lstStyle/>
           <a:p>
             <a:r>
-              <a:rPr lang="en-US" smtClean="0"/>
+              <a:rPr lang="en-US"/>
               <a:t>Click to edit Master title style</a:t>
             </a:r>
-            <a:endParaRPr lang="en-US"/>
           </a:p>
         </p:txBody>
       </p:sp>
@@ -1224,38 +1229,37 @@
           <a:p>
             <a:pPr lvl="0"/>
             <a:r>
-              <a:rPr lang="en-US" smtClean="0"/>
+              <a:rPr lang="en-US"/>
               <a:t>Click to edit Master text styles</a:t>
             </a:r>
           </a:p>
           <a:p>
             <a:pPr lvl="1"/>
             <a:r>
-              <a:rPr lang="en-US" smtClean="0"/>
+              <a:rPr lang="en-US"/>
               <a:t>Second level</a:t>
             </a:r>
           </a:p>
           <a:p>
             <a:pPr lvl="2"/>
             <a:r>
-              <a:rPr lang="en-US" smtClean="0"/>
+              <a:rPr lang="en-US"/>
               <a:t>Third level</a:t>
             </a:r>
           </a:p>
           <a:p>
             <a:pPr lvl="3"/>
             <a:r>
-              <a:rPr lang="en-US" smtClean="0"/>
+              <a:rPr lang="en-US"/>
               <a:t>Fourth level</a:t>
             </a:r>
           </a:p>
           <a:p>
             <a:pPr lvl="4"/>
             <a:r>
-              <a:rPr lang="en-US" smtClean="0"/>
+              <a:rPr lang="en-US"/>
               <a:t>Fifth level</a:t>
             </a:r>
-            <a:endParaRPr lang="en-US"/>
           </a:p>
         </p:txBody>
       </p:sp>
@@ -1309,38 +1313,37 @@
           <a:p>
             <a:pPr lvl="0"/>
             <a:r>
-              <a:rPr lang="en-US" smtClean="0"/>
+              <a:rPr lang="en-US"/>
               <a:t>Click to edit Master text styles</a:t>
             </a:r>
           </a:p>
           <a:p>
             <a:pPr lvl="1"/>
             <a:r>
-              <a:rPr lang="en-US" smtClean="0"/>
+              <a:rPr lang="en-US"/>
               <a:t>Second level</a:t>
             </a:r>
           </a:p>
           <a:p>
             <a:pPr lvl="2"/>
             <a:r>
-              <a:rPr lang="en-US" smtClean="0"/>
+              <a:rPr lang="en-US"/>
               <a:t>Third level</a:t>
             </a:r>
           </a:p>
           <a:p>
             <a:pPr lvl="3"/>
             <a:r>
-              <a:rPr lang="en-US" smtClean="0"/>
+              <a:rPr lang="en-US"/>
               <a:t>Fourth level</a:t>
             </a:r>
           </a:p>
           <a:p>
             <a:pPr lvl="4"/>
             <a:r>
-              <a:rPr lang="en-US" smtClean="0"/>
+              <a:rPr lang="en-US"/>
               <a:t>Fifth level</a:t>
             </a:r>
-            <a:endParaRPr lang="en-US"/>
           </a:p>
         </p:txBody>
       </p:sp>
@@ -1361,7 +1364,7 @@
           <a:p>
             <a:fld id="{5BCAD085-E8A6-8845-BD4E-CB4CCA059FC4}" type="datetimeFigureOut">
               <a:rPr lang="en-US" smtClean="0"/>
-              <a:t>1/27/13</a:t>
+              <a:t>7/22/2026</a:t>
             </a:fld>
             <a:endParaRPr lang="en-US"/>
           </a:p>
@@ -1459,10 +1462,9 @@
           </a:lstStyle>
           <a:p>
             <a:r>
-              <a:rPr lang="en-US" smtClean="0"/>
+              <a:rPr lang="en-US"/>
               <a:t>Click to edit Master title style</a:t>
             </a:r>
-            <a:endParaRPr lang="en-US"/>
           </a:p>
         </p:txBody>
       </p:sp>
@@ -1525,7 +1527,7 @@
           <a:p>
             <a:pPr lvl="0"/>
             <a:r>
-              <a:rPr lang="en-US" smtClean="0"/>
+              <a:rPr lang="en-US"/>
               <a:t>Click to edit Master text styles</a:t>
             </a:r>
           </a:p>
@@ -1581,38 +1583,37 @@
           <a:p>
             <a:pPr lvl="0"/>
             <a:r>
-              <a:rPr lang="en-US" smtClean="0"/>
+              <a:rPr lang="en-US"/>
               <a:t>Click to edit Master text styles</a:t>
             </a:r>
           </a:p>
           <a:p>
             <a:pPr lvl="1"/>
             <a:r>
-              <a:rPr lang="en-US" smtClean="0"/>
+              <a:rPr lang="en-US"/>
               <a:t>Second level</a:t>
             </a:r>
           </a:p>
           <a:p>
             <a:pPr lvl="2"/>
             <a:r>
-              <a:rPr lang="en-US" smtClean="0"/>
+              <a:rPr lang="en-US"/>
               <a:t>Third level</a:t>
             </a:r>
           </a:p>
           <a:p>
             <a:pPr lvl="3"/>
             <a:r>
-              <a:rPr lang="en-US" smtClean="0"/>
+              <a:rPr lang="en-US"/>
               <a:t>Fourth level</a:t>
             </a:r>
           </a:p>
           <a:p>
             <a:pPr lvl="4"/>
             <a:r>
-              <a:rPr lang="en-US" smtClean="0"/>
+              <a:rPr lang="en-US"/>
               <a:t>Fifth level</a:t>
             </a:r>
-            <a:endParaRPr lang="en-US"/>
           </a:p>
         </p:txBody>
       </p:sp>
@@ -1675,7 +1676,7 @@
           <a:p>
             <a:pPr lvl="0"/>
             <a:r>
-              <a:rPr lang="en-US" smtClean="0"/>
+              <a:rPr lang="en-US"/>
               <a:t>Click to edit Master text styles</a:t>
             </a:r>
           </a:p>
@@ -1731,38 +1732,37 @@
           <a:p>
             <a:pPr lvl="0"/>
             <a:r>
-              <a:rPr lang="en-US" smtClean="0"/>
+              <a:rPr lang="en-US"/>
               <a:t>Click to edit Master text styles</a:t>
             </a:r>
           </a:p>
           <a:p>
             <a:pPr lvl="1"/>
             <a:r>
-              <a:rPr lang="en-US" smtClean="0"/>
+              <a:rPr lang="en-US"/>
               <a:t>Second level</a:t>
             </a:r>
           </a:p>
           <a:p>
             <a:pPr lvl="2"/>
             <a:r>
-              <a:rPr lang="en-US" smtClean="0"/>
+              <a:rPr lang="en-US"/>
               <a:t>Third level</a:t>
             </a:r>
           </a:p>
           <a:p>
             <a:pPr lvl="3"/>
             <a:r>
-              <a:rPr lang="en-US" smtClean="0"/>
+              <a:rPr lang="en-US"/>
               <a:t>Fourth level</a:t>
             </a:r>
           </a:p>
           <a:p>
             <a:pPr lvl="4"/>
             <a:r>
-              <a:rPr lang="en-US" smtClean="0"/>
+              <a:rPr lang="en-US"/>
               <a:t>Fifth level</a:t>
             </a:r>
-            <a:endParaRPr lang="en-US"/>
           </a:p>
         </p:txBody>
       </p:sp>
@@ -1783,7 +1783,7 @@
           <a:p>
             <a:fld id="{5BCAD085-E8A6-8845-BD4E-CB4CCA059FC4}" type="datetimeFigureOut">
               <a:rPr lang="en-US" smtClean="0"/>
-              <a:t>1/27/13</a:t>
+              <a:t>7/22/2026</a:t>
             </a:fld>
             <a:endParaRPr lang="en-US"/>
           </a:p>
@@ -1877,10 +1877,9 @@
           <a:lstStyle/>
           <a:p>
             <a:r>
-              <a:rPr lang="en-US" smtClean="0"/>
+              <a:rPr lang="en-US"/>
               <a:t>Click to edit Master title style</a:t>
             </a:r>
-            <a:endParaRPr lang="en-US"/>
           </a:p>
         </p:txBody>
       </p:sp>
@@ -1901,7 +1900,7 @@
           <a:p>
             <a:fld id="{5BCAD085-E8A6-8845-BD4E-CB4CCA059FC4}" type="datetimeFigureOut">
               <a:rPr lang="en-US" smtClean="0"/>
-              <a:t>1/27/13</a:t>
+              <a:t>7/22/2026</a:t>
             </a:fld>
             <a:endParaRPr lang="en-US"/>
           </a:p>
@@ -1996,7 +1995,7 @@
           <a:p>
             <a:fld id="{5BCAD085-E8A6-8845-BD4E-CB4CCA059FC4}" type="datetimeFigureOut">
               <a:rPr lang="en-US" smtClean="0"/>
-              <a:t>1/27/13</a:t>
+              <a:t>7/22/2026</a:t>
             </a:fld>
             <a:endParaRPr lang="en-US"/>
           </a:p>
@@ -2099,10 +2098,9 @@
           </a:lstStyle>
           <a:p>
             <a:r>
-              <a:rPr lang="en-US" smtClean="0"/>
+              <a:rPr lang="en-US"/>
               <a:t>Click to edit Master title style</a:t>
             </a:r>
-            <a:endParaRPr lang="en-US"/>
           </a:p>
         </p:txBody>
       </p:sp>
@@ -2156,38 +2154,37 @@
           <a:p>
             <a:pPr lvl="0"/>
             <a:r>
-              <a:rPr lang="en-US" smtClean="0"/>
+              <a:rPr lang="en-US"/>
               <a:t>Click to edit Master text styles</a:t>
             </a:r>
           </a:p>
           <a:p>
             <a:pPr lvl="1"/>
             <a:r>
-              <a:rPr lang="en-US" smtClean="0"/>
+              <a:rPr lang="en-US"/>
               <a:t>Second level</a:t>
             </a:r>
           </a:p>
           <a:p>
             <a:pPr lvl="2"/>
             <a:r>
-              <a:rPr lang="en-US" smtClean="0"/>
+              <a:rPr lang="en-US"/>
               <a:t>Third level</a:t>
             </a:r>
           </a:p>
           <a:p>
             <a:pPr lvl="3"/>
             <a:r>
-              <a:rPr lang="en-US" smtClean="0"/>
+              <a:rPr lang="en-US"/>
               <a:t>Fourth level</a:t>
             </a:r>
           </a:p>
           <a:p>
             <a:pPr lvl="4"/>
             <a:r>
-              <a:rPr lang="en-US" smtClean="0"/>
+              <a:rPr lang="en-US"/>
               <a:t>Fifth level</a:t>
             </a:r>
-            <a:endParaRPr lang="en-US"/>
           </a:p>
         </p:txBody>
       </p:sp>
@@ -2250,7 +2247,7 @@
           <a:p>
             <a:pPr lvl="0"/>
             <a:r>
-              <a:rPr lang="en-US" smtClean="0"/>
+              <a:rPr lang="en-US"/>
               <a:t>Click to edit Master text styles</a:t>
             </a:r>
           </a:p>
@@ -2273,7 +2270,7 @@
           <a:p>
             <a:fld id="{5BCAD085-E8A6-8845-BD4E-CB4CCA059FC4}" type="datetimeFigureOut">
               <a:rPr lang="en-US" smtClean="0"/>
-              <a:t>1/27/13</a:t>
+              <a:t>7/22/2026</a:t>
             </a:fld>
             <a:endParaRPr lang="en-US"/>
           </a:p>
@@ -2376,10 +2373,9 @@
           </a:lstStyle>
           <a:p>
             <a:r>
-              <a:rPr lang="en-US" smtClean="0"/>
+              <a:rPr lang="en-US"/>
               <a:t>Click to edit Master title style</a:t>
             </a:r>
-            <a:endParaRPr lang="en-US"/>
           </a:p>
         </p:txBody>
       </p:sp>
@@ -2503,7 +2499,7 @@
           <a:p>
             <a:pPr lvl="0"/>
             <a:r>
-              <a:rPr lang="en-US" smtClean="0"/>
+              <a:rPr lang="en-US"/>
               <a:t>Click to edit Master text styles</a:t>
             </a:r>
           </a:p>
@@ -2526,7 +2522,7 @@
           <a:p>
             <a:fld id="{5BCAD085-E8A6-8845-BD4E-CB4CCA059FC4}" type="datetimeFigureOut">
               <a:rPr lang="en-US" smtClean="0"/>
-              <a:t>1/27/13</a:t>
+              <a:t>7/22/2026</a:t>
             </a:fld>
             <a:endParaRPr lang="en-US"/>
           </a:p>
@@ -2635,10 +2631,9 @@
           <a:lstStyle/>
           <a:p>
             <a:r>
-              <a:rPr lang="en-US" smtClean="0"/>
+              <a:rPr lang="en-US"/>
               <a:t>Click to edit Master title style</a:t>
             </a:r>
-            <a:endParaRPr lang="en-US"/>
           </a:p>
         </p:txBody>
       </p:sp>
@@ -2669,38 +2664,37 @@
           <a:p>
             <a:pPr lvl="0"/>
             <a:r>
-              <a:rPr lang="en-US" smtClean="0"/>
+              <a:rPr lang="en-US"/>
               <a:t>Click to edit Master text styles</a:t>
             </a:r>
           </a:p>
           <a:p>
             <a:pPr lvl="1"/>
             <a:r>
-              <a:rPr lang="en-US" smtClean="0"/>
+              <a:rPr lang="en-US"/>
               <a:t>Second level</a:t>
             </a:r>
           </a:p>
           <a:p>
             <a:pPr lvl="2"/>
             <a:r>
-              <a:rPr lang="en-US" smtClean="0"/>
+              <a:rPr lang="en-US"/>
               <a:t>Third level</a:t>
             </a:r>
           </a:p>
           <a:p>
             <a:pPr lvl="3"/>
             <a:r>
-              <a:rPr lang="en-US" smtClean="0"/>
+              <a:rPr lang="en-US"/>
               <a:t>Fourth level</a:t>
             </a:r>
           </a:p>
           <a:p>
             <a:pPr lvl="4"/>
             <a:r>
-              <a:rPr lang="en-US" smtClean="0"/>
+              <a:rPr lang="en-US"/>
               <a:t>Fifth level</a:t>
             </a:r>
-            <a:endParaRPr lang="en-US"/>
           </a:p>
         </p:txBody>
       </p:sp>
@@ -2739,7 +2733,7 @@
           <a:p>
             <a:fld id="{5BCAD085-E8A6-8845-BD4E-CB4CCA059FC4}" type="datetimeFigureOut">
               <a:rPr lang="en-US" smtClean="0"/>
-              <a:t>1/27/13</a:t>
+              <a:t>7/22/2026</a:t>
             </a:fld>
             <a:endParaRPr lang="en-US"/>
           </a:p>
@@ -3098,7 +3092,7 @@
 </file>
 
 <file path=ppt/slides/slide1.xml><?xml version="1.0" encoding="utf-8"?>
-<p:sld xmlns:a="http://schemas.openxmlformats.org/drawingml/2006/main" xmlns:p="http://schemas.openxmlformats.org/presentationml/2006/main" xmlns:r="http://schemas.openxmlformats.org/officeDocument/2006/relationships">
+<p:sld xmlns:a="http://schemas.openxmlformats.org/drawingml/2006/main" xmlns:r="http://schemas.openxmlformats.org/officeDocument/2006/relationships" xmlns:p="http://schemas.openxmlformats.org/presentationml/2006/main">
   <p:cSld>
     <p:spTree>
       <p:nvGrpSpPr>
@@ -3106,7 +3100,14 @@
         <p:cNvGrpSpPr/>
         <p:nvPr/>
       </p:nvGrpSpPr>
-      <p:grpSpPr/>
+      <p:grpSpPr>
+        <a:xfrm>
+          <a:off x="0" y="0"/>
+          <a:ext cx="0" cy="0"/>
+          <a:chOff x="0" y="0"/>
+          <a:chExt cx="0" cy="0"/>
+        </a:xfrm>
+      </p:grpSpPr>
       <p:sp>
         <p:nvSpPr>
           <p:cNvPr id="2" name="Rectangle 1"/>
@@ -3147,6 +3148,7 @@
           <a:lstStyle/>
           <a:p>
             <a:pPr algn="ctr"/>
+            <a:endParaRPr/>
           </a:p>
         </p:txBody>
       </p:sp>
@@ -3190,6 +3192,7 @@
           <a:lstStyle/>
           <a:p>
             <a:pPr algn="ctr"/>
+            <a:endParaRPr/>
           </a:p>
         </p:txBody>
       </p:sp>
@@ -3233,6 +3236,7 @@
           <a:lstStyle/>
           <a:p>
             <a:pPr algn="ctr"/>
+            <a:endParaRPr/>
           </a:p>
         </p:txBody>
       </p:sp>
@@ -3276,6 +3280,7 @@
           <a:lstStyle/>
           <a:p>
             <a:pPr algn="ctr"/>
+            <a:endParaRPr/>
           </a:p>
         </p:txBody>
       </p:sp>
@@ -3424,6 +3429,7 @@
           <a:lstStyle/>
           <a:p>
             <a:pPr algn="ctr"/>
+            <a:endParaRPr/>
           </a:p>
         </p:txBody>
       </p:sp>
@@ -3435,8 +3441,8 @@
         </p:nvSpPr>
         <p:spPr>
           <a:xfrm>
-            <a:off x="731520" y="4800600"/>
-            <a:ext cx="7680960" cy="411480"/>
+            <a:off x="2005110" y="4800600"/>
+            <a:ext cx="5133778" cy="369332"/>
           </a:xfrm>
           <a:prstGeom prst="rect">
             <a:avLst/>
@@ -3457,7 +3463,16 @@
               </a:defRPr>
             </a:pPr>
             <a:r>
-              <a:t>Progress Report 2  —  Phase 2 Business Modules (Final Report)</a:t>
+              <a:rPr dirty="0"/>
+              <a:t>Progress Report 2  </a:t>
+            </a:r>
+            <a:r>
+              <a:rPr lang="en-NZ" dirty="0"/>
+              <a:t>-</a:t>
+            </a:r>
+            <a:r>
+              <a:rPr dirty="0"/>
+              <a:t>  Phase 2 Modules (Final Report)</a:t>
             </a:r>
           </a:p>
         </p:txBody>
@@ -3506,7 +3521,7 @@
         <p:spPr>
           <a:xfrm>
             <a:off x="3200400" y="5349240"/>
-            <a:ext cx="4572000" cy="228600"/>
+            <a:ext cx="500458" cy="246221"/>
           </a:xfrm>
           <a:prstGeom prst="rect">
             <a:avLst/>
@@ -3527,8 +3542,10 @@
               </a:defRPr>
             </a:pPr>
             <a:r>
-              <a:t>[Your Name]  |  ID: [Student ID]</a:t>
-            </a:r>
+              <a:rPr lang="en-NZ" dirty="0"/>
+              <a:t>Anish </a:t>
+            </a:r>
+            <a:endParaRPr dirty="0"/>
           </a:p>
         </p:txBody>
       </p:sp>
@@ -3575,8 +3592,8 @@
         </p:nvSpPr>
         <p:spPr>
           <a:xfrm>
-            <a:off x="3200400" y="5605272"/>
-            <a:ext cx="4572000" cy="228600"/>
+            <a:off x="3200400" y="5610511"/>
+            <a:ext cx="877824" cy="246221"/>
           </a:xfrm>
           <a:prstGeom prst="rect">
             <a:avLst/>
@@ -3584,7 +3601,7 @@
           <a:noFill/>
         </p:spPr>
         <p:txBody>
-          <a:bodyPr wrap="none">
+          <a:bodyPr wrap="square">
             <a:spAutoFit/>
           </a:bodyPr>
           <a:lstStyle/>
@@ -3597,218 +3614,10 @@
               </a:defRPr>
             </a:pPr>
             <a:r>
-              <a:t>[Course Name / Code]</a:t>
-            </a:r>
-          </a:p>
-        </p:txBody>
-      </p:sp>
-      <p:sp>
-        <p:nvSpPr>
-          <p:cNvPr id="15" name="TextBox 14"/>
-          <p:cNvSpPr txBox="1"/>
-          <p:nvPr/>
-        </p:nvSpPr>
-        <p:spPr>
-          <a:xfrm>
-            <a:off x="1828800" y="5861304"/>
-            <a:ext cx="1280160" cy="228600"/>
-          </a:xfrm>
-          <a:prstGeom prst="rect">
-            <a:avLst/>
-          </a:prstGeom>
-          <a:noFill/>
-        </p:spPr>
-        <p:txBody>
-          <a:bodyPr wrap="none">
-            <a:spAutoFit/>
-          </a:bodyPr>
-          <a:lstStyle/>
-          <a:p>
-            <a:pPr algn="r">
-              <a:defRPr sz="1000" b="1" i="0">
-                <a:solidFill>
-                  <a:srgbClr val="BDBDBD"/>
-                </a:solidFill>
-              </a:defRPr>
-            </a:pPr>
-            <a:r>
-              <a:t>College:</a:t>
-            </a:r>
-          </a:p>
-        </p:txBody>
-      </p:sp>
-      <p:sp>
-        <p:nvSpPr>
-          <p:cNvPr id="16" name="TextBox 15"/>
-          <p:cNvSpPr txBox="1"/>
-          <p:nvPr/>
-        </p:nvSpPr>
-        <p:spPr>
-          <a:xfrm>
-            <a:off x="3200400" y="5861304"/>
-            <a:ext cx="4572000" cy="228600"/>
-          </a:xfrm>
-          <a:prstGeom prst="rect">
-            <a:avLst/>
-          </a:prstGeom>
-          <a:noFill/>
-        </p:spPr>
-        <p:txBody>
-          <a:bodyPr wrap="none">
-            <a:spAutoFit/>
-          </a:bodyPr>
-          <a:lstStyle/>
-          <a:p>
-            <a:pPr algn="l">
-              <a:defRPr sz="1000" b="0" i="0">
-                <a:solidFill>
-                  <a:srgbClr val="FFFFFF"/>
-                </a:solidFill>
-              </a:defRPr>
-            </a:pPr>
-            <a:r>
-              <a:t>[College Name]</a:t>
-            </a:r>
-          </a:p>
-        </p:txBody>
-      </p:sp>
-      <p:sp>
-        <p:nvSpPr>
-          <p:cNvPr id="17" name="TextBox 16"/>
-          <p:cNvSpPr txBox="1"/>
-          <p:nvPr/>
-        </p:nvSpPr>
-        <p:spPr>
-          <a:xfrm>
-            <a:off x="1828800" y="6117336"/>
-            <a:ext cx="1280160" cy="228600"/>
-          </a:xfrm>
-          <a:prstGeom prst="rect">
-            <a:avLst/>
-          </a:prstGeom>
-          <a:noFill/>
-        </p:spPr>
-        <p:txBody>
-          <a:bodyPr wrap="none">
-            <a:spAutoFit/>
-          </a:bodyPr>
-          <a:lstStyle/>
-          <a:p>
-            <a:pPr algn="r">
-              <a:defRPr sz="1000" b="1" i="0">
-                <a:solidFill>
-                  <a:srgbClr val="BDBDBD"/>
-                </a:solidFill>
-              </a:defRPr>
-            </a:pPr>
-            <a:r>
-              <a:t>Period:</a:t>
-            </a:r>
-          </a:p>
-        </p:txBody>
-      </p:sp>
-      <p:sp>
-        <p:nvSpPr>
-          <p:cNvPr id="18" name="TextBox 17"/>
-          <p:cNvSpPr txBox="1"/>
-          <p:nvPr/>
-        </p:nvSpPr>
-        <p:spPr>
-          <a:xfrm>
-            <a:off x="3200400" y="6117336"/>
-            <a:ext cx="4572000" cy="228600"/>
-          </a:xfrm>
-          <a:prstGeom prst="rect">
-            <a:avLst/>
-          </a:prstGeom>
-          <a:noFill/>
-        </p:spPr>
-        <p:txBody>
-          <a:bodyPr wrap="none">
-            <a:spAutoFit/>
-          </a:bodyPr>
-          <a:lstStyle/>
-          <a:p>
-            <a:pPr algn="l">
-              <a:defRPr sz="1000" b="0" i="0">
-                <a:solidFill>
-                  <a:srgbClr val="FFFFFF"/>
-                </a:solidFill>
-              </a:defRPr>
-            </a:pPr>
-            <a:r>
-              <a:t>Reporting Period: [Start Date] – [End Date]</a:t>
-            </a:r>
-          </a:p>
-        </p:txBody>
-      </p:sp>
-      <p:sp>
-        <p:nvSpPr>
-          <p:cNvPr id="19" name="TextBox 18"/>
-          <p:cNvSpPr txBox="1"/>
-          <p:nvPr/>
-        </p:nvSpPr>
-        <p:spPr>
-          <a:xfrm>
-            <a:off x="1828800" y="6373368"/>
-            <a:ext cx="1280160" cy="228600"/>
-          </a:xfrm>
-          <a:prstGeom prst="rect">
-            <a:avLst/>
-          </a:prstGeom>
-          <a:noFill/>
-        </p:spPr>
-        <p:txBody>
-          <a:bodyPr wrap="none">
-            <a:spAutoFit/>
-          </a:bodyPr>
-          <a:lstStyle/>
-          <a:p>
-            <a:pPr algn="r">
-              <a:defRPr sz="1000" b="1" i="0">
-                <a:solidFill>
-                  <a:srgbClr val="BDBDBD"/>
-                </a:solidFill>
-              </a:defRPr>
-            </a:pPr>
-            <a:r>
-              <a:t>Date:</a:t>
-            </a:r>
-          </a:p>
-        </p:txBody>
-      </p:sp>
-      <p:sp>
-        <p:nvSpPr>
-          <p:cNvPr id="20" name="TextBox 19"/>
-          <p:cNvSpPr txBox="1"/>
-          <p:nvPr/>
-        </p:nvSpPr>
-        <p:spPr>
-          <a:xfrm>
-            <a:off x="3200400" y="6373368"/>
-            <a:ext cx="4572000" cy="228600"/>
-          </a:xfrm>
-          <a:prstGeom prst="rect">
-            <a:avLst/>
-          </a:prstGeom>
-          <a:noFill/>
-        </p:spPr>
-        <p:txBody>
-          <a:bodyPr wrap="none">
-            <a:spAutoFit/>
-          </a:bodyPr>
-          <a:lstStyle/>
-          <a:p>
-            <a:pPr algn="l">
-              <a:defRPr sz="1000" b="0" i="0">
-                <a:solidFill>
-                  <a:srgbClr val="FFFFFF"/>
-                </a:solidFill>
-              </a:defRPr>
-            </a:pPr>
-            <a:r>
-              <a:t>Submission Date: July 2026</a:t>
-            </a:r>
+              <a:rPr lang="en-NZ" dirty="0"/>
+              <a:t>MIT</a:t>
+            </a:r>
+            <a:endParaRPr dirty="0"/>
           </a:p>
         </p:txBody>
       </p:sp>
@@ -3852,6 +3661,7 @@
           <a:lstStyle/>
           <a:p>
             <a:pPr algn="ctr"/>
+            <a:endParaRPr/>
           </a:p>
         </p:txBody>
       </p:sp>
@@ -3934,7 +3744,7 @@
 </file>
 
 <file path=ppt/slides/slide10.xml><?xml version="1.0" encoding="utf-8"?>
-<p:sld xmlns:a="http://schemas.openxmlformats.org/drawingml/2006/main" xmlns:p="http://schemas.openxmlformats.org/presentationml/2006/main" xmlns:r="http://schemas.openxmlformats.org/officeDocument/2006/relationships">
+<p:sld xmlns:a="http://schemas.openxmlformats.org/drawingml/2006/main" xmlns:r="http://schemas.openxmlformats.org/officeDocument/2006/relationships" xmlns:p="http://schemas.openxmlformats.org/presentationml/2006/main">
   <p:cSld>
     <p:bg>
       <p:bgPr>
@@ -3950,7 +3760,14 @@
         <p:cNvGrpSpPr/>
         <p:nvPr/>
       </p:nvGrpSpPr>
-      <p:grpSpPr/>
+      <p:grpSpPr>
+        <a:xfrm>
+          <a:off x="0" y="0"/>
+          <a:ext cx="0" cy="0"/>
+          <a:chOff x="0" y="0"/>
+          <a:chExt cx="0" cy="0"/>
+        </a:xfrm>
+      </p:grpSpPr>
       <p:sp>
         <p:nvSpPr>
           <p:cNvPr id="2" name="Rectangle 1"/>
@@ -3991,6 +3808,7 @@
           <a:lstStyle/>
           <a:p>
             <a:pPr algn="ctr"/>
+            <a:endParaRPr/>
           </a:p>
         </p:txBody>
       </p:sp>
@@ -4034,6 +3852,7 @@
           <a:lstStyle/>
           <a:p>
             <a:pPr algn="ctr"/>
+            <a:endParaRPr/>
           </a:p>
         </p:txBody>
       </p:sp>
@@ -4077,6 +3896,7 @@
           <a:lstStyle/>
           <a:p>
             <a:pPr algn="ctr"/>
+            <a:endParaRPr/>
           </a:p>
         </p:txBody>
       </p:sp>
@@ -4155,6 +3975,7 @@
           <a:lstStyle/>
           <a:p>
             <a:pPr algn="ctr"/>
+            <a:endParaRPr/>
           </a:p>
         </p:txBody>
       </p:sp>
@@ -4166,8 +3987,8 @@
         </p:nvSpPr>
         <p:spPr>
           <a:xfrm>
-            <a:off x="7406640" y="237744"/>
-            <a:ext cx="1417320" cy="274320"/>
+            <a:off x="7667100" y="237744"/>
+            <a:ext cx="896399" cy="230832"/>
           </a:xfrm>
           <a:prstGeom prst="rect">
             <a:avLst/>
@@ -4188,7 +4009,16 @@
               </a:defRPr>
             </a:pPr>
             <a:r>
-              <a:t>02 — PROGRESS</a:t>
+              <a:rPr dirty="0"/>
+              <a:t>02 </a:t>
+            </a:r>
+            <a:r>
+              <a:rPr lang="en-NZ" dirty="0"/>
+              <a:t>-</a:t>
+            </a:r>
+            <a:r>
+              <a:rPr dirty="0"/>
+              <a:t> PROGRESS</a:t>
             </a:r>
           </a:p>
         </p:txBody>
@@ -4303,6 +4133,7 @@
           <a:lstStyle/>
           <a:p>
             <a:pPr algn="ctr"/>
+            <a:endParaRPr/>
           </a:p>
         </p:txBody>
       </p:sp>
@@ -4455,6 +4286,7 @@
           <a:lstStyle/>
           <a:p>
             <a:pPr algn="ctr"/>
+            <a:endParaRPr/>
           </a:p>
         </p:txBody>
       </p:sp>
@@ -4526,6 +4358,7 @@
           <a:lstStyle/>
           <a:p>
             <a:pPr algn="ctr"/>
+            <a:endParaRPr/>
           </a:p>
         </p:txBody>
       </p:sp>
@@ -4573,7 +4406,7 @@
 </file>
 
 <file path=ppt/slides/slide11.xml><?xml version="1.0" encoding="utf-8"?>
-<p:sld xmlns:a="http://schemas.openxmlformats.org/drawingml/2006/main" xmlns:p="http://schemas.openxmlformats.org/presentationml/2006/main" xmlns:r="http://schemas.openxmlformats.org/officeDocument/2006/relationships">
+<p:sld xmlns:a="http://schemas.openxmlformats.org/drawingml/2006/main" xmlns:r="http://schemas.openxmlformats.org/officeDocument/2006/relationships" xmlns:p="http://schemas.openxmlformats.org/presentationml/2006/main">
   <p:cSld>
     <p:bg>
       <p:bgPr>
@@ -4589,7 +4422,14 @@
         <p:cNvGrpSpPr/>
         <p:nvPr/>
       </p:nvGrpSpPr>
-      <p:grpSpPr/>
+      <p:grpSpPr>
+        <a:xfrm>
+          <a:off x="0" y="0"/>
+          <a:ext cx="0" cy="0"/>
+          <a:chOff x="0" y="0"/>
+          <a:chExt cx="0" cy="0"/>
+        </a:xfrm>
+      </p:grpSpPr>
       <p:sp>
         <p:nvSpPr>
           <p:cNvPr id="2" name="Rectangle 1"/>
@@ -4630,6 +4470,7 @@
           <a:lstStyle/>
           <a:p>
             <a:pPr algn="ctr"/>
+            <a:endParaRPr/>
           </a:p>
         </p:txBody>
       </p:sp>
@@ -4673,6 +4514,7 @@
           <a:lstStyle/>
           <a:p>
             <a:pPr algn="ctr"/>
+            <a:endParaRPr/>
           </a:p>
         </p:txBody>
       </p:sp>
@@ -4716,6 +4558,7 @@
           <a:lstStyle/>
           <a:p>
             <a:pPr algn="ctr"/>
+            <a:endParaRPr/>
           </a:p>
         </p:txBody>
       </p:sp>
@@ -4794,6 +4637,7 @@
           <a:lstStyle/>
           <a:p>
             <a:pPr algn="ctr"/>
+            <a:endParaRPr/>
           </a:p>
         </p:txBody>
       </p:sp>
@@ -4805,8 +4649,8 @@
         </p:nvSpPr>
         <p:spPr>
           <a:xfrm>
-            <a:off x="7406640" y="237744"/>
-            <a:ext cx="1417320" cy="274320"/>
+            <a:off x="7667100" y="237744"/>
+            <a:ext cx="896399" cy="230832"/>
           </a:xfrm>
           <a:prstGeom prst="rect">
             <a:avLst/>
@@ -4827,7 +4671,16 @@
               </a:defRPr>
             </a:pPr>
             <a:r>
-              <a:t>02 — PROGRESS</a:t>
+              <a:rPr dirty="0"/>
+              <a:t>02 </a:t>
+            </a:r>
+            <a:r>
+              <a:rPr lang="en-NZ" dirty="0"/>
+              <a:t>-</a:t>
+            </a:r>
+            <a:r>
+              <a:rPr dirty="0"/>
+              <a:t> PROGRESS</a:t>
             </a:r>
           </a:p>
         </p:txBody>
@@ -4942,6 +4795,7 @@
           <a:lstStyle/>
           <a:p>
             <a:pPr algn="ctr"/>
+            <a:endParaRPr/>
           </a:p>
         </p:txBody>
       </p:sp>
@@ -5094,6 +4948,7 @@
           <a:lstStyle/>
           <a:p>
             <a:pPr algn="ctr"/>
+            <a:endParaRPr/>
           </a:p>
         </p:txBody>
       </p:sp>
@@ -5106,7 +4961,7 @@
         <p:spPr>
           <a:xfrm>
             <a:off x="777240" y="1325880"/>
-            <a:ext cx="7772400" cy="4937760"/>
+            <a:ext cx="7772400" cy="2118529"/>
           </a:xfrm>
           <a:prstGeom prst="rect">
             <a:avLst/>
@@ -5130,7 +4985,16 @@
               </a:defRPr>
             </a:pPr>
             <a:r>
-              <a:t>▸  autoAssignJob() assigns job to first active user in target department</a:t>
+              <a:rPr dirty="0"/>
+              <a:t>▸  </a:t>
+            </a:r>
+            <a:r>
+              <a:rPr dirty="0" err="1"/>
+              <a:t>autoAssignJob</a:t>
+            </a:r>
+            <a:r>
+              <a:rPr dirty="0"/>
+              <a:t>() assigns job to first active user in target department</a:t>
             </a:r>
           </a:p>
           <a:p>
@@ -5145,7 +5009,32 @@
               </a:defRPr>
             </a:pPr>
             <a:r>
-              <a:t>▸  Job status flow: PENDING → ASSIGNED → IN_PROGRESS → COMPLETED</a:t>
+              <a:rPr dirty="0"/>
+              <a:t>▸  Job status flow: PENDING </a:t>
+            </a:r>
+            <a:r>
+              <a:rPr lang="en-NZ" dirty="0"/>
+              <a:t>-&gt;</a:t>
+            </a:r>
+            <a:r>
+              <a:rPr dirty="0"/>
+              <a:t> ASSIGNED </a:t>
+            </a:r>
+            <a:r>
+              <a:rPr lang="en-NZ" dirty="0"/>
+              <a:t>-&gt;</a:t>
+            </a:r>
+            <a:r>
+              <a:rPr dirty="0"/>
+              <a:t> IN_PROGRESS </a:t>
+            </a:r>
+            <a:r>
+              <a:rPr lang="en-NZ" dirty="0"/>
+              <a:t>-&gt;</a:t>
+            </a:r>
+            <a:r>
+              <a:rPr dirty="0"/>
+              <a:t> COMPLETED</a:t>
             </a:r>
           </a:p>
           <a:p>
@@ -5160,7 +5049,24 @@
               </a:defRPr>
             </a:pPr>
             <a:r>
-              <a:t>▸  POST /api/jobs/:id/start and /api/jobs/:id/complete endpoints</a:t>
+              <a:rPr dirty="0"/>
+              <a:t>▸  POST /</a:t>
+            </a:r>
+            <a:r>
+              <a:rPr dirty="0" err="1"/>
+              <a:t>api</a:t>
+            </a:r>
+            <a:r>
+              <a:rPr dirty="0"/>
+              <a:t>/jobs/:id/start and /</a:t>
+            </a:r>
+            <a:r>
+              <a:rPr dirty="0" err="1"/>
+              <a:t>api</a:t>
+            </a:r>
+            <a:r>
+              <a:rPr dirty="0"/>
+              <a:t>/jobs/:id/complete endpoints</a:t>
             </a:r>
           </a:p>
           <a:p>
@@ -5175,6 +5081,7 @@
               </a:defRPr>
             </a:pPr>
             <a:r>
+              <a:rPr dirty="0"/>
               <a:t>▸  Department users see only jobs in their own department</a:t>
             </a:r>
           </a:p>
@@ -5190,7 +5097,16 @@
               </a:defRPr>
             </a:pPr>
             <a:r>
-              <a:t>▸  JobAdvisor and Admin can edit/delete jobs before work starts</a:t>
+              <a:rPr dirty="0"/>
+              <a:t>▸  </a:t>
+            </a:r>
+            <a:r>
+              <a:rPr dirty="0" err="1"/>
+              <a:t>JobAdvisor</a:t>
+            </a:r>
+            <a:r>
+              <a:rPr dirty="0"/>
+              <a:t> and Admin can edit/delete jobs before work starts</a:t>
             </a:r>
           </a:p>
           <a:p>
@@ -5205,6 +5121,7 @@
               </a:defRPr>
             </a:pPr>
             <a:r>
+              <a:rPr dirty="0"/>
               <a:t>▸  Time taken and completion comments recorded on job completion</a:t>
             </a:r>
           </a:p>
@@ -5219,7 +5136,7 @@
 </file>
 
 <file path=ppt/slides/slide12.xml><?xml version="1.0" encoding="utf-8"?>
-<p:sld xmlns:a="http://schemas.openxmlformats.org/drawingml/2006/main" xmlns:p="http://schemas.openxmlformats.org/presentationml/2006/main" xmlns:r="http://schemas.openxmlformats.org/officeDocument/2006/relationships">
+<p:sld xmlns:a="http://schemas.openxmlformats.org/drawingml/2006/main" xmlns:r="http://schemas.openxmlformats.org/officeDocument/2006/relationships" xmlns:p="http://schemas.openxmlformats.org/presentationml/2006/main">
   <p:cSld>
     <p:bg>
       <p:bgPr>
@@ -5235,7 +5152,14 @@
         <p:cNvGrpSpPr/>
         <p:nvPr/>
       </p:nvGrpSpPr>
-      <p:grpSpPr/>
+      <p:grpSpPr>
+        <a:xfrm>
+          <a:off x="0" y="0"/>
+          <a:ext cx="0" cy="0"/>
+          <a:chOff x="0" y="0"/>
+          <a:chExt cx="0" cy="0"/>
+        </a:xfrm>
+      </p:grpSpPr>
       <p:sp>
         <p:nvSpPr>
           <p:cNvPr id="2" name="Rectangle 1"/>
@@ -5276,6 +5200,7 @@
           <a:lstStyle/>
           <a:p>
             <a:pPr algn="ctr"/>
+            <a:endParaRPr/>
           </a:p>
         </p:txBody>
       </p:sp>
@@ -5319,6 +5244,7 @@
           <a:lstStyle/>
           <a:p>
             <a:pPr algn="ctr"/>
+            <a:endParaRPr/>
           </a:p>
         </p:txBody>
       </p:sp>
@@ -5362,6 +5288,7 @@
           <a:lstStyle/>
           <a:p>
             <a:pPr algn="ctr"/>
+            <a:endParaRPr/>
           </a:p>
         </p:txBody>
       </p:sp>
@@ -5440,6 +5367,7 @@
           <a:lstStyle/>
           <a:p>
             <a:pPr algn="ctr"/>
+            <a:endParaRPr/>
           </a:p>
         </p:txBody>
       </p:sp>
@@ -5451,8 +5379,8 @@
         </p:nvSpPr>
         <p:spPr>
           <a:xfrm>
-            <a:off x="7406640" y="237744"/>
-            <a:ext cx="1417320" cy="274320"/>
+            <a:off x="7667100" y="237744"/>
+            <a:ext cx="896399" cy="230832"/>
           </a:xfrm>
           <a:prstGeom prst="rect">
             <a:avLst/>
@@ -5473,7 +5401,16 @@
               </a:defRPr>
             </a:pPr>
             <a:r>
-              <a:t>02 — PROGRESS</a:t>
+              <a:rPr dirty="0"/>
+              <a:t>02 </a:t>
+            </a:r>
+            <a:r>
+              <a:rPr lang="en-NZ" dirty="0"/>
+              <a:t>-</a:t>
+            </a:r>
+            <a:r>
+              <a:rPr dirty="0"/>
+              <a:t> PROGRESS</a:t>
             </a:r>
           </a:p>
         </p:txBody>
@@ -5588,6 +5525,7 @@
           <a:lstStyle/>
           <a:p>
             <a:pPr algn="ctr"/>
+            <a:endParaRPr/>
           </a:p>
         </p:txBody>
       </p:sp>
@@ -5740,6 +5678,7 @@
           <a:lstStyle/>
           <a:p>
             <a:pPr algn="ctr"/>
+            <a:endParaRPr/>
           </a:p>
         </p:txBody>
       </p:sp>
@@ -5811,6 +5750,7 @@
           <a:lstStyle/>
           <a:p>
             <a:pPr algn="ctr"/>
+            <a:endParaRPr/>
           </a:p>
         </p:txBody>
       </p:sp>
@@ -5858,7 +5798,7 @@
 </file>
 
 <file path=ppt/slides/slide13.xml><?xml version="1.0" encoding="utf-8"?>
-<p:sld xmlns:a="http://schemas.openxmlformats.org/drawingml/2006/main" xmlns:p="http://schemas.openxmlformats.org/presentationml/2006/main" xmlns:r="http://schemas.openxmlformats.org/officeDocument/2006/relationships">
+<p:sld xmlns:a="http://schemas.openxmlformats.org/drawingml/2006/main" xmlns:r="http://schemas.openxmlformats.org/officeDocument/2006/relationships" xmlns:p="http://schemas.openxmlformats.org/presentationml/2006/main">
   <p:cSld>
     <p:bg>
       <p:bgPr>
@@ -5874,7 +5814,14 @@
         <p:cNvGrpSpPr/>
         <p:nvPr/>
       </p:nvGrpSpPr>
-      <p:grpSpPr/>
+      <p:grpSpPr>
+        <a:xfrm>
+          <a:off x="0" y="0"/>
+          <a:ext cx="0" cy="0"/>
+          <a:chOff x="0" y="0"/>
+          <a:chExt cx="0" cy="0"/>
+        </a:xfrm>
+      </p:grpSpPr>
       <p:sp>
         <p:nvSpPr>
           <p:cNvPr id="2" name="Rectangle 1"/>
@@ -5915,6 +5862,7 @@
           <a:lstStyle/>
           <a:p>
             <a:pPr algn="ctr"/>
+            <a:endParaRPr/>
           </a:p>
         </p:txBody>
       </p:sp>
@@ -5958,6 +5906,7 @@
           <a:lstStyle/>
           <a:p>
             <a:pPr algn="ctr"/>
+            <a:endParaRPr/>
           </a:p>
         </p:txBody>
       </p:sp>
@@ -6001,6 +5950,7 @@
           <a:lstStyle/>
           <a:p>
             <a:pPr algn="ctr"/>
+            <a:endParaRPr/>
           </a:p>
         </p:txBody>
       </p:sp>
@@ -6079,6 +6029,7 @@
           <a:lstStyle/>
           <a:p>
             <a:pPr algn="ctr"/>
+            <a:endParaRPr/>
           </a:p>
         </p:txBody>
       </p:sp>
@@ -6090,8 +6041,8 @@
         </p:nvSpPr>
         <p:spPr>
           <a:xfrm>
-            <a:off x="7406640" y="237744"/>
-            <a:ext cx="1417320" cy="274320"/>
+            <a:off x="7667100" y="237744"/>
+            <a:ext cx="896399" cy="230832"/>
           </a:xfrm>
           <a:prstGeom prst="rect">
             <a:avLst/>
@@ -6112,7 +6063,16 @@
               </a:defRPr>
             </a:pPr>
             <a:r>
-              <a:t>02 — PROGRESS</a:t>
+              <a:rPr dirty="0"/>
+              <a:t>02 </a:t>
+            </a:r>
+            <a:r>
+              <a:rPr lang="en-NZ" dirty="0"/>
+              <a:t>-</a:t>
+            </a:r>
+            <a:r>
+              <a:rPr dirty="0"/>
+              <a:t> PROGRESS</a:t>
             </a:r>
           </a:p>
         </p:txBody>
@@ -6227,6 +6187,7 @@
           <a:lstStyle/>
           <a:p>
             <a:pPr algn="ctr"/>
+            <a:endParaRPr/>
           </a:p>
         </p:txBody>
       </p:sp>
@@ -6379,6 +6340,7 @@
           <a:lstStyle/>
           <a:p>
             <a:pPr algn="ctr"/>
+            <a:endParaRPr/>
           </a:p>
         </p:txBody>
       </p:sp>
@@ -6504,7 +6466,7 @@
 </file>
 
 <file path=ppt/slides/slide14.xml><?xml version="1.0" encoding="utf-8"?>
-<p:sld xmlns:a="http://schemas.openxmlformats.org/drawingml/2006/main" xmlns:p="http://schemas.openxmlformats.org/presentationml/2006/main" xmlns:r="http://schemas.openxmlformats.org/officeDocument/2006/relationships">
+<p:sld xmlns:a="http://schemas.openxmlformats.org/drawingml/2006/main" xmlns:r="http://schemas.openxmlformats.org/officeDocument/2006/relationships" xmlns:p="http://schemas.openxmlformats.org/presentationml/2006/main">
   <p:cSld>
     <p:bg>
       <p:bgPr>
@@ -6520,7 +6482,14 @@
         <p:cNvGrpSpPr/>
         <p:nvPr/>
       </p:nvGrpSpPr>
-      <p:grpSpPr/>
+      <p:grpSpPr>
+        <a:xfrm>
+          <a:off x="0" y="0"/>
+          <a:ext cx="0" cy="0"/>
+          <a:chOff x="0" y="0"/>
+          <a:chExt cx="0" cy="0"/>
+        </a:xfrm>
+      </p:grpSpPr>
       <p:sp>
         <p:nvSpPr>
           <p:cNvPr id="2" name="Rectangle 1"/>
@@ -6561,6 +6530,7 @@
           <a:lstStyle/>
           <a:p>
             <a:pPr algn="ctr"/>
+            <a:endParaRPr/>
           </a:p>
         </p:txBody>
       </p:sp>
@@ -6604,6 +6574,7 @@
           <a:lstStyle/>
           <a:p>
             <a:pPr algn="ctr"/>
+            <a:endParaRPr/>
           </a:p>
         </p:txBody>
       </p:sp>
@@ -6647,6 +6618,7 @@
           <a:lstStyle/>
           <a:p>
             <a:pPr algn="ctr"/>
+            <a:endParaRPr/>
           </a:p>
         </p:txBody>
       </p:sp>
@@ -6725,6 +6697,7 @@
           <a:lstStyle/>
           <a:p>
             <a:pPr algn="ctr"/>
+            <a:endParaRPr/>
           </a:p>
         </p:txBody>
       </p:sp>
@@ -6736,8 +6709,8 @@
         </p:nvSpPr>
         <p:spPr>
           <a:xfrm>
-            <a:off x="7406640" y="237744"/>
-            <a:ext cx="1417320" cy="274320"/>
+            <a:off x="7667100" y="237744"/>
+            <a:ext cx="896399" cy="230832"/>
           </a:xfrm>
           <a:prstGeom prst="rect">
             <a:avLst/>
@@ -6758,7 +6731,16 @@
               </a:defRPr>
             </a:pPr>
             <a:r>
-              <a:t>02 — PROGRESS</a:t>
+              <a:rPr dirty="0"/>
+              <a:t>02 </a:t>
+            </a:r>
+            <a:r>
+              <a:rPr lang="en-NZ" dirty="0"/>
+              <a:t>-</a:t>
+            </a:r>
+            <a:r>
+              <a:rPr dirty="0"/>
+              <a:t> PROGRESS</a:t>
             </a:r>
           </a:p>
         </p:txBody>
@@ -6873,6 +6855,7 @@
           <a:lstStyle/>
           <a:p>
             <a:pPr algn="ctr"/>
+            <a:endParaRPr/>
           </a:p>
         </p:txBody>
       </p:sp>
@@ -7025,6 +7008,7 @@
           <a:lstStyle/>
           <a:p>
             <a:pPr algn="ctr"/>
+            <a:endParaRPr/>
           </a:p>
         </p:txBody>
       </p:sp>
@@ -7096,6 +7080,7 @@
           <a:lstStyle/>
           <a:p>
             <a:pPr algn="ctr"/>
+            <a:endParaRPr/>
           </a:p>
         </p:txBody>
       </p:sp>
@@ -7143,7 +7128,7 @@
 </file>
 
 <file path=ppt/slides/slide15.xml><?xml version="1.0" encoding="utf-8"?>
-<p:sld xmlns:a="http://schemas.openxmlformats.org/drawingml/2006/main" xmlns:p="http://schemas.openxmlformats.org/presentationml/2006/main" xmlns:r="http://schemas.openxmlformats.org/officeDocument/2006/relationships">
+<p:sld xmlns:a="http://schemas.openxmlformats.org/drawingml/2006/main" xmlns:r="http://schemas.openxmlformats.org/officeDocument/2006/relationships" xmlns:p="http://schemas.openxmlformats.org/presentationml/2006/main">
   <p:cSld>
     <p:bg>
       <p:bgPr>
@@ -7159,7 +7144,14 @@
         <p:cNvGrpSpPr/>
         <p:nvPr/>
       </p:nvGrpSpPr>
-      <p:grpSpPr/>
+      <p:grpSpPr>
+        <a:xfrm>
+          <a:off x="0" y="0"/>
+          <a:ext cx="0" cy="0"/>
+          <a:chOff x="0" y="0"/>
+          <a:chExt cx="0" cy="0"/>
+        </a:xfrm>
+      </p:grpSpPr>
       <p:sp>
         <p:nvSpPr>
           <p:cNvPr id="2" name="Rectangle 1"/>
@@ -7200,6 +7192,7 @@
           <a:lstStyle/>
           <a:p>
             <a:pPr algn="ctr"/>
+            <a:endParaRPr/>
           </a:p>
         </p:txBody>
       </p:sp>
@@ -7243,6 +7236,7 @@
           <a:lstStyle/>
           <a:p>
             <a:pPr algn="ctr"/>
+            <a:endParaRPr/>
           </a:p>
         </p:txBody>
       </p:sp>
@@ -7286,6 +7280,7 @@
           <a:lstStyle/>
           <a:p>
             <a:pPr algn="ctr"/>
+            <a:endParaRPr/>
           </a:p>
         </p:txBody>
       </p:sp>
@@ -7364,6 +7359,7 @@
           <a:lstStyle/>
           <a:p>
             <a:pPr algn="ctr"/>
+            <a:endParaRPr/>
           </a:p>
         </p:txBody>
       </p:sp>
@@ -7375,8 +7371,8 @@
         </p:nvSpPr>
         <p:spPr>
           <a:xfrm>
-            <a:off x="7406640" y="237744"/>
-            <a:ext cx="1417320" cy="274320"/>
+            <a:off x="7730418" y="237744"/>
+            <a:ext cx="769763" cy="230832"/>
           </a:xfrm>
           <a:prstGeom prst="rect">
             <a:avLst/>
@@ -7397,7 +7393,16 @@
               </a:defRPr>
             </a:pPr>
             <a:r>
-              <a:t>03 — FUTURE</a:t>
+              <a:rPr dirty="0"/>
+              <a:t>03 </a:t>
+            </a:r>
+            <a:r>
+              <a:rPr lang="en-NZ" dirty="0"/>
+              <a:t>-</a:t>
+            </a:r>
+            <a:r>
+              <a:rPr dirty="0"/>
+              <a:t> FUTURE</a:t>
             </a:r>
           </a:p>
         </p:txBody>
@@ -7446,7 +7451,7 @@
         <p:spPr>
           <a:xfrm>
             <a:off x="1051560" y="594360"/>
-            <a:ext cx="6400800" cy="320040"/>
+            <a:ext cx="3356945" cy="276999"/>
           </a:xfrm>
           <a:prstGeom prst="rect">
             <a:avLst/>
@@ -7467,7 +7472,16 @@
               </a:defRPr>
             </a:pPr>
             <a:r>
-              <a:t>Items Not Completed — Post-Project Enhancements</a:t>
+              <a:rPr dirty="0"/>
+              <a:t>Items Not Completed </a:t>
+            </a:r>
+            <a:r>
+              <a:rPr lang="en-NZ" dirty="0"/>
+              <a:t>-</a:t>
+            </a:r>
+            <a:r>
+              <a:rPr dirty="0"/>
+              <a:t> Post-Project Enhancements</a:t>
             </a:r>
           </a:p>
         </p:txBody>
@@ -7512,6 +7526,7 @@
           <a:lstStyle/>
           <a:p>
             <a:pPr algn="ctr"/>
+            <a:endParaRPr/>
           </a:p>
         </p:txBody>
       </p:sp>
@@ -7664,6 +7679,7 @@
           <a:lstStyle/>
           <a:p>
             <a:pPr algn="ctr"/>
+            <a:endParaRPr/>
           </a:p>
         </p:txBody>
       </p:sp>
@@ -7686,9 +7702,27 @@
                 <a:tableStyleId>{5C22544A-7EE6-4342-B048-85BDC9FD1C3A}</a:tableStyleId>
               </a:tblPr>
               <a:tblGrid>
-                <a:gridCol w="2011680"/>
-                <a:gridCol w="4389120"/>
-                <a:gridCol w="1371600"/>
+                <a:gridCol w="2011680">
+                  <a:extLst>
+                    <a:ext uri="{9D8B030D-6E8A-4147-A177-3AD203B41FA5}">
+                      <a16:colId xmlns:a16="http://schemas.microsoft.com/office/drawing/2014/main" val="20000"/>
+                    </a:ext>
+                  </a:extLst>
+                </a:gridCol>
+                <a:gridCol w="4389120">
+                  <a:extLst>
+                    <a:ext uri="{9D8B030D-6E8A-4147-A177-3AD203B41FA5}">
+                      <a16:colId xmlns:a16="http://schemas.microsoft.com/office/drawing/2014/main" val="20001"/>
+                    </a:ext>
+                  </a:extLst>
+                </a:gridCol>
+                <a:gridCol w="1371600">
+                  <a:extLst>
+                    <a:ext uri="{9D8B030D-6E8A-4147-A177-3AD203B41FA5}">
+                      <a16:colId xmlns:a16="http://schemas.microsoft.com/office/drawing/2014/main" val="20002"/>
+                    </a:ext>
+                  </a:extLst>
+                </a:gridCol>
               </a:tblGrid>
               <a:tr h="411480">
                 <a:tc>
@@ -7760,6 +7794,11 @@
                     </a:solidFill>
                   </a:tcPr>
                 </a:tc>
+                <a:extLst>
+                  <a:ext uri="{0D108BD9-81ED-4DB2-BD59-A6C34878D82A}">
+                    <a16:rowId xmlns:a16="http://schemas.microsoft.com/office/drawing/2014/main" val="10000"/>
+                  </a:ext>
+                </a:extLst>
               </a:tr>
               <a:tr h="411480">
                 <a:tc>
@@ -7831,6 +7870,11 @@
                     </a:solidFill>
                   </a:tcPr>
                 </a:tc>
+                <a:extLst>
+                  <a:ext uri="{0D108BD9-81ED-4DB2-BD59-A6C34878D82A}">
+                    <a16:rowId xmlns:a16="http://schemas.microsoft.com/office/drawing/2014/main" val="10001"/>
+                  </a:ext>
+                </a:extLst>
               </a:tr>
               <a:tr h="411480">
                 <a:tc>
@@ -7902,6 +7946,11 @@
                     </a:solidFill>
                   </a:tcPr>
                 </a:tc>
+                <a:extLst>
+                  <a:ext uri="{0D108BD9-81ED-4DB2-BD59-A6C34878D82A}">
+                    <a16:rowId xmlns:a16="http://schemas.microsoft.com/office/drawing/2014/main" val="10002"/>
+                  </a:ext>
+                </a:extLst>
               </a:tr>
               <a:tr h="411480">
                 <a:tc>
@@ -7973,6 +8022,11 @@
                     </a:solidFill>
                   </a:tcPr>
                 </a:tc>
+                <a:extLst>
+                  <a:ext uri="{0D108BD9-81ED-4DB2-BD59-A6C34878D82A}">
+                    <a16:rowId xmlns:a16="http://schemas.microsoft.com/office/drawing/2014/main" val="10003"/>
+                  </a:ext>
+                </a:extLst>
               </a:tr>
               <a:tr h="411480">
                 <a:tc>
@@ -8044,6 +8098,11 @@
                     </a:solidFill>
                   </a:tcPr>
                 </a:tc>
+                <a:extLst>
+                  <a:ext uri="{0D108BD9-81ED-4DB2-BD59-A6C34878D82A}">
+                    <a16:rowId xmlns:a16="http://schemas.microsoft.com/office/drawing/2014/main" val="10004"/>
+                  </a:ext>
+                </a:extLst>
               </a:tr>
               <a:tr h="411480">
                 <a:tc>
@@ -8115,6 +8174,11 @@
                     </a:solidFill>
                   </a:tcPr>
                 </a:tc>
+                <a:extLst>
+                  <a:ext uri="{0D108BD9-81ED-4DB2-BD59-A6C34878D82A}">
+                    <a16:rowId xmlns:a16="http://schemas.microsoft.com/office/drawing/2014/main" val="10005"/>
+                  </a:ext>
+                </a:extLst>
               </a:tr>
             </a:tbl>
           </a:graphicData>
@@ -8129,7 +8193,7 @@
 </file>
 
 <file path=ppt/slides/slide16.xml><?xml version="1.0" encoding="utf-8"?>
-<p:sld xmlns:a="http://schemas.openxmlformats.org/drawingml/2006/main" xmlns:p="http://schemas.openxmlformats.org/presentationml/2006/main" xmlns:r="http://schemas.openxmlformats.org/officeDocument/2006/relationships">
+<p:sld xmlns:a="http://schemas.openxmlformats.org/drawingml/2006/main" xmlns:r="http://schemas.openxmlformats.org/officeDocument/2006/relationships" xmlns:p="http://schemas.openxmlformats.org/presentationml/2006/main">
   <p:cSld>
     <p:bg>
       <p:bgPr>
@@ -8145,7 +8209,14 @@
         <p:cNvGrpSpPr/>
         <p:nvPr/>
       </p:nvGrpSpPr>
-      <p:grpSpPr/>
+      <p:grpSpPr>
+        <a:xfrm>
+          <a:off x="0" y="0"/>
+          <a:ext cx="0" cy="0"/>
+          <a:chOff x="0" y="0"/>
+          <a:chExt cx="0" cy="0"/>
+        </a:xfrm>
+      </p:grpSpPr>
       <p:sp>
         <p:nvSpPr>
           <p:cNvPr id="2" name="Rectangle 1"/>
@@ -8186,6 +8257,7 @@
           <a:lstStyle/>
           <a:p>
             <a:pPr algn="ctr"/>
+            <a:endParaRPr/>
           </a:p>
         </p:txBody>
       </p:sp>
@@ -8229,6 +8301,7 @@
           <a:lstStyle/>
           <a:p>
             <a:pPr algn="ctr"/>
+            <a:endParaRPr/>
           </a:p>
         </p:txBody>
       </p:sp>
@@ -8272,6 +8345,7 @@
           <a:lstStyle/>
           <a:p>
             <a:pPr algn="ctr"/>
+            <a:endParaRPr/>
           </a:p>
         </p:txBody>
       </p:sp>
@@ -8350,6 +8424,7 @@
           <a:lstStyle/>
           <a:p>
             <a:pPr algn="ctr"/>
+            <a:endParaRPr/>
           </a:p>
         </p:txBody>
       </p:sp>
@@ -8361,8 +8436,8 @@
         </p:nvSpPr>
         <p:spPr>
           <a:xfrm>
-            <a:off x="7406640" y="237744"/>
-            <a:ext cx="1417320" cy="274320"/>
+            <a:off x="7614201" y="237744"/>
+            <a:ext cx="1002197" cy="230832"/>
           </a:xfrm>
           <a:prstGeom prst="rect">
             <a:avLst/>
@@ -8383,7 +8458,16 @@
               </a:defRPr>
             </a:pPr>
             <a:r>
-              <a:t>03 — CHALLENGES</a:t>
+              <a:rPr dirty="0"/>
+              <a:t>03 </a:t>
+            </a:r>
+            <a:r>
+              <a:rPr lang="en-NZ" dirty="0"/>
+              <a:t>-</a:t>
+            </a:r>
+            <a:r>
+              <a:rPr dirty="0"/>
+              <a:t> CHALLENGES</a:t>
             </a:r>
           </a:p>
         </p:txBody>
@@ -8432,7 +8516,7 @@
         <p:spPr>
           <a:xfrm>
             <a:off x="1051560" y="594360"/>
-            <a:ext cx="6400800" cy="320040"/>
+            <a:ext cx="4157164" cy="276999"/>
           </a:xfrm>
           <a:prstGeom prst="rect">
             <a:avLst/>
@@ -8453,7 +8537,16 @@
               </a:defRPr>
             </a:pPr>
             <a:r>
-              <a:t>Phase 2 Technical Challenges — All Resolved (Sommerville, 2016)</a:t>
+              <a:rPr dirty="0"/>
+              <a:t>Phase 2 Technical Challenges </a:t>
+            </a:r>
+            <a:r>
+              <a:rPr lang="en-NZ" dirty="0"/>
+              <a:t>-</a:t>
+            </a:r>
+            <a:r>
+              <a:rPr dirty="0"/>
+              <a:t> All Resolved (Sommerville, 2016)</a:t>
             </a:r>
           </a:p>
         </p:txBody>
@@ -8498,6 +8591,7 @@
           <a:lstStyle/>
           <a:p>
             <a:pPr algn="ctr"/>
+            <a:endParaRPr/>
           </a:p>
         </p:txBody>
       </p:sp>
@@ -8650,6 +8744,7 @@
           <a:lstStyle/>
           <a:p>
             <a:pPr algn="ctr"/>
+            <a:endParaRPr/>
           </a:p>
         </p:txBody>
       </p:sp>
@@ -8693,6 +8788,7 @@
           <a:lstStyle/>
           <a:p>
             <a:pPr algn="ctr"/>
+            <a:endParaRPr/>
           </a:p>
         </p:txBody>
       </p:sp>
@@ -8771,6 +8867,7 @@
           <a:lstStyle/>
           <a:p>
             <a:pPr algn="ctr"/>
+            <a:endParaRPr/>
           </a:p>
         </p:txBody>
       </p:sp>
@@ -8818,7 +8915,7 @@
         <p:spPr>
           <a:xfrm>
             <a:off x="685800" y="1737360"/>
-            <a:ext cx="3657600" cy="4389120"/>
+            <a:ext cx="3657600" cy="2303195"/>
           </a:xfrm>
           <a:prstGeom prst="rect">
             <a:avLst/>
@@ -8842,7 +8939,24 @@
               </a:defRPr>
             </a:pPr>
             <a:r>
-              <a:t>▸  AI JSON parsing — markdown-wrapped responses broke JSON.parse()</a:t>
+              <a:rPr dirty="0"/>
+              <a:t>▸  AI JSON parsing </a:t>
+            </a:r>
+            <a:r>
+              <a:rPr lang="en-NZ" dirty="0"/>
+              <a:t>-</a:t>
+            </a:r>
+            <a:r>
+              <a:rPr dirty="0"/>
+              <a:t> markdown-wrapped responses broke </a:t>
+            </a:r>
+            <a:r>
+              <a:rPr dirty="0" err="1"/>
+              <a:t>JSON.parse</a:t>
+            </a:r>
+            <a:r>
+              <a:rPr dirty="0"/>
+              <a:t>()</a:t>
             </a:r>
           </a:p>
           <a:p>
@@ -8857,6 +8971,7 @@
               </a:defRPr>
             </a:pPr>
             <a:r>
+              <a:rPr dirty="0"/>
               <a:t>▸  Invalid department codes from AI output</a:t>
             </a:r>
           </a:p>
@@ -8872,6 +8987,7 @@
               </a:defRPr>
             </a:pPr>
             <a:r>
+              <a:rPr dirty="0"/>
               <a:t>▸  DeepSeek API subscription quota exhausted (HTTP 402/429)</a:t>
             </a:r>
           </a:p>
@@ -8887,6 +9003,7 @@
               </a:defRPr>
             </a:pPr>
             <a:r>
+              <a:rPr dirty="0"/>
               <a:t>▸  Database migration sync issues during schema updates</a:t>
             </a:r>
           </a:p>
@@ -8902,6 +9019,7 @@
               </a:defRPr>
             </a:pPr>
             <a:r>
+              <a:rPr dirty="0"/>
               <a:t>▸  Cross-module integration bugs between new modules</a:t>
             </a:r>
           </a:p>
@@ -9014,7 +9132,7 @@
 </file>
 
 <file path=ppt/slides/slide17.xml><?xml version="1.0" encoding="utf-8"?>
-<p:sld xmlns:a="http://schemas.openxmlformats.org/drawingml/2006/main" xmlns:p="http://schemas.openxmlformats.org/presentationml/2006/main" xmlns:r="http://schemas.openxmlformats.org/officeDocument/2006/relationships">
+<p:sld xmlns:a="http://schemas.openxmlformats.org/drawingml/2006/main" xmlns:r="http://schemas.openxmlformats.org/officeDocument/2006/relationships" xmlns:p="http://schemas.openxmlformats.org/presentationml/2006/main">
   <p:cSld>
     <p:bg>
       <p:bgPr>
@@ -9030,7 +9148,14 @@
         <p:cNvGrpSpPr/>
         <p:nvPr/>
       </p:nvGrpSpPr>
-      <p:grpSpPr/>
+      <p:grpSpPr>
+        <a:xfrm>
+          <a:off x="0" y="0"/>
+          <a:ext cx="0" cy="0"/>
+          <a:chOff x="0" y="0"/>
+          <a:chExt cx="0" cy="0"/>
+        </a:xfrm>
+      </p:grpSpPr>
       <p:sp>
         <p:nvSpPr>
           <p:cNvPr id="2" name="Rectangle 1"/>
@@ -9071,6 +9196,7 @@
           <a:lstStyle/>
           <a:p>
             <a:pPr algn="ctr"/>
+            <a:endParaRPr/>
           </a:p>
         </p:txBody>
       </p:sp>
@@ -9114,6 +9240,7 @@
           <a:lstStyle/>
           <a:p>
             <a:pPr algn="ctr"/>
+            <a:endParaRPr/>
           </a:p>
         </p:txBody>
       </p:sp>
@@ -9157,6 +9284,7 @@
           <a:lstStyle/>
           <a:p>
             <a:pPr algn="ctr"/>
+            <a:endParaRPr/>
           </a:p>
         </p:txBody>
       </p:sp>
@@ -9235,6 +9363,7 @@
           <a:lstStyle/>
           <a:p>
             <a:pPr algn="ctr"/>
+            <a:endParaRPr/>
           </a:p>
         </p:txBody>
       </p:sp>
@@ -9246,8 +9375,8 @@
         </p:nvSpPr>
         <p:spPr>
           <a:xfrm>
-            <a:off x="7406640" y="237744"/>
-            <a:ext cx="1417320" cy="274320"/>
+            <a:off x="7736831" y="237744"/>
+            <a:ext cx="756938" cy="230832"/>
           </a:xfrm>
           <a:prstGeom prst="rect">
             <a:avLst/>
@@ -9268,7 +9397,16 @@
               </a:defRPr>
             </a:pPr>
             <a:r>
-              <a:t>04 — STATUS</a:t>
+              <a:rPr dirty="0"/>
+              <a:t>04 </a:t>
+            </a:r>
+            <a:r>
+              <a:rPr lang="en-NZ" dirty="0"/>
+              <a:t>-</a:t>
+            </a:r>
+            <a:r>
+              <a:rPr dirty="0"/>
+              <a:t> STATUS</a:t>
             </a:r>
           </a:p>
         </p:txBody>
@@ -9282,7 +9420,7 @@
         <p:spPr>
           <a:xfrm>
             <a:off x="1051560" y="137160"/>
-            <a:ext cx="6400800" cy="502920"/>
+            <a:ext cx="5212902" cy="461665"/>
           </a:xfrm>
           <a:prstGeom prst="rect">
             <a:avLst/>
@@ -9303,7 +9441,16 @@
               </a:defRPr>
             </a:pPr>
             <a:r>
-              <a:t>Project Status — Development Complete</a:t>
+              <a:rPr dirty="0"/>
+              <a:t>Project Status </a:t>
+            </a:r>
+            <a:r>
+              <a:rPr lang="en-NZ" dirty="0"/>
+              <a:t>-</a:t>
+            </a:r>
+            <a:r>
+              <a:rPr dirty="0"/>
+              <a:t> Development Complete</a:t>
             </a:r>
           </a:p>
         </p:txBody>
@@ -9383,6 +9530,7 @@
           <a:lstStyle/>
           <a:p>
             <a:pPr algn="ctr"/>
+            <a:endParaRPr/>
           </a:p>
         </p:txBody>
       </p:sp>
@@ -9535,6 +9683,7 @@
           <a:lstStyle/>
           <a:p>
             <a:pPr algn="ctr"/>
+            <a:endParaRPr/>
           </a:p>
         </p:txBody>
       </p:sp>
@@ -9580,6 +9729,7 @@
           <a:lstStyle/>
           <a:p>
             <a:pPr algn="ctr"/>
+            <a:endParaRPr/>
           </a:p>
         </p:txBody>
       </p:sp>
@@ -9627,7 +9777,7 @@
         <p:spPr>
           <a:xfrm>
             <a:off x="777240" y="2011680"/>
-            <a:ext cx="7589520" cy="2926080"/>
+            <a:ext cx="7589520" cy="1631216"/>
           </a:xfrm>
           <a:prstGeom prst="rect">
             <a:avLst/>
@@ -9651,6 +9801,7 @@
               </a:defRPr>
             </a:pPr>
             <a:r>
+              <a:rPr dirty="0"/>
               <a:t>▸  All Phase 1 (Report 1) and Phase 2 (Report 2) modules delivered and tested.</a:t>
             </a:r>
           </a:p>
@@ -9666,7 +9817,48 @@
               </a:defRPr>
             </a:pPr>
             <a:r>
-              <a:t>▸  End-to-end workflow verified: customer → vehicle → complaint → AI → job → complete.</a:t>
+              <a:rPr dirty="0"/>
+              <a:t>▸  End-to-end workflow verified: customer </a:t>
+            </a:r>
+            <a:r>
+              <a:rPr lang="en-NZ" dirty="0"/>
+              <a:t>-&gt;</a:t>
+            </a:r>
+            <a:r>
+              <a:rPr dirty="0"/>
+              <a:t> vehicle </a:t>
+            </a:r>
+            <a:r>
+              <a:rPr lang="en-NZ" dirty="0"/>
+              <a:t>-&gt;</a:t>
+            </a:r>
+            <a:r>
+              <a:rPr dirty="0"/>
+              <a:t> complaint </a:t>
+            </a:r>
+            <a:r>
+              <a:rPr lang="en-NZ" dirty="0"/>
+              <a:t>-&gt;</a:t>
+            </a:r>
+            <a:r>
+              <a:rPr dirty="0"/>
+              <a:t> AI </a:t>
+            </a:r>
+            <a:r>
+              <a:rPr lang="en-NZ" dirty="0"/>
+              <a:t>-&gt;</a:t>
+            </a:r>
+            <a:r>
+              <a:rPr dirty="0"/>
+              <a:t> job </a:t>
+            </a:r>
+            <a:r>
+              <a:rPr lang="en-NZ" dirty="0"/>
+              <a:t>-&gt;</a:t>
+            </a:r>
+            <a:r>
+              <a:rPr dirty="0"/>
+              <a:t> complete.</a:t>
             </a:r>
           </a:p>
           <a:p>
@@ -9681,6 +9873,7 @@
               </a:defRPr>
             </a:pPr>
             <a:r>
+              <a:rPr dirty="0"/>
               <a:t>▸  System demonstrable locally with seed accounts (admin@autorepair.com / Password123!).</a:t>
             </a:r>
           </a:p>
@@ -9696,6 +9889,7 @@
               </a:defRPr>
             </a:pPr>
             <a:r>
+              <a:rPr dirty="0"/>
               <a:t>▸  Future work (deployment, multilingual, notifications) documented as recommendations.</a:t>
             </a:r>
           </a:p>
@@ -9711,7 +9905,16 @@
               </a:defRPr>
             </a:pPr>
             <a:r>
-              <a:t>▸  This is the final progress report for the AutoRepairAgent college project.</a:t>
+              <a:rPr dirty="0"/>
+              <a:t>▸  This is the final progress report for the </a:t>
+            </a:r>
+            <a:r>
+              <a:rPr dirty="0" err="1"/>
+              <a:t>AutoRepairAgent</a:t>
+            </a:r>
+            <a:r>
+              <a:rPr dirty="0"/>
+              <a:t> college project.</a:t>
             </a:r>
           </a:p>
         </p:txBody>
@@ -9760,6 +9963,7 @@
           <a:lstStyle/>
           <a:p>
             <a:pPr algn="ctr"/>
+            <a:endParaRPr/>
           </a:p>
         </p:txBody>
       </p:sp>
@@ -9807,7 +10011,7 @@
         <p:spPr>
           <a:xfrm>
             <a:off x="914400" y="5440680"/>
-            <a:ext cx="7315200" cy="640080"/>
+            <a:ext cx="7564443" cy="276999"/>
           </a:xfrm>
           <a:prstGeom prst="rect">
             <a:avLst/>
@@ -9828,7 +10032,16 @@
               </a:defRPr>
             </a:pPr>
             <a:r>
-              <a:t>Report 1: Foundation (DB, Auth, Admin, UI)  →  Report 2: Business Logic (Customer, Vehicle, AI Jobs, Assignment, Logs)</a:t>
+              <a:rPr dirty="0"/>
+              <a:t>Report 1: Foundation (DB, Auth, Admin, UI)  </a:t>
+            </a:r>
+            <a:r>
+              <a:rPr lang="en-NZ" dirty="0"/>
+              <a:t>-&gt;</a:t>
+            </a:r>
+            <a:r>
+              <a:rPr dirty="0"/>
+              <a:t>  Report 2: Business Logic (Customer, Vehicle, AI Jobs, Assignment, Logs)</a:t>
             </a:r>
           </a:p>
         </p:txBody>
@@ -9842,7 +10055,7 @@
 </file>
 
 <file path=ppt/slides/slide18.xml><?xml version="1.0" encoding="utf-8"?>
-<p:sld xmlns:a="http://schemas.openxmlformats.org/drawingml/2006/main" xmlns:p="http://schemas.openxmlformats.org/presentationml/2006/main" xmlns:r="http://schemas.openxmlformats.org/officeDocument/2006/relationships">
+<p:sld xmlns:a="http://schemas.openxmlformats.org/drawingml/2006/main" xmlns:r="http://schemas.openxmlformats.org/officeDocument/2006/relationships" xmlns:p="http://schemas.openxmlformats.org/presentationml/2006/main">
   <p:cSld>
     <p:bg>
       <p:bgPr>
@@ -9858,7 +10071,14 @@
         <p:cNvGrpSpPr/>
         <p:nvPr/>
       </p:nvGrpSpPr>
-      <p:grpSpPr/>
+      <p:grpSpPr>
+        <a:xfrm>
+          <a:off x="0" y="0"/>
+          <a:ext cx="0" cy="0"/>
+          <a:chOff x="0" y="0"/>
+          <a:chExt cx="0" cy="0"/>
+        </a:xfrm>
+      </p:grpSpPr>
       <p:sp>
         <p:nvSpPr>
           <p:cNvPr id="2" name="Rectangle 1"/>
@@ -9899,6 +10119,7 @@
           <a:lstStyle/>
           <a:p>
             <a:pPr algn="ctr"/>
+            <a:endParaRPr/>
           </a:p>
         </p:txBody>
       </p:sp>
@@ -9942,6 +10163,7 @@
           <a:lstStyle/>
           <a:p>
             <a:pPr algn="ctr"/>
+            <a:endParaRPr/>
           </a:p>
         </p:txBody>
       </p:sp>
@@ -9985,6 +10207,7 @@
           <a:lstStyle/>
           <a:p>
             <a:pPr algn="ctr"/>
+            <a:endParaRPr/>
           </a:p>
         </p:txBody>
       </p:sp>
@@ -10063,6 +10286,7 @@
           <a:lstStyle/>
           <a:p>
             <a:pPr algn="ctr"/>
+            <a:endParaRPr/>
           </a:p>
         </p:txBody>
       </p:sp>
@@ -10074,8 +10298,8 @@
         </p:nvSpPr>
         <p:spPr>
           <a:xfrm>
-            <a:off x="7406640" y="237744"/>
-            <a:ext cx="1417320" cy="274320"/>
+            <a:off x="7624620" y="237744"/>
+            <a:ext cx="981359" cy="230832"/>
           </a:xfrm>
           <a:prstGeom prst="rect">
             <a:avLst/>
@@ -10096,7 +10320,16 @@
               </a:defRPr>
             </a:pPr>
             <a:r>
-              <a:t>04 — WORKFLOW</a:t>
+              <a:rPr dirty="0"/>
+              <a:t>04 </a:t>
+            </a:r>
+            <a:r>
+              <a:rPr lang="en-NZ" dirty="0"/>
+              <a:t>-</a:t>
+            </a:r>
+            <a:r>
+              <a:rPr dirty="0"/>
+              <a:t> WORKFLOW</a:t>
             </a:r>
           </a:p>
         </p:txBody>
@@ -10145,7 +10378,7 @@
         <p:spPr>
           <a:xfrm>
             <a:off x="1051560" y="594360"/>
-            <a:ext cx="6400800" cy="320040"/>
+            <a:ext cx="2969083" cy="276999"/>
           </a:xfrm>
           <a:prstGeom prst="rect">
             <a:avLst/>
@@ -10166,7 +10399,16 @@
               </a:defRPr>
             </a:pPr>
             <a:r>
-              <a:t>Complete Repair Process — Phase 2 Delivered</a:t>
+              <a:rPr dirty="0"/>
+              <a:t>Complete Repair Process </a:t>
+            </a:r>
+            <a:r>
+              <a:rPr lang="en-NZ" dirty="0"/>
+              <a:t>-</a:t>
+            </a:r>
+            <a:r>
+              <a:rPr dirty="0"/>
+              <a:t> Phase 2 Delivered</a:t>
             </a:r>
           </a:p>
         </p:txBody>
@@ -10211,6 +10453,7 @@
           <a:lstStyle/>
           <a:p>
             <a:pPr algn="ctr"/>
+            <a:endParaRPr/>
           </a:p>
         </p:txBody>
       </p:sp>
@@ -10363,6 +10606,7 @@
           <a:lstStyle/>
           <a:p>
             <a:pPr algn="ctr"/>
+            <a:endParaRPr/>
           </a:p>
         </p:txBody>
       </p:sp>
@@ -10434,6 +10678,7 @@
           <a:lstStyle/>
           <a:p>
             <a:pPr algn="ctr"/>
+            <a:endParaRPr/>
           </a:p>
         </p:txBody>
       </p:sp>
@@ -10481,7 +10726,7 @@
 </file>
 
 <file path=ppt/slides/slide19.xml><?xml version="1.0" encoding="utf-8"?>
-<p:sld xmlns:a="http://schemas.openxmlformats.org/drawingml/2006/main" xmlns:p="http://schemas.openxmlformats.org/presentationml/2006/main" xmlns:r="http://schemas.openxmlformats.org/officeDocument/2006/relationships">
+<p:sld xmlns:a="http://schemas.openxmlformats.org/drawingml/2006/main" xmlns:r="http://schemas.openxmlformats.org/officeDocument/2006/relationships" xmlns:p="http://schemas.openxmlformats.org/presentationml/2006/main">
   <p:cSld>
     <p:bg>
       <p:bgPr>
@@ -10497,7 +10742,14 @@
         <p:cNvGrpSpPr/>
         <p:nvPr/>
       </p:nvGrpSpPr>
-      <p:grpSpPr/>
+      <p:grpSpPr>
+        <a:xfrm>
+          <a:off x="0" y="0"/>
+          <a:ext cx="0" cy="0"/>
+          <a:chOff x="0" y="0"/>
+          <a:chExt cx="0" cy="0"/>
+        </a:xfrm>
+      </p:grpSpPr>
       <p:sp>
         <p:nvSpPr>
           <p:cNvPr id="2" name="Rectangle 1"/>
@@ -10538,6 +10790,7 @@
           <a:lstStyle/>
           <a:p>
             <a:pPr algn="ctr"/>
+            <a:endParaRPr/>
           </a:p>
         </p:txBody>
       </p:sp>
@@ -10581,6 +10834,7 @@
           <a:lstStyle/>
           <a:p>
             <a:pPr algn="ctr"/>
+            <a:endParaRPr/>
           </a:p>
         </p:txBody>
       </p:sp>
@@ -10624,6 +10878,7 @@
           <a:lstStyle/>
           <a:p>
             <a:pPr algn="ctr"/>
+            <a:endParaRPr/>
           </a:p>
         </p:txBody>
       </p:sp>
@@ -10702,6 +10957,7 @@
           <a:lstStyle/>
           <a:p>
             <a:pPr algn="ctr"/>
+            <a:endParaRPr/>
           </a:p>
         </p:txBody>
       </p:sp>
@@ -10713,8 +10969,8 @@
         </p:nvSpPr>
         <p:spPr>
           <a:xfrm>
-            <a:off x="7406640" y="237744"/>
-            <a:ext cx="1417320" cy="274320"/>
+            <a:off x="7622216" y="237744"/>
+            <a:ext cx="986167" cy="230832"/>
           </a:xfrm>
           <a:prstGeom prst="rect">
             <a:avLst/>
@@ -10735,7 +10991,16 @@
               </a:defRPr>
             </a:pPr>
             <a:r>
-              <a:t>02 — PROGRESS</a:t>
+              <a:rPr dirty="0"/>
+              <a:t>05 </a:t>
+            </a:r>
+            <a:r>
+              <a:rPr lang="en-NZ" dirty="0"/>
+              <a:t>-</a:t>
+            </a:r>
+            <a:r>
+              <a:rPr dirty="0"/>
+              <a:t> REFERENCES</a:t>
             </a:r>
           </a:p>
         </p:txBody>
@@ -10770,7 +11035,7 @@
               </a:defRPr>
             </a:pPr>
             <a:r>
-              <a:t>System Screenshots Summary</a:t>
+              <a:t>References</a:t>
             </a:r>
           </a:p>
         </p:txBody>
@@ -10784,7 +11049,7 @@
         <p:spPr>
           <a:xfrm>
             <a:off x="1051560" y="594360"/>
-            <a:ext cx="6400800" cy="320040"/>
+            <a:ext cx="2040559" cy="276999"/>
           </a:xfrm>
           <a:prstGeom prst="rect">
             <a:avLst/>
@@ -10805,7 +11070,16 @@
               </a:defRPr>
             </a:pPr>
             <a:r>
-              <a:t>Phase 2 UI Evidence — Figures 2 to 6</a:t>
+              <a:rPr dirty="0"/>
+              <a:t>APA 7th Edition </a:t>
+            </a:r>
+            <a:r>
+              <a:rPr lang="en-NZ" dirty="0"/>
+              <a:t>-</a:t>
+            </a:r>
+            <a:r>
+              <a:rPr dirty="0"/>
+              <a:t> Bibliography</a:t>
             </a:r>
           </a:p>
         </p:txBody>
@@ -10850,6 +11124,7 @@
           <a:lstStyle/>
           <a:p>
             <a:pPr algn="ctr"/>
+            <a:endParaRPr/>
           </a:p>
         </p:txBody>
       </p:sp>
@@ -10896,8 +11171,8 @@
         </p:nvSpPr>
         <p:spPr>
           <a:xfrm>
-            <a:off x="3200400" y="6537960"/>
-            <a:ext cx="2743200" cy="274320"/>
+            <a:off x="7772400" y="6537960"/>
+            <a:ext cx="914400" cy="274320"/>
           </a:xfrm>
           <a:prstGeom prst="rect">
             <a:avLst/>
@@ -10910,41 +11185,6 @@
           </a:bodyPr>
           <a:lstStyle/>
           <a:p>
-            <a:pPr algn="ctr">
-              <a:defRPr sz="900" b="0" i="0">
-                <a:solidFill>
-                  <a:srgbClr val="BDBDBD"/>
-                </a:solidFill>
-              </a:defRPr>
-            </a:pPr>
-            <a:r>
-              <a:t>Screenshots</a:t>
-            </a:r>
-          </a:p>
-        </p:txBody>
-      </p:sp>
-      <p:sp>
-        <p:nvSpPr>
-          <p:cNvPr id="13" name="TextBox 12"/>
-          <p:cNvSpPr txBox="1"/>
-          <p:nvPr/>
-        </p:nvSpPr>
-        <p:spPr>
-          <a:xfrm>
-            <a:off x="7772400" y="6537960"/>
-            <a:ext cx="914400" cy="274320"/>
-          </a:xfrm>
-          <a:prstGeom prst="rect">
-            <a:avLst/>
-          </a:prstGeom>
-          <a:noFill/>
-        </p:spPr>
-        <p:txBody>
-          <a:bodyPr wrap="none">
-            <a:spAutoFit/>
-          </a:bodyPr>
-          <a:lstStyle/>
-          <a:p>
             <a:pPr algn="r">
               <a:defRPr sz="900" b="1" i="0">
                 <a:solidFill>
@@ -10953,14 +11193,14 @@
               </a:defRPr>
             </a:pPr>
             <a:r>
-              <a:t>19</a:t>
-            </a:r>
-          </a:p>
-        </p:txBody>
-      </p:sp>
-      <p:sp>
-        <p:nvSpPr>
-          <p:cNvPr id="14" name="Rounded Rectangle 13"/>
+              <a:t>20</a:t>
+            </a:r>
+          </a:p>
+        </p:txBody>
+      </p:sp>
+      <p:sp>
+        <p:nvSpPr>
+          <p:cNvPr id="13" name="Rounded Rectangle 12"/>
           <p:cNvSpPr/>
           <p:nvPr/>
         </p:nvSpPr>
@@ -11002,12 +11242,700 @@
           <a:lstStyle/>
           <a:p>
             <a:pPr algn="ctr"/>
+            <a:endParaRPr/>
+          </a:p>
+        </p:txBody>
+      </p:sp>
+      <p:sp>
+        <p:nvSpPr>
+          <p:cNvPr id="14" name="TextBox 13"/>
+          <p:cNvSpPr txBox="1"/>
+          <p:nvPr/>
+        </p:nvSpPr>
+        <p:spPr>
+          <a:xfrm>
+            <a:off x="777240" y="1325880"/>
+            <a:ext cx="7589520" cy="4572000"/>
+          </a:xfrm>
+          <a:prstGeom prst="rect">
+            <a:avLst/>
+          </a:prstGeom>
+          <a:noFill/>
+        </p:spPr>
+        <p:txBody>
+          <a:bodyPr wrap="square">
+            <a:spAutoFit/>
+          </a:bodyPr>
+          <a:lstStyle/>
+          <a:p>
+            <a:pPr>
+              <a:spcAft>
+                <a:spcPts val="1200"/>
+              </a:spcAft>
+              <a:defRPr sz="1100">
+                <a:solidFill>
+                  <a:srgbClr val="212121"/>
+                </a:solidFill>
+              </a:defRPr>
+            </a:pPr>
+            <a:r>
+              <a:t>1.    Express.js. (n.d.). Express documentation. https://expressjs.com</a:t>
+            </a:r>
+          </a:p>
+          <a:p>
+            <a:pPr>
+              <a:spcAft>
+                <a:spcPts val="1200"/>
+              </a:spcAft>
+              <a:defRPr sz="1100">
+                <a:solidFill>
+                  <a:srgbClr val="212121"/>
+                </a:solidFill>
+              </a:defRPr>
+            </a:pPr>
+            <a:r>
+              <a:t>2.    Martin, R. C. (2017). Clean architecture: A craftsman's guide to software structure and design. Prentice Hall.</a:t>
+            </a:r>
+          </a:p>
+          <a:p>
+            <a:pPr>
+              <a:spcAft>
+                <a:spcPts val="1200"/>
+              </a:spcAft>
+              <a:defRPr sz="1100">
+                <a:solidFill>
+                  <a:srgbClr val="212121"/>
+                </a:solidFill>
+              </a:defRPr>
+            </a:pPr>
+            <a:r>
+              <a:t>3.    Meta Platforms, Inc. (2024). React documentation. https://react.dev</a:t>
+            </a:r>
+          </a:p>
+          <a:p>
+            <a:pPr>
+              <a:spcAft>
+                <a:spcPts val="1200"/>
+              </a:spcAft>
+              <a:defRPr sz="1100">
+                <a:solidFill>
+                  <a:srgbClr val="212121"/>
+                </a:solidFill>
+              </a:defRPr>
+            </a:pPr>
+            <a:r>
+              <a:t>4.    OpenAI. (2024). DeepSeek API documentation. https://api-docs.deepseek.com</a:t>
+            </a:r>
+          </a:p>
+          <a:p>
+            <a:pPr>
+              <a:spcAft>
+                <a:spcPts val="1200"/>
+              </a:spcAft>
+              <a:defRPr sz="1100">
+                <a:solidFill>
+                  <a:srgbClr val="212121"/>
+                </a:solidFill>
+              </a:defRPr>
+            </a:pPr>
+            <a:r>
+              <a:t>5.    OWASP Foundation. (2021). Authentication cheat sheet. https://cheatsheetseries.owasp.org/cheatsheets/Authentication_Cheat_Sheet.html</a:t>
+            </a:r>
+          </a:p>
+          <a:p>
+            <a:pPr>
+              <a:spcAft>
+                <a:spcPts val="1200"/>
+              </a:spcAft>
+              <a:defRPr sz="1100">
+                <a:solidFill>
+                  <a:srgbClr val="212121"/>
+                </a:solidFill>
+              </a:defRPr>
+            </a:pPr>
+            <a:r>
+              <a:t>6.    Prisma Data, Inc. (2024). Prisma ORM documentation. https://www.prisma.io/docs</a:t>
+            </a:r>
+          </a:p>
+          <a:p>
+            <a:pPr>
+              <a:spcAft>
+                <a:spcPts val="1200"/>
+              </a:spcAft>
+              <a:defRPr sz="1100">
+                <a:solidFill>
+                  <a:srgbClr val="212121"/>
+                </a:solidFill>
+              </a:defRPr>
+            </a:pPr>
+            <a:r>
+              <a:t>7.    Sommerville, I. (2016). Software engineering (10th ed.). Pearson.</a:t>
+            </a:r>
+          </a:p>
+        </p:txBody>
+      </p:sp>
+      <p:sp>
+        <p:nvSpPr>
+          <p:cNvPr id="15" name="TextBox 14"/>
+          <p:cNvSpPr txBox="1"/>
+          <p:nvPr/>
+        </p:nvSpPr>
+        <p:spPr>
+          <a:xfrm>
+            <a:off x="777240" y="5989320"/>
+            <a:ext cx="7589520" cy="320040"/>
+          </a:xfrm>
+          <a:prstGeom prst="rect">
+            <a:avLst/>
+          </a:prstGeom>
+          <a:noFill/>
+        </p:spPr>
+        <p:txBody>
+          <a:bodyPr wrap="none">
+            <a:spAutoFit/>
+          </a:bodyPr>
+          <a:lstStyle/>
+          <a:p>
+            <a:pPr algn="ctr">
+              <a:defRPr sz="1000" b="0" i="1">
+                <a:solidFill>
+                  <a:srgbClr val="616161"/>
+                </a:solidFill>
+              </a:defRPr>
+            </a:pPr>
+            <a:r>
+              <a:t>Note: In-text citations follow APA 7th edition author-date format.</a:t>
+            </a:r>
+          </a:p>
+        </p:txBody>
+      </p:sp>
+    </p:spTree>
+  </p:cSld>
+  <p:clrMapOvr>
+    <a:masterClrMapping/>
+  </p:clrMapOvr>
+</p:sld>
+</file>
+
+<file path=ppt/slides/slide2.xml><?xml version="1.0" encoding="utf-8"?>
+<p:sld xmlns:a="http://schemas.openxmlformats.org/drawingml/2006/main" xmlns:r="http://schemas.openxmlformats.org/officeDocument/2006/relationships" xmlns:p="http://schemas.openxmlformats.org/presentationml/2006/main">
+  <p:cSld>
+    <p:bg>
+      <p:bgPr>
+        <a:solidFill>
+          <a:srgbClr val="F8FAFC"/>
+        </a:solidFill>
+        <a:effectLst/>
+      </p:bgPr>
+    </p:bg>
+    <p:spTree>
+      <p:nvGrpSpPr>
+        <p:cNvPr id="1" name=""/>
+        <p:cNvGrpSpPr/>
+        <p:nvPr/>
+      </p:nvGrpSpPr>
+      <p:grpSpPr>
+        <a:xfrm>
+          <a:off x="0" y="0"/>
+          <a:ext cx="0" cy="0"/>
+          <a:chOff x="0" y="0"/>
+          <a:chExt cx="0" cy="0"/>
+        </a:xfrm>
+      </p:grpSpPr>
+      <p:sp>
+        <p:nvSpPr>
+          <p:cNvPr id="2" name="Rectangle 1"/>
+          <p:cNvSpPr/>
+          <p:nvPr/>
+        </p:nvSpPr>
+        <p:spPr>
+          <a:xfrm>
+            <a:off x="0" y="0"/>
+            <a:ext cx="9144000" cy="960120"/>
+          </a:xfrm>
+          <a:prstGeom prst="rect">
+            <a:avLst/>
+          </a:prstGeom>
+          <a:solidFill>
+            <a:srgbClr val="0F2744"/>
+          </a:solidFill>
+          <a:ln>
+            <a:noFill/>
+          </a:ln>
+        </p:spPr>
+        <p:style>
+          <a:lnRef idx="1">
+            <a:schemeClr val="accent1"/>
+          </a:lnRef>
+          <a:fillRef idx="3">
+            <a:schemeClr val="accent1"/>
+          </a:fillRef>
+          <a:effectRef idx="2">
+            <a:schemeClr val="accent1"/>
+          </a:effectRef>
+          <a:fontRef idx="minor">
+            <a:schemeClr val="lt1"/>
+          </a:fontRef>
+        </p:style>
+        <p:txBody>
+          <a:bodyPr rtlCol="0" anchor="ctr"/>
+          <a:lstStyle/>
+          <a:p>
+            <a:pPr algn="ctr"/>
+            <a:endParaRPr/>
+          </a:p>
+        </p:txBody>
+      </p:sp>
+      <p:sp>
+        <p:nvSpPr>
+          <p:cNvPr id="3" name="Rectangle 2"/>
+          <p:cNvSpPr/>
+          <p:nvPr/>
+        </p:nvSpPr>
+        <p:spPr>
+          <a:xfrm>
+            <a:off x="0" y="960120"/>
+            <a:ext cx="9144000" cy="54864"/>
+          </a:xfrm>
+          <a:prstGeom prst="rect">
+            <a:avLst/>
+          </a:prstGeom>
+          <a:solidFill>
+            <a:srgbClr val="1976D2"/>
+          </a:solidFill>
+          <a:ln>
+            <a:noFill/>
+          </a:ln>
+        </p:spPr>
+        <p:style>
+          <a:lnRef idx="1">
+            <a:schemeClr val="accent1"/>
+          </a:lnRef>
+          <a:fillRef idx="3">
+            <a:schemeClr val="accent1"/>
+          </a:fillRef>
+          <a:effectRef idx="2">
+            <a:schemeClr val="accent1"/>
+          </a:effectRef>
+          <a:fontRef idx="minor">
+            <a:schemeClr val="lt1"/>
+          </a:fontRef>
+        </p:style>
+        <p:txBody>
+          <a:bodyPr rtlCol="0" anchor="ctr"/>
+          <a:lstStyle/>
+          <a:p>
+            <a:pPr algn="ctr"/>
+            <a:endParaRPr/>
+          </a:p>
+        </p:txBody>
+      </p:sp>
+      <p:sp>
+        <p:nvSpPr>
+          <p:cNvPr id="4" name="Oval 3"/>
+          <p:cNvSpPr/>
+          <p:nvPr/>
+        </p:nvSpPr>
+        <p:spPr>
+          <a:xfrm>
+            <a:off x="320040" y="164592"/>
+            <a:ext cx="594360" cy="594360"/>
+          </a:xfrm>
+          <a:prstGeom prst="ellipse">
+            <a:avLst/>
+          </a:prstGeom>
+          <a:solidFill>
+            <a:srgbClr val="1976D2"/>
+          </a:solidFill>
+          <a:ln>
+            <a:noFill/>
+          </a:ln>
+        </p:spPr>
+        <p:style>
+          <a:lnRef idx="1">
+            <a:schemeClr val="accent1"/>
+          </a:lnRef>
+          <a:fillRef idx="3">
+            <a:schemeClr val="accent1"/>
+          </a:fillRef>
+          <a:effectRef idx="2">
+            <a:schemeClr val="accent1"/>
+          </a:effectRef>
+          <a:fontRef idx="minor">
+            <a:schemeClr val="lt1"/>
+          </a:fontRef>
+        </p:style>
+        <p:txBody>
+          <a:bodyPr rtlCol="0" anchor="ctr"/>
+          <a:lstStyle/>
+          <a:p>
+            <a:pPr algn="ctr"/>
+            <a:endParaRPr/>
+          </a:p>
+        </p:txBody>
+      </p:sp>
+      <p:sp>
+        <p:nvSpPr>
+          <p:cNvPr id="5" name="TextBox 4"/>
+          <p:cNvSpPr txBox="1"/>
+          <p:nvPr/>
+        </p:nvSpPr>
+        <p:spPr>
+          <a:xfrm>
+            <a:off x="320040" y="256032"/>
+            <a:ext cx="594360" cy="411480"/>
+          </a:xfrm>
+          <a:prstGeom prst="rect">
+            <a:avLst/>
+          </a:prstGeom>
+          <a:noFill/>
+        </p:spPr>
+        <p:txBody>
+          <a:bodyPr wrap="none">
+            <a:spAutoFit/>
+          </a:bodyPr>
+          <a:lstStyle/>
+          <a:p>
+            <a:pPr algn="ctr">
+              <a:defRPr sz="1600" b="1" i="0">
+                <a:solidFill>
+                  <a:srgbClr val="FFFFFF"/>
+                </a:solidFill>
+              </a:defRPr>
+            </a:pPr>
+            <a:r>
+              <a:t>AR</a:t>
+            </a:r>
+          </a:p>
+        </p:txBody>
+      </p:sp>
+      <p:sp>
+        <p:nvSpPr>
+          <p:cNvPr id="6" name="Rectangle 5"/>
+          <p:cNvSpPr/>
+          <p:nvPr/>
+        </p:nvSpPr>
+        <p:spPr>
+          <a:xfrm>
+            <a:off x="7406640" y="201168"/>
+            <a:ext cx="1417320" cy="347472"/>
+          </a:xfrm>
+          <a:prstGeom prst="rect">
+            <a:avLst/>
+          </a:prstGeom>
+          <a:solidFill>
+            <a:srgbClr val="1976D2"/>
+          </a:solidFill>
+          <a:ln>
+            <a:noFill/>
+          </a:ln>
+        </p:spPr>
+        <p:style>
+          <a:lnRef idx="1">
+            <a:schemeClr val="accent1"/>
+          </a:lnRef>
+          <a:fillRef idx="3">
+            <a:schemeClr val="accent1"/>
+          </a:fillRef>
+          <a:effectRef idx="2">
+            <a:schemeClr val="accent1"/>
+          </a:effectRef>
+          <a:fontRef idx="minor">
+            <a:schemeClr val="lt1"/>
+          </a:fontRef>
+        </p:style>
+        <p:txBody>
+          <a:bodyPr rtlCol="0" anchor="ctr"/>
+          <a:lstStyle/>
+          <a:p>
+            <a:pPr algn="ctr"/>
+            <a:endParaRPr/>
+          </a:p>
+        </p:txBody>
+      </p:sp>
+      <p:sp>
+        <p:nvSpPr>
+          <p:cNvPr id="7" name="TextBox 6"/>
+          <p:cNvSpPr txBox="1"/>
+          <p:nvPr/>
+        </p:nvSpPr>
+        <p:spPr>
+          <a:xfrm>
+            <a:off x="7406640" y="237744"/>
+            <a:ext cx="1417320" cy="274320"/>
+          </a:xfrm>
+          <a:prstGeom prst="rect">
+            <a:avLst/>
+          </a:prstGeom>
+          <a:noFill/>
+        </p:spPr>
+        <p:txBody>
+          <a:bodyPr wrap="none">
+            <a:spAutoFit/>
+          </a:bodyPr>
+          <a:lstStyle/>
+          <a:p>
+            <a:pPr algn="ctr">
+              <a:defRPr sz="900" b="1" i="0">
+                <a:solidFill>
+                  <a:srgbClr val="FFFFFF"/>
+                </a:solidFill>
+              </a:defRPr>
+            </a:pPr>
+            <a:r>
+              <a:t>AGENDA</a:t>
+            </a:r>
+          </a:p>
+        </p:txBody>
+      </p:sp>
+      <p:sp>
+        <p:nvSpPr>
+          <p:cNvPr id="8" name="TextBox 7"/>
+          <p:cNvSpPr txBox="1"/>
+          <p:nvPr/>
+        </p:nvSpPr>
+        <p:spPr>
+          <a:xfrm>
+            <a:off x="1051560" y="137160"/>
+            <a:ext cx="6400800" cy="502920"/>
+          </a:xfrm>
+          <a:prstGeom prst="rect">
+            <a:avLst/>
+          </a:prstGeom>
+          <a:noFill/>
+        </p:spPr>
+        <p:txBody>
+          <a:bodyPr wrap="none">
+            <a:spAutoFit/>
+          </a:bodyPr>
+          <a:lstStyle/>
+          <a:p>
+            <a:pPr algn="l">
+              <a:defRPr sz="2400" b="1" i="0">
+                <a:solidFill>
+                  <a:srgbClr val="FFFFFF"/>
+                </a:solidFill>
+              </a:defRPr>
+            </a:pPr>
+            <a:r>
+              <a:t>Presentation Agenda</a:t>
+            </a:r>
+          </a:p>
+        </p:txBody>
+      </p:sp>
+      <p:sp>
+        <p:nvSpPr>
+          <p:cNvPr id="9" name="TextBox 8"/>
+          <p:cNvSpPr txBox="1"/>
+          <p:nvPr/>
+        </p:nvSpPr>
+        <p:spPr>
+          <a:xfrm>
+            <a:off x="1051560" y="594360"/>
+            <a:ext cx="2556021" cy="276999"/>
+          </a:xfrm>
+          <a:prstGeom prst="rect">
+            <a:avLst/>
+          </a:prstGeom>
+          <a:noFill/>
+        </p:spPr>
+        <p:txBody>
+          <a:bodyPr wrap="none">
+            <a:spAutoFit/>
+          </a:bodyPr>
+          <a:lstStyle/>
+          <a:p>
+            <a:pPr algn="l">
+              <a:defRPr sz="1200" b="0" i="0">
+                <a:solidFill>
+                  <a:srgbClr val="E3F2FD"/>
+                </a:solidFill>
+              </a:defRPr>
+            </a:pPr>
+            <a:r>
+              <a:rPr dirty="0" err="1"/>
+              <a:t>Organisation</a:t>
+            </a:r>
+            <a:r>
+              <a:rPr dirty="0"/>
+              <a:t> of This Report </a:t>
+            </a:r>
+            <a:r>
+              <a:rPr lang="en-NZ" dirty="0"/>
+              <a:t>-</a:t>
+            </a:r>
+            <a:r>
+              <a:rPr dirty="0"/>
+              <a:t> 20 Slides</a:t>
+            </a:r>
+          </a:p>
+        </p:txBody>
+      </p:sp>
+      <p:sp>
+        <p:nvSpPr>
+          <p:cNvPr id="10" name="Rectangle 9"/>
+          <p:cNvSpPr/>
+          <p:nvPr/>
+        </p:nvSpPr>
+        <p:spPr>
+          <a:xfrm>
+            <a:off x="0" y="6473952"/>
+            <a:ext cx="9144000" cy="384048"/>
+          </a:xfrm>
+          <a:prstGeom prst="rect">
+            <a:avLst/>
+          </a:prstGeom>
+          <a:solidFill>
+            <a:srgbClr val="0F2744"/>
+          </a:solidFill>
+          <a:ln>
+            <a:noFill/>
+          </a:ln>
+        </p:spPr>
+        <p:style>
+          <a:lnRef idx="1">
+            <a:schemeClr val="accent1"/>
+          </a:lnRef>
+          <a:fillRef idx="3">
+            <a:schemeClr val="accent1"/>
+          </a:fillRef>
+          <a:effectRef idx="2">
+            <a:schemeClr val="accent1"/>
+          </a:effectRef>
+          <a:fontRef idx="minor">
+            <a:schemeClr val="lt1"/>
+          </a:fontRef>
+        </p:style>
+        <p:txBody>
+          <a:bodyPr rtlCol="0" anchor="ctr"/>
+          <a:lstStyle/>
+          <a:p>
+            <a:pPr algn="ctr"/>
+            <a:endParaRPr/>
+          </a:p>
+        </p:txBody>
+      </p:sp>
+      <p:sp>
+        <p:nvSpPr>
+          <p:cNvPr id="11" name="TextBox 10"/>
+          <p:cNvSpPr txBox="1"/>
+          <p:nvPr/>
+        </p:nvSpPr>
+        <p:spPr>
+          <a:xfrm>
+            <a:off x="502920" y="6537960"/>
+            <a:ext cx="4572000" cy="274320"/>
+          </a:xfrm>
+          <a:prstGeom prst="rect">
+            <a:avLst/>
+          </a:prstGeom>
+          <a:noFill/>
+        </p:spPr>
+        <p:txBody>
+          <a:bodyPr wrap="none">
+            <a:spAutoFit/>
+          </a:bodyPr>
+          <a:lstStyle/>
+          <a:p>
+            <a:pPr algn="l">
+              <a:defRPr sz="900" b="0" i="0">
+                <a:solidFill>
+                  <a:srgbClr val="E3F2FD"/>
+                </a:solidFill>
+              </a:defRPr>
+            </a:pPr>
+            <a:r>
+              <a:t>AutoRepairAgent  |  Progress Report 2</a:t>
+            </a:r>
+          </a:p>
+        </p:txBody>
+      </p:sp>
+      <p:sp>
+        <p:nvSpPr>
+          <p:cNvPr id="12" name="TextBox 11"/>
+          <p:cNvSpPr txBox="1"/>
+          <p:nvPr/>
+        </p:nvSpPr>
+        <p:spPr>
+          <a:xfrm>
+            <a:off x="7772400" y="6537960"/>
+            <a:ext cx="914400" cy="274320"/>
+          </a:xfrm>
+          <a:prstGeom prst="rect">
+            <a:avLst/>
+          </a:prstGeom>
+          <a:noFill/>
+        </p:spPr>
+        <p:txBody>
+          <a:bodyPr wrap="none">
+            <a:spAutoFit/>
+          </a:bodyPr>
+          <a:lstStyle/>
+          <a:p>
+            <a:pPr algn="r">
+              <a:defRPr sz="900" b="1" i="0">
+                <a:solidFill>
+                  <a:srgbClr val="FFFFFF"/>
+                </a:solidFill>
+              </a:defRPr>
+            </a:pPr>
+            <a:r>
+              <a:t>2</a:t>
+            </a:r>
+          </a:p>
+        </p:txBody>
+      </p:sp>
+      <p:sp>
+        <p:nvSpPr>
+          <p:cNvPr id="13" name="Rounded Rectangle 12"/>
+          <p:cNvSpPr/>
+          <p:nvPr/>
+        </p:nvSpPr>
+        <p:spPr>
+          <a:xfrm>
+            <a:off x="502920" y="1143000"/>
+            <a:ext cx="8138160" cy="5257800"/>
+          </a:xfrm>
+          <a:prstGeom prst="roundRect">
+            <a:avLst>
+              <a:gd name="adj" fmla="val 5000"/>
+            </a:avLst>
+          </a:prstGeom>
+          <a:solidFill>
+            <a:srgbClr val="FFFFFF"/>
+          </a:solidFill>
+          <a:ln w="12700">
+            <a:solidFill>
+              <a:srgbClr val="BDBDBD"/>
+            </a:solidFill>
+          </a:ln>
+        </p:spPr>
+        <p:style>
+          <a:lnRef idx="1">
+            <a:schemeClr val="accent1"/>
+          </a:lnRef>
+          <a:fillRef idx="3">
+            <a:schemeClr val="accent1"/>
+          </a:fillRef>
+          <a:effectRef idx="2">
+            <a:schemeClr val="accent1"/>
+          </a:effectRef>
+          <a:fontRef idx="minor">
+            <a:schemeClr val="lt1"/>
+          </a:fontRef>
+        </p:style>
+        <p:txBody>
+          <a:bodyPr rtlCol="0" anchor="ctr"/>
+          <a:lstStyle/>
+          <a:p>
+            <a:pPr algn="ctr"/>
+            <a:endParaRPr/>
           </a:p>
         </p:txBody>
       </p:sp>
       <p:graphicFrame>
         <p:nvGraphicFramePr>
-          <p:cNvPr id="15" name="Table 14"/>
+          <p:cNvPr id="14" name="Table 13"/>
           <p:cNvGraphicFramePr>
             <a:graphicFrameLocks noGrp="1"/>
           </p:cNvGraphicFramePr>
@@ -11015,7 +11943,7 @@
         </p:nvGraphicFramePr>
         <p:xfrm>
           <a:off x="685800" y="1325880"/>
-          <a:ext cx="7772400" cy="2468880"/>
+          <a:ext cx="7772400" cy="2880360"/>
         </p:xfrm>
         <a:graphic>
           <a:graphicData uri="http://schemas.openxmlformats.org/drawingml/2006/table">
@@ -11024,9 +11952,27 @@
                 <a:tableStyleId>{5C22544A-7EE6-4342-B048-85BDC9FD1C3A}</a:tableStyleId>
               </a:tblPr>
               <a:tblGrid>
-                <a:gridCol w="1097280"/>
-                <a:gridCol w="2286000"/>
-                <a:gridCol w="4389120"/>
+                <a:gridCol w="1645920">
+                  <a:extLst>
+                    <a:ext uri="{9D8B030D-6E8A-4147-A177-3AD203B41FA5}">
+                      <a16:colId xmlns:a16="http://schemas.microsoft.com/office/drawing/2014/main" val="20000"/>
+                    </a:ext>
+                  </a:extLst>
+                </a:gridCol>
+                <a:gridCol w="4754880">
+                  <a:extLst>
+                    <a:ext uri="{9D8B030D-6E8A-4147-A177-3AD203B41FA5}">
+                      <a16:colId xmlns:a16="http://schemas.microsoft.com/office/drawing/2014/main" val="20001"/>
+                    </a:ext>
+                  </a:extLst>
+                </a:gridCol>
+                <a:gridCol w="1371600">
+                  <a:extLst>
+                    <a:ext uri="{9D8B030D-6E8A-4147-A177-3AD203B41FA5}">
+                      <a16:colId xmlns:a16="http://schemas.microsoft.com/office/drawing/2014/main" val="20002"/>
+                    </a:ext>
+                  </a:extLst>
+                </a:gridCol>
               </a:tblGrid>
               <a:tr h="411480">
                 <a:tc>
@@ -11042,957 +11988,7 @@
                         </a:defRPr>
                       </a:pPr>
                       <a:r>
-                        <a:t>Figure</a:t>
-                      </a:r>
-                    </a:p>
-                  </a:txBody>
-                  <a:tcPr anchor="ctr">
-                    <a:solidFill>
-                      <a:srgbClr val="0F2744"/>
-                    </a:solidFill>
-                  </a:tcPr>
-                </a:tc>
-                <a:tc>
-                  <a:txBody>
-                    <a:bodyPr/>
-                    <a:lstStyle/>
-                    <a:p>
-                      <a:pPr algn="ctr">
-                        <a:defRPr sz="1100" b="1">
-                          <a:solidFill>
-                            <a:srgbClr val="FFFFFF"/>
-                          </a:solidFill>
-                        </a:defRPr>
-                      </a:pPr>
-                      <a:r>
-                        <a:t>Screen</a:t>
-                      </a:r>
-                    </a:p>
-                  </a:txBody>
-                  <a:tcPr anchor="ctr">
-                    <a:solidFill>
-                      <a:srgbClr val="0F2744"/>
-                    </a:solidFill>
-                  </a:tcPr>
-                </a:tc>
-                <a:tc>
-                  <a:txBody>
-                    <a:bodyPr/>
-                    <a:lstStyle/>
-                    <a:p>
-                      <a:pPr algn="ctr">
-                        <a:defRPr sz="1100" b="1">
-                          <a:solidFill>
-                            <a:srgbClr val="FFFFFF"/>
-                          </a:solidFill>
-                        </a:defRPr>
-                      </a:pPr>
-                      <a:r>
-                        <a:t>Module Demonstrated</a:t>
-                      </a:r>
-                    </a:p>
-                  </a:txBody>
-                  <a:tcPr anchor="ctr">
-                    <a:solidFill>
-                      <a:srgbClr val="0F2744"/>
-                    </a:solidFill>
-                  </a:tcPr>
-                </a:tc>
-              </a:tr>
-              <a:tr h="411480">
-                <a:tc>
-                  <a:txBody>
-                    <a:bodyPr/>
-                    <a:lstStyle/>
-                    <a:p>
-                      <a:pPr algn="l">
-                        <a:defRPr sz="1100">
-                          <a:solidFill>
-                            <a:srgbClr val="212121"/>
-                          </a:solidFill>
-                        </a:defRPr>
-                      </a:pPr>
-                      <a:r>
-                        <a:t>Figure 2</a:t>
-                      </a:r>
-                    </a:p>
-                  </a:txBody>
-                  <a:tcPr anchor="ctr">
-                    <a:solidFill>
-                      <a:srgbClr val="F8FAFC"/>
-                    </a:solidFill>
-                  </a:tcPr>
-                </a:tc>
-                <a:tc>
-                  <a:txBody>
-                    <a:bodyPr/>
-                    <a:lstStyle/>
-                    <a:p>
-                      <a:pPr algn="l">
-                        <a:defRPr sz="1100">
-                          <a:solidFill>
-                            <a:srgbClr val="212121"/>
-                          </a:solidFill>
-                        </a:defRPr>
-                      </a:pPr>
-                      <a:r>
-                        <a:t>Customers Page</a:t>
-                      </a:r>
-                    </a:p>
-                  </a:txBody>
-                  <a:tcPr anchor="ctr">
-                    <a:solidFill>
-                      <a:srgbClr val="F8FAFC"/>
-                    </a:solidFill>
-                  </a:tcPr>
-                </a:tc>
-                <a:tc>
-                  <a:txBody>
-                    <a:bodyPr/>
-                    <a:lstStyle/>
-                    <a:p>
-                      <a:pPr algn="ctr">
-                        <a:defRPr sz="1100">
-                          <a:solidFill>
-                            <a:srgbClr val="212121"/>
-                          </a:solidFill>
-                        </a:defRPr>
-                      </a:pPr>
-                      <a:r>
-                        <a:t>Customer creation &amp; management</a:t>
-                      </a:r>
-                    </a:p>
-                  </a:txBody>
-                  <a:tcPr anchor="ctr">
-                    <a:solidFill>
-                      <a:srgbClr val="F8FAFC"/>
-                    </a:solidFill>
-                  </a:tcPr>
-                </a:tc>
-              </a:tr>
-              <a:tr h="411480">
-                <a:tc>
-                  <a:txBody>
-                    <a:bodyPr/>
-                    <a:lstStyle/>
-                    <a:p>
-                      <a:pPr algn="l">
-                        <a:defRPr sz="1100">
-                          <a:solidFill>
-                            <a:srgbClr val="212121"/>
-                          </a:solidFill>
-                        </a:defRPr>
-                      </a:pPr>
-                      <a:r>
-                        <a:t>Figure 3</a:t>
-                      </a:r>
-                    </a:p>
-                  </a:txBody>
-                  <a:tcPr anchor="ctr">
-                    <a:solidFill>
-                      <a:srgbClr val="FFFFFF"/>
-                    </a:solidFill>
-                  </a:tcPr>
-                </a:tc>
-                <a:tc>
-                  <a:txBody>
-                    <a:bodyPr/>
-                    <a:lstStyle/>
-                    <a:p>
-                      <a:pPr algn="l">
-                        <a:defRPr sz="1100">
-                          <a:solidFill>
-                            <a:srgbClr val="212121"/>
-                          </a:solidFill>
-                        </a:defRPr>
-                      </a:pPr>
-                      <a:r>
-                        <a:t>Vehicles Page</a:t>
-                      </a:r>
-                    </a:p>
-                  </a:txBody>
-                  <a:tcPr anchor="ctr">
-                    <a:solidFill>
-                      <a:srgbClr val="FFFFFF"/>
-                    </a:solidFill>
-                  </a:tcPr>
-                </a:tc>
-                <a:tc>
-                  <a:txBody>
-                    <a:bodyPr/>
-                    <a:lstStyle/>
-                    <a:p>
-                      <a:pPr algn="ctr">
-                        <a:defRPr sz="1100">
-                          <a:solidFill>
-                            <a:srgbClr val="212121"/>
-                          </a:solidFill>
-                        </a:defRPr>
-                      </a:pPr>
-                      <a:r>
-                        <a:t>Vehicle registration module</a:t>
-                      </a:r>
-                    </a:p>
-                  </a:txBody>
-                  <a:tcPr anchor="ctr">
-                    <a:solidFill>
-                      <a:srgbClr val="FFFFFF"/>
-                    </a:solidFill>
-                  </a:tcPr>
-                </a:tc>
-              </a:tr>
-              <a:tr h="411480">
-                <a:tc>
-                  <a:txBody>
-                    <a:bodyPr/>
-                    <a:lstStyle/>
-                    <a:p>
-                      <a:pPr algn="l">
-                        <a:defRPr sz="1100">
-                          <a:solidFill>
-                            <a:srgbClr val="212121"/>
-                          </a:solidFill>
-                        </a:defRPr>
-                      </a:pPr>
-                      <a:r>
-                        <a:t>Figure 4</a:t>
-                      </a:r>
-                    </a:p>
-                  </a:txBody>
-                  <a:tcPr anchor="ctr">
-                    <a:solidFill>
-                      <a:srgbClr val="F8FAFC"/>
-                    </a:solidFill>
-                  </a:tcPr>
-                </a:tc>
-                <a:tc>
-                  <a:txBody>
-                    <a:bodyPr/>
-                    <a:lstStyle/>
-                    <a:p>
-                      <a:pPr algn="l">
-                        <a:defRPr sz="1100">
-                          <a:solidFill>
-                            <a:srgbClr val="212121"/>
-                          </a:solidFill>
-                        </a:defRPr>
-                      </a:pPr>
-                      <a:r>
-                        <a:t>Create Job Page</a:t>
-                      </a:r>
-                    </a:p>
-                  </a:txBody>
-                  <a:tcPr anchor="ctr">
-                    <a:solidFill>
-                      <a:srgbClr val="F8FAFC"/>
-                    </a:solidFill>
-                  </a:tcPr>
-                </a:tc>
-                <a:tc>
-                  <a:txBody>
-                    <a:bodyPr/>
-                    <a:lstStyle/>
-                    <a:p>
-                      <a:pPr algn="ctr">
-                        <a:defRPr sz="1100">
-                          <a:solidFill>
-                            <a:srgbClr val="212121"/>
-                          </a:solidFill>
-                        </a:defRPr>
-                      </a:pPr>
-                      <a:r>
-                        <a:t>AI complaint analysis &amp; job creation</a:t>
-                      </a:r>
-                    </a:p>
-                  </a:txBody>
-                  <a:tcPr anchor="ctr">
-                    <a:solidFill>
-                      <a:srgbClr val="F8FAFC"/>
-                    </a:solidFill>
-                  </a:tcPr>
-                </a:tc>
-              </a:tr>
-              <a:tr h="411480">
-                <a:tc>
-                  <a:txBody>
-                    <a:bodyPr/>
-                    <a:lstStyle/>
-                    <a:p>
-                      <a:pPr algn="l">
-                        <a:defRPr sz="1100">
-                          <a:solidFill>
-                            <a:srgbClr val="212121"/>
-                          </a:solidFill>
-                        </a:defRPr>
-                      </a:pPr>
-                      <a:r>
-                        <a:t>Figure 5</a:t>
-                      </a:r>
-                    </a:p>
-                  </a:txBody>
-                  <a:tcPr anchor="ctr">
-                    <a:solidFill>
-                      <a:srgbClr val="FFFFFF"/>
-                    </a:solidFill>
-                  </a:tcPr>
-                </a:tc>
-                <a:tc>
-                  <a:txBody>
-                    <a:bodyPr/>
-                    <a:lstStyle/>
-                    <a:p>
-                      <a:pPr algn="l">
-                        <a:defRPr sz="1100">
-                          <a:solidFill>
-                            <a:srgbClr val="212121"/>
-                          </a:solidFill>
-                        </a:defRPr>
-                      </a:pPr>
-                      <a:r>
-                        <a:t>Jobs List Page</a:t>
-                      </a:r>
-                    </a:p>
-                  </a:txBody>
-                  <a:tcPr anchor="ctr">
-                    <a:solidFill>
-                      <a:srgbClr val="FFFFFF"/>
-                    </a:solidFill>
-                  </a:tcPr>
-                </a:tc>
-                <a:tc>
-                  <a:txBody>
-                    <a:bodyPr/>
-                    <a:lstStyle/>
-                    <a:p>
-                      <a:pPr algn="ctr">
-                        <a:defRPr sz="1100">
-                          <a:solidFill>
-                            <a:srgbClr val="212121"/>
-                          </a:solidFill>
-                        </a:defRPr>
-                      </a:pPr>
-                      <a:r>
-                        <a:t>Job assignment &amp; lifecycle management</a:t>
-                      </a:r>
-                    </a:p>
-                  </a:txBody>
-                  <a:tcPr anchor="ctr">
-                    <a:solidFill>
-                      <a:srgbClr val="FFFFFF"/>
-                    </a:solidFill>
-                  </a:tcPr>
-                </a:tc>
-              </a:tr>
-              <a:tr h="411480">
-                <a:tc>
-                  <a:txBody>
-                    <a:bodyPr/>
-                    <a:lstStyle/>
-                    <a:p>
-                      <a:pPr algn="l">
-                        <a:defRPr sz="1100">
-                          <a:solidFill>
-                            <a:srgbClr val="212121"/>
-                          </a:solidFill>
-                        </a:defRPr>
-                      </a:pPr>
-                      <a:r>
-                        <a:t>Figure 6</a:t>
-                      </a:r>
-                    </a:p>
-                  </a:txBody>
-                  <a:tcPr anchor="ctr">
-                    <a:solidFill>
-                      <a:srgbClr val="F8FAFC"/>
-                    </a:solidFill>
-                  </a:tcPr>
-                </a:tc>
-                <a:tc>
-                  <a:txBody>
-                    <a:bodyPr/>
-                    <a:lstStyle/>
-                    <a:p>
-                      <a:pPr algn="l">
-                        <a:defRPr sz="1100">
-                          <a:solidFill>
-                            <a:srgbClr val="212121"/>
-                          </a:solidFill>
-                        </a:defRPr>
-                      </a:pPr>
-                      <a:r>
-                        <a:t>AI Analysis Logs</a:t>
-                      </a:r>
-                    </a:p>
-                  </a:txBody>
-                  <a:tcPr anchor="ctr">
-                    <a:solidFill>
-                      <a:srgbClr val="F8FAFC"/>
-                    </a:solidFill>
-                  </a:tcPr>
-                </a:tc>
-                <a:tc>
-                  <a:txBody>
-                    <a:bodyPr/>
-                    <a:lstStyle/>
-                    <a:p>
-                      <a:pPr algn="ctr">
-                        <a:defRPr sz="1100">
-                          <a:solidFill>
-                            <a:srgbClr val="212121"/>
-                          </a:solidFill>
-                        </a:defRPr>
-                      </a:pPr>
-                      <a:r>
-                        <a:t>AI decision audit trail</a:t>
-                      </a:r>
-                    </a:p>
-                  </a:txBody>
-                  <a:tcPr anchor="ctr">
-                    <a:solidFill>
-                      <a:srgbClr val="F8FAFC"/>
-                    </a:solidFill>
-                  </a:tcPr>
-                </a:tc>
-              </a:tr>
-            </a:tbl>
-          </a:graphicData>
-        </a:graphic>
-      </p:graphicFrame>
-    </p:spTree>
-  </p:cSld>
-  <p:clrMapOvr>
-    <a:masterClrMapping/>
-  </p:clrMapOvr>
-</p:sld>
-</file>
-
-<file path=ppt/slides/slide2.xml><?xml version="1.0" encoding="utf-8"?>
-<p:sld xmlns:a="http://schemas.openxmlformats.org/drawingml/2006/main" xmlns:p="http://schemas.openxmlformats.org/presentationml/2006/main" xmlns:r="http://schemas.openxmlformats.org/officeDocument/2006/relationships">
-  <p:cSld>
-    <p:bg>
-      <p:bgPr>
-        <a:solidFill>
-          <a:srgbClr val="F8FAFC"/>
-        </a:solidFill>
-        <a:effectLst/>
-      </p:bgPr>
-    </p:bg>
-    <p:spTree>
-      <p:nvGrpSpPr>
-        <p:cNvPr id="1" name=""/>
-        <p:cNvGrpSpPr/>
-        <p:nvPr/>
-      </p:nvGrpSpPr>
-      <p:grpSpPr/>
-      <p:sp>
-        <p:nvSpPr>
-          <p:cNvPr id="2" name="Rectangle 1"/>
-          <p:cNvSpPr/>
-          <p:nvPr/>
-        </p:nvSpPr>
-        <p:spPr>
-          <a:xfrm>
-            <a:off x="0" y="0"/>
-            <a:ext cx="9144000" cy="960120"/>
-          </a:xfrm>
-          <a:prstGeom prst="rect">
-            <a:avLst/>
-          </a:prstGeom>
-          <a:solidFill>
-            <a:srgbClr val="0F2744"/>
-          </a:solidFill>
-          <a:ln>
-            <a:noFill/>
-          </a:ln>
-        </p:spPr>
-        <p:style>
-          <a:lnRef idx="1">
-            <a:schemeClr val="accent1"/>
-          </a:lnRef>
-          <a:fillRef idx="3">
-            <a:schemeClr val="accent1"/>
-          </a:fillRef>
-          <a:effectRef idx="2">
-            <a:schemeClr val="accent1"/>
-          </a:effectRef>
-          <a:fontRef idx="minor">
-            <a:schemeClr val="lt1"/>
-          </a:fontRef>
-        </p:style>
-        <p:txBody>
-          <a:bodyPr rtlCol="0" anchor="ctr"/>
-          <a:lstStyle/>
-          <a:p>
-            <a:pPr algn="ctr"/>
-          </a:p>
-        </p:txBody>
-      </p:sp>
-      <p:sp>
-        <p:nvSpPr>
-          <p:cNvPr id="3" name="Rectangle 2"/>
-          <p:cNvSpPr/>
-          <p:nvPr/>
-        </p:nvSpPr>
-        <p:spPr>
-          <a:xfrm>
-            <a:off x="0" y="960120"/>
-            <a:ext cx="9144000" cy="54864"/>
-          </a:xfrm>
-          <a:prstGeom prst="rect">
-            <a:avLst/>
-          </a:prstGeom>
-          <a:solidFill>
-            <a:srgbClr val="1976D2"/>
-          </a:solidFill>
-          <a:ln>
-            <a:noFill/>
-          </a:ln>
-        </p:spPr>
-        <p:style>
-          <a:lnRef idx="1">
-            <a:schemeClr val="accent1"/>
-          </a:lnRef>
-          <a:fillRef idx="3">
-            <a:schemeClr val="accent1"/>
-          </a:fillRef>
-          <a:effectRef idx="2">
-            <a:schemeClr val="accent1"/>
-          </a:effectRef>
-          <a:fontRef idx="minor">
-            <a:schemeClr val="lt1"/>
-          </a:fontRef>
-        </p:style>
-        <p:txBody>
-          <a:bodyPr rtlCol="0" anchor="ctr"/>
-          <a:lstStyle/>
-          <a:p>
-            <a:pPr algn="ctr"/>
-          </a:p>
-        </p:txBody>
-      </p:sp>
-      <p:sp>
-        <p:nvSpPr>
-          <p:cNvPr id="4" name="Oval 3"/>
-          <p:cNvSpPr/>
-          <p:nvPr/>
-        </p:nvSpPr>
-        <p:spPr>
-          <a:xfrm>
-            <a:off x="320040" y="164592"/>
-            <a:ext cx="594360" cy="594360"/>
-          </a:xfrm>
-          <a:prstGeom prst="ellipse">
-            <a:avLst/>
-          </a:prstGeom>
-          <a:solidFill>
-            <a:srgbClr val="1976D2"/>
-          </a:solidFill>
-          <a:ln>
-            <a:noFill/>
-          </a:ln>
-        </p:spPr>
-        <p:style>
-          <a:lnRef idx="1">
-            <a:schemeClr val="accent1"/>
-          </a:lnRef>
-          <a:fillRef idx="3">
-            <a:schemeClr val="accent1"/>
-          </a:fillRef>
-          <a:effectRef idx="2">
-            <a:schemeClr val="accent1"/>
-          </a:effectRef>
-          <a:fontRef idx="minor">
-            <a:schemeClr val="lt1"/>
-          </a:fontRef>
-        </p:style>
-        <p:txBody>
-          <a:bodyPr rtlCol="0" anchor="ctr"/>
-          <a:lstStyle/>
-          <a:p>
-            <a:pPr algn="ctr"/>
-          </a:p>
-        </p:txBody>
-      </p:sp>
-      <p:sp>
-        <p:nvSpPr>
-          <p:cNvPr id="5" name="TextBox 4"/>
-          <p:cNvSpPr txBox="1"/>
-          <p:nvPr/>
-        </p:nvSpPr>
-        <p:spPr>
-          <a:xfrm>
-            <a:off x="320040" y="256032"/>
-            <a:ext cx="594360" cy="411480"/>
-          </a:xfrm>
-          <a:prstGeom prst="rect">
-            <a:avLst/>
-          </a:prstGeom>
-          <a:noFill/>
-        </p:spPr>
-        <p:txBody>
-          <a:bodyPr wrap="none">
-            <a:spAutoFit/>
-          </a:bodyPr>
-          <a:lstStyle/>
-          <a:p>
-            <a:pPr algn="ctr">
-              <a:defRPr sz="1600" b="1" i="0">
-                <a:solidFill>
-                  <a:srgbClr val="FFFFFF"/>
-                </a:solidFill>
-              </a:defRPr>
-            </a:pPr>
-            <a:r>
-              <a:t>AR</a:t>
-            </a:r>
-          </a:p>
-        </p:txBody>
-      </p:sp>
-      <p:sp>
-        <p:nvSpPr>
-          <p:cNvPr id="6" name="Rectangle 5"/>
-          <p:cNvSpPr/>
-          <p:nvPr/>
-        </p:nvSpPr>
-        <p:spPr>
-          <a:xfrm>
-            <a:off x="7406640" y="201168"/>
-            <a:ext cx="1417320" cy="347472"/>
-          </a:xfrm>
-          <a:prstGeom prst="rect">
-            <a:avLst/>
-          </a:prstGeom>
-          <a:solidFill>
-            <a:srgbClr val="1976D2"/>
-          </a:solidFill>
-          <a:ln>
-            <a:noFill/>
-          </a:ln>
-        </p:spPr>
-        <p:style>
-          <a:lnRef idx="1">
-            <a:schemeClr val="accent1"/>
-          </a:lnRef>
-          <a:fillRef idx="3">
-            <a:schemeClr val="accent1"/>
-          </a:fillRef>
-          <a:effectRef idx="2">
-            <a:schemeClr val="accent1"/>
-          </a:effectRef>
-          <a:fontRef idx="minor">
-            <a:schemeClr val="lt1"/>
-          </a:fontRef>
-        </p:style>
-        <p:txBody>
-          <a:bodyPr rtlCol="0" anchor="ctr"/>
-          <a:lstStyle/>
-          <a:p>
-            <a:pPr algn="ctr"/>
-          </a:p>
-        </p:txBody>
-      </p:sp>
-      <p:sp>
-        <p:nvSpPr>
-          <p:cNvPr id="7" name="TextBox 6"/>
-          <p:cNvSpPr txBox="1"/>
-          <p:nvPr/>
-        </p:nvSpPr>
-        <p:spPr>
-          <a:xfrm>
-            <a:off x="7406640" y="237744"/>
-            <a:ext cx="1417320" cy="274320"/>
-          </a:xfrm>
-          <a:prstGeom prst="rect">
-            <a:avLst/>
-          </a:prstGeom>
-          <a:noFill/>
-        </p:spPr>
-        <p:txBody>
-          <a:bodyPr wrap="none">
-            <a:spAutoFit/>
-          </a:bodyPr>
-          <a:lstStyle/>
-          <a:p>
-            <a:pPr algn="ctr">
-              <a:defRPr sz="900" b="1" i="0">
-                <a:solidFill>
-                  <a:srgbClr val="FFFFFF"/>
-                </a:solidFill>
-              </a:defRPr>
-            </a:pPr>
-            <a:r>
-              <a:t>AGENDA</a:t>
-            </a:r>
-          </a:p>
-        </p:txBody>
-      </p:sp>
-      <p:sp>
-        <p:nvSpPr>
-          <p:cNvPr id="8" name="TextBox 7"/>
-          <p:cNvSpPr txBox="1"/>
-          <p:nvPr/>
-        </p:nvSpPr>
-        <p:spPr>
-          <a:xfrm>
-            <a:off x="1051560" y="137160"/>
-            <a:ext cx="6400800" cy="502920"/>
-          </a:xfrm>
-          <a:prstGeom prst="rect">
-            <a:avLst/>
-          </a:prstGeom>
-          <a:noFill/>
-        </p:spPr>
-        <p:txBody>
-          <a:bodyPr wrap="none">
-            <a:spAutoFit/>
-          </a:bodyPr>
-          <a:lstStyle/>
-          <a:p>
-            <a:pPr algn="l">
-              <a:defRPr sz="2400" b="1" i="0">
-                <a:solidFill>
-                  <a:srgbClr val="FFFFFF"/>
-                </a:solidFill>
-              </a:defRPr>
-            </a:pPr>
-            <a:r>
-              <a:t>Presentation Agenda</a:t>
-            </a:r>
-          </a:p>
-        </p:txBody>
-      </p:sp>
-      <p:sp>
-        <p:nvSpPr>
-          <p:cNvPr id="9" name="TextBox 8"/>
-          <p:cNvSpPr txBox="1"/>
-          <p:nvPr/>
-        </p:nvSpPr>
-        <p:spPr>
-          <a:xfrm>
-            <a:off x="1051560" y="594360"/>
-            <a:ext cx="6400800" cy="320040"/>
-          </a:xfrm>
-          <a:prstGeom prst="rect">
-            <a:avLst/>
-          </a:prstGeom>
-          <a:noFill/>
-        </p:spPr>
-        <p:txBody>
-          <a:bodyPr wrap="none">
-            <a:spAutoFit/>
-          </a:bodyPr>
-          <a:lstStyle/>
-          <a:p>
-            <a:pPr algn="l">
-              <a:defRPr sz="1200" b="0" i="0">
-                <a:solidFill>
-                  <a:srgbClr val="E3F2FD"/>
-                </a:solidFill>
-              </a:defRPr>
-            </a:pPr>
-            <a:r>
-              <a:t>Organisation of This Report — 20 Slides</a:t>
-            </a:r>
-          </a:p>
-        </p:txBody>
-      </p:sp>
-      <p:sp>
-        <p:nvSpPr>
-          <p:cNvPr id="10" name="Rectangle 9"/>
-          <p:cNvSpPr/>
-          <p:nvPr/>
-        </p:nvSpPr>
-        <p:spPr>
-          <a:xfrm>
-            <a:off x="0" y="6473952"/>
-            <a:ext cx="9144000" cy="384048"/>
-          </a:xfrm>
-          <a:prstGeom prst="rect">
-            <a:avLst/>
-          </a:prstGeom>
-          <a:solidFill>
-            <a:srgbClr val="0F2744"/>
-          </a:solidFill>
-          <a:ln>
-            <a:noFill/>
-          </a:ln>
-        </p:spPr>
-        <p:style>
-          <a:lnRef idx="1">
-            <a:schemeClr val="accent1"/>
-          </a:lnRef>
-          <a:fillRef idx="3">
-            <a:schemeClr val="accent1"/>
-          </a:fillRef>
-          <a:effectRef idx="2">
-            <a:schemeClr val="accent1"/>
-          </a:effectRef>
-          <a:fontRef idx="minor">
-            <a:schemeClr val="lt1"/>
-          </a:fontRef>
-        </p:style>
-        <p:txBody>
-          <a:bodyPr rtlCol="0" anchor="ctr"/>
-          <a:lstStyle/>
-          <a:p>
-            <a:pPr algn="ctr"/>
-          </a:p>
-        </p:txBody>
-      </p:sp>
-      <p:sp>
-        <p:nvSpPr>
-          <p:cNvPr id="11" name="TextBox 10"/>
-          <p:cNvSpPr txBox="1"/>
-          <p:nvPr/>
-        </p:nvSpPr>
-        <p:spPr>
-          <a:xfrm>
-            <a:off x="502920" y="6537960"/>
-            <a:ext cx="4572000" cy="274320"/>
-          </a:xfrm>
-          <a:prstGeom prst="rect">
-            <a:avLst/>
-          </a:prstGeom>
-          <a:noFill/>
-        </p:spPr>
-        <p:txBody>
-          <a:bodyPr wrap="none">
-            <a:spAutoFit/>
-          </a:bodyPr>
-          <a:lstStyle/>
-          <a:p>
-            <a:pPr algn="l">
-              <a:defRPr sz="900" b="0" i="0">
-                <a:solidFill>
-                  <a:srgbClr val="E3F2FD"/>
-                </a:solidFill>
-              </a:defRPr>
-            </a:pPr>
-            <a:r>
-              <a:t>AutoRepairAgent  |  Progress Report 2</a:t>
-            </a:r>
-          </a:p>
-        </p:txBody>
-      </p:sp>
-      <p:sp>
-        <p:nvSpPr>
-          <p:cNvPr id="12" name="TextBox 11"/>
-          <p:cNvSpPr txBox="1"/>
-          <p:nvPr/>
-        </p:nvSpPr>
-        <p:spPr>
-          <a:xfrm>
-            <a:off x="7772400" y="6537960"/>
-            <a:ext cx="914400" cy="274320"/>
-          </a:xfrm>
-          <a:prstGeom prst="rect">
-            <a:avLst/>
-          </a:prstGeom>
-          <a:noFill/>
-        </p:spPr>
-        <p:txBody>
-          <a:bodyPr wrap="none">
-            <a:spAutoFit/>
-          </a:bodyPr>
-          <a:lstStyle/>
-          <a:p>
-            <a:pPr algn="r">
-              <a:defRPr sz="900" b="1" i="0">
-                <a:solidFill>
-                  <a:srgbClr val="FFFFFF"/>
-                </a:solidFill>
-              </a:defRPr>
-            </a:pPr>
-            <a:r>
-              <a:t>2</a:t>
-            </a:r>
-          </a:p>
-        </p:txBody>
-      </p:sp>
-      <p:sp>
-        <p:nvSpPr>
-          <p:cNvPr id="13" name="Rounded Rectangle 12"/>
-          <p:cNvSpPr/>
-          <p:nvPr/>
-        </p:nvSpPr>
-        <p:spPr>
-          <a:xfrm>
-            <a:off x="502920" y="1143000"/>
-            <a:ext cx="8138160" cy="5257800"/>
-          </a:xfrm>
-          <a:prstGeom prst="roundRect">
-            <a:avLst>
-              <a:gd name="adj" fmla="val 5000"/>
-            </a:avLst>
-          </a:prstGeom>
-          <a:solidFill>
-            <a:srgbClr val="FFFFFF"/>
-          </a:solidFill>
-          <a:ln w="12700">
-            <a:solidFill>
-              <a:srgbClr val="BDBDBD"/>
-            </a:solidFill>
-          </a:ln>
-        </p:spPr>
-        <p:style>
-          <a:lnRef idx="1">
-            <a:schemeClr val="accent1"/>
-          </a:lnRef>
-          <a:fillRef idx="3">
-            <a:schemeClr val="accent1"/>
-          </a:fillRef>
-          <a:effectRef idx="2">
-            <a:schemeClr val="accent1"/>
-          </a:effectRef>
-          <a:fontRef idx="minor">
-            <a:schemeClr val="lt1"/>
-          </a:fontRef>
-        </p:style>
-        <p:txBody>
-          <a:bodyPr rtlCol="0" anchor="ctr"/>
-          <a:lstStyle/>
-          <a:p>
-            <a:pPr algn="ctr"/>
-          </a:p>
-        </p:txBody>
-      </p:sp>
-      <p:graphicFrame>
-        <p:nvGraphicFramePr>
-          <p:cNvPr id="14" name="Table 13"/>
-          <p:cNvGraphicFramePr>
-            <a:graphicFrameLocks noGrp="1"/>
-          </p:cNvGraphicFramePr>
-          <p:nvPr/>
-        </p:nvGraphicFramePr>
-        <p:xfrm>
-          <a:off x="685800" y="1325880"/>
-          <a:ext cx="7772400" cy="2880360"/>
-        </p:xfrm>
-        <a:graphic>
-          <a:graphicData uri="http://schemas.openxmlformats.org/drawingml/2006/table">
-            <a:tbl>
-              <a:tblPr firstRow="1" bandRow="1">
-                <a:tableStyleId>{5C22544A-7EE6-4342-B048-85BDC9FD1C3A}</a:tableStyleId>
-              </a:tblPr>
-              <a:tblGrid>
-                <a:gridCol w="1645920"/>
-                <a:gridCol w="4754880"/>
-                <a:gridCol w="1371600"/>
-              </a:tblGrid>
-              <a:tr h="411480">
-                <a:tc>
-                  <a:txBody>
-                    <a:bodyPr/>
-                    <a:lstStyle/>
-                    <a:p>
-                      <a:pPr algn="ctr">
-                        <a:defRPr sz="1100" b="1">
-                          <a:solidFill>
-                            <a:srgbClr val="FFFFFF"/>
-                          </a:solidFill>
-                        </a:defRPr>
-                      </a:pPr>
-                      <a:r>
+                        <a:rPr dirty="0"/>
                         <a:t>Section</a:t>
                       </a:r>
                     </a:p>
@@ -12049,6 +12045,11 @@
                     </a:solidFill>
                   </a:tcPr>
                 </a:tc>
+                <a:extLst>
+                  <a:ext uri="{0D108BD9-81ED-4DB2-BD59-A6C34878D82A}">
+                    <a16:rowId xmlns:a16="http://schemas.microsoft.com/office/drawing/2014/main" val="10000"/>
+                  </a:ext>
+                </a:extLst>
               </a:tr>
               <a:tr h="411480">
                 <a:tc>
@@ -12120,6 +12121,11 @@
                     </a:solidFill>
                   </a:tcPr>
                 </a:tc>
+                <a:extLst>
+                  <a:ext uri="{0D108BD9-81ED-4DB2-BD59-A6C34878D82A}">
+                    <a16:rowId xmlns:a16="http://schemas.microsoft.com/office/drawing/2014/main" val="10001"/>
+                  </a:ext>
+                </a:extLst>
               </a:tr>
               <a:tr h="411480">
                 <a:tc>
@@ -12191,6 +12197,11 @@
                     </a:solidFill>
                   </a:tcPr>
                 </a:tc>
+                <a:extLst>
+                  <a:ext uri="{0D108BD9-81ED-4DB2-BD59-A6C34878D82A}">
+                    <a16:rowId xmlns:a16="http://schemas.microsoft.com/office/drawing/2014/main" val="10002"/>
+                  </a:ext>
+                </a:extLst>
               </a:tr>
               <a:tr h="411480">
                 <a:tc>
@@ -12262,6 +12273,11 @@
                     </a:solidFill>
                   </a:tcPr>
                 </a:tc>
+                <a:extLst>
+                  <a:ext uri="{0D108BD9-81ED-4DB2-BD59-A6C34878D82A}">
+                    <a16:rowId xmlns:a16="http://schemas.microsoft.com/office/drawing/2014/main" val="10003"/>
+                  </a:ext>
+                </a:extLst>
               </a:tr>
               <a:tr h="411480">
                 <a:tc>
@@ -12333,6 +12349,11 @@
                     </a:solidFill>
                   </a:tcPr>
                 </a:tc>
+                <a:extLst>
+                  <a:ext uri="{0D108BD9-81ED-4DB2-BD59-A6C34878D82A}">
+                    <a16:rowId xmlns:a16="http://schemas.microsoft.com/office/drawing/2014/main" val="10004"/>
+                  </a:ext>
+                </a:extLst>
               </a:tr>
               <a:tr h="411480">
                 <a:tc>
@@ -12371,7 +12392,16 @@
                         </a:defRPr>
                       </a:pPr>
                       <a:r>
-                        <a:t>Project complete — final assessment</a:t>
+                        <a:rPr dirty="0"/>
+                        <a:t>Project complete </a:t>
+                      </a:r>
+                      <a:r>
+                        <a:rPr lang="en-NZ" dirty="0"/>
+                        <a:t>-</a:t>
+                      </a:r>
+                      <a:r>
+                        <a:rPr dirty="0"/>
+                        <a:t> final assessment</a:t>
                       </a:r>
                     </a:p>
                   </a:txBody>
@@ -12404,6 +12434,11 @@
                     </a:solidFill>
                   </a:tcPr>
                 </a:tc>
+                <a:extLst>
+                  <a:ext uri="{0D108BD9-81ED-4DB2-BD59-A6C34878D82A}">
+                    <a16:rowId xmlns:a16="http://schemas.microsoft.com/office/drawing/2014/main" val="10005"/>
+                  </a:ext>
+                </a:extLst>
               </a:tr>
               <a:tr h="411480">
                 <a:tc>
@@ -12475,6 +12510,11 @@
                     </a:solidFill>
                   </a:tcPr>
                 </a:tc>
+                <a:extLst>
+                  <a:ext uri="{0D108BD9-81ED-4DB2-BD59-A6C34878D82A}">
+                    <a16:rowId xmlns:a16="http://schemas.microsoft.com/office/drawing/2014/main" val="10006"/>
+                  </a:ext>
+                </a:extLst>
               </a:tr>
             </a:tbl>
           </a:graphicData>
@@ -12488,8 +12528,8 @@
 </p:sld>
 </file>
 
-<file path=ppt/slides/slide20.xml><?xml version="1.0" encoding="utf-8"?>
-<p:sld xmlns:a="http://schemas.openxmlformats.org/drawingml/2006/main" xmlns:p="http://schemas.openxmlformats.org/presentationml/2006/main" xmlns:r="http://schemas.openxmlformats.org/officeDocument/2006/relationships">
+<file path=ppt/slides/slide3.xml><?xml version="1.0" encoding="utf-8"?>
+<p:sld xmlns:a="http://schemas.openxmlformats.org/drawingml/2006/main" xmlns:r="http://schemas.openxmlformats.org/officeDocument/2006/relationships" xmlns:p="http://schemas.openxmlformats.org/presentationml/2006/main">
   <p:cSld>
     <p:bg>
       <p:bgPr>
@@ -12505,7 +12545,14 @@
         <p:cNvGrpSpPr/>
         <p:nvPr/>
       </p:nvGrpSpPr>
-      <p:grpSpPr/>
+      <p:grpSpPr>
+        <a:xfrm>
+          <a:off x="0" y="0"/>
+          <a:ext cx="0" cy="0"/>
+          <a:chOff x="0" y="0"/>
+          <a:chExt cx="0" cy="0"/>
+        </a:xfrm>
+      </p:grpSpPr>
       <p:sp>
         <p:nvSpPr>
           <p:cNvPr id="2" name="Rectangle 1"/>
@@ -12546,6 +12593,7 @@
           <a:lstStyle/>
           <a:p>
             <a:pPr algn="ctr"/>
+            <a:endParaRPr/>
           </a:p>
         </p:txBody>
       </p:sp>
@@ -12589,6 +12637,7 @@
           <a:lstStyle/>
           <a:p>
             <a:pPr algn="ctr"/>
+            <a:endParaRPr/>
           </a:p>
         </p:txBody>
       </p:sp>
@@ -12632,6 +12681,7 @@
           <a:lstStyle/>
           <a:p>
             <a:pPr algn="ctr"/>
+            <a:endParaRPr/>
           </a:p>
         </p:txBody>
       </p:sp>
@@ -12710,6 +12760,7 @@
           <a:lstStyle/>
           <a:p>
             <a:pPr algn="ctr"/>
+            <a:endParaRPr/>
           </a:p>
         </p:txBody>
       </p:sp>
@@ -12721,8 +12772,8 @@
         </p:nvSpPr>
         <p:spPr>
           <a:xfrm>
-            <a:off x="7406640" y="237744"/>
-            <a:ext cx="1417320" cy="274320"/>
+            <a:off x="7768089" y="237744"/>
+            <a:ext cx="694421" cy="230832"/>
           </a:xfrm>
           <a:prstGeom prst="rect">
             <a:avLst/>
@@ -12743,7 +12794,16 @@
               </a:defRPr>
             </a:pPr>
             <a:r>
-              <a:t>05 — REFERENCES</a:t>
+              <a:rPr dirty="0"/>
+              <a:t>01 </a:t>
+            </a:r>
+            <a:r>
+              <a:rPr lang="en-NZ" dirty="0"/>
+              <a:t>-</a:t>
+            </a:r>
+            <a:r>
+              <a:rPr dirty="0"/>
+              <a:t> INTRO</a:t>
             </a:r>
           </a:p>
         </p:txBody>
@@ -12778,7 +12838,7 @@
               </a:defRPr>
             </a:pPr>
             <a:r>
-              <a:t>References</a:t>
+              <a:t>Project Introduction</a:t>
             </a:r>
           </a:p>
         </p:txBody>
@@ -12792,7 +12852,7 @@
         <p:spPr>
           <a:xfrm>
             <a:off x="1051560" y="594360"/>
-            <a:ext cx="6400800" cy="320040"/>
+            <a:ext cx="2805768" cy="276999"/>
           </a:xfrm>
           <a:prstGeom prst="rect">
             <a:avLst/>
@@ -12813,7 +12873,16 @@
               </a:defRPr>
             </a:pPr>
             <a:r>
-              <a:t>APA 7th Edition — Bibliography</a:t>
+              <a:rPr dirty="0"/>
+              <a:t>Phase 2 </a:t>
+            </a:r>
+            <a:r>
+              <a:rPr lang="en-NZ" dirty="0"/>
+              <a:t>-</a:t>
+            </a:r>
+            <a:r>
+              <a:rPr dirty="0"/>
+              <a:t> Building on Report 1 Foundation</a:t>
             </a:r>
           </a:p>
         </p:txBody>
@@ -12858,6 +12927,7 @@
           <a:lstStyle/>
           <a:p>
             <a:pPr algn="ctr"/>
+            <a:endParaRPr/>
           </a:p>
         </p:txBody>
       </p:sp>
@@ -12904,8 +12974,8 @@
         </p:nvSpPr>
         <p:spPr>
           <a:xfrm>
-            <a:off x="7772400" y="6537960"/>
-            <a:ext cx="914400" cy="274320"/>
+            <a:off x="3200400" y="6537960"/>
+            <a:ext cx="2743200" cy="274320"/>
           </a:xfrm>
           <a:prstGeom prst="rect">
             <a:avLst/>
@@ -12918,6 +12988,41 @@
           </a:bodyPr>
           <a:lstStyle/>
           <a:p>
+            <a:pPr algn="ctr">
+              <a:defRPr sz="900" b="0" i="0">
+                <a:solidFill>
+                  <a:srgbClr val="BDBDBD"/>
+                </a:solidFill>
+              </a:defRPr>
+            </a:pPr>
+            <a:r>
+              <a:t>Introduction</a:t>
+            </a:r>
+          </a:p>
+        </p:txBody>
+      </p:sp>
+      <p:sp>
+        <p:nvSpPr>
+          <p:cNvPr id="13" name="TextBox 12"/>
+          <p:cNvSpPr txBox="1"/>
+          <p:nvPr/>
+        </p:nvSpPr>
+        <p:spPr>
+          <a:xfrm>
+            <a:off x="7772400" y="6537960"/>
+            <a:ext cx="914400" cy="274320"/>
+          </a:xfrm>
+          <a:prstGeom prst="rect">
+            <a:avLst/>
+          </a:prstGeom>
+          <a:noFill/>
+        </p:spPr>
+        <p:txBody>
+          <a:bodyPr wrap="none">
+            <a:spAutoFit/>
+          </a:bodyPr>
+          <a:lstStyle/>
+          <a:p>
             <a:pPr algn="r">
               <a:defRPr sz="900" b="1" i="0">
                 <a:solidFill>
@@ -12926,14 +13031,14 @@
               </a:defRPr>
             </a:pPr>
             <a:r>
-              <a:t>20</a:t>
-            </a:r>
-          </a:p>
-        </p:txBody>
-      </p:sp>
-      <p:sp>
-        <p:nvSpPr>
-          <p:cNvPr id="13" name="Rounded Rectangle 12"/>
+              <a:t>3</a:t>
+            </a:r>
+          </a:p>
+        </p:txBody>
+      </p:sp>
+      <p:sp>
+        <p:nvSpPr>
+          <p:cNvPr id="14" name="Rounded Rectangle 13"/>
           <p:cNvSpPr/>
           <p:nvPr/>
         </p:nvSpPr>
@@ -12975,19 +13080,20 @@
           <a:lstStyle/>
           <a:p>
             <a:pPr algn="ctr"/>
-          </a:p>
-        </p:txBody>
-      </p:sp>
-      <p:sp>
-        <p:nvSpPr>
-          <p:cNvPr id="14" name="TextBox 13"/>
+            <a:endParaRPr/>
+          </a:p>
+        </p:txBody>
+      </p:sp>
+      <p:sp>
+        <p:nvSpPr>
+          <p:cNvPr id="15" name="TextBox 14"/>
           <p:cNvSpPr txBox="1"/>
           <p:nvPr/>
         </p:nvSpPr>
         <p:spPr>
           <a:xfrm>
             <a:off x="777240" y="1325880"/>
-            <a:ext cx="7589520" cy="4572000"/>
+            <a:ext cx="7772400" cy="1759456"/>
           </a:xfrm>
           <a:prstGeom prst="rect">
             <a:avLst/>
@@ -13002,141 +13108,121 @@
           <a:p>
             <a:pPr>
               <a:spcAft>
-                <a:spcPts val="1200"/>
+                <a:spcPts val="1000"/>
               </a:spcAft>
-              <a:defRPr sz="1100">
+              <a:defRPr sz="1500">
                 <a:solidFill>
                   <a:srgbClr val="212121"/>
                 </a:solidFill>
               </a:defRPr>
             </a:pPr>
             <a:r>
-              <a:t>1.    Express.js. (n.d.). Express documentation. https://expressjs.com</a:t>
+              <a:rPr dirty="0"/>
+              <a:t>▸  Progress Report 1 delivered: database, auth, admin, departments, and UI design.</a:t>
             </a:r>
           </a:p>
           <a:p>
             <a:pPr>
               <a:spcAft>
-                <a:spcPts val="1200"/>
+                <a:spcPts val="1000"/>
               </a:spcAft>
-              <a:defRPr sz="1100">
+              <a:defRPr sz="1500">
                 <a:solidFill>
                   <a:srgbClr val="212121"/>
                 </a:solidFill>
               </a:defRPr>
             </a:pPr>
             <a:r>
-              <a:t>2.    Martin, R. C. (2017). Clean architecture: A craftsman's guide to software structure and design. Prentice Hall.</a:t>
+              <a:rPr dirty="0"/>
+              <a:t>▸  Phase 2 focused on core business modules: customers, vehicles, and AI-powered jobs.</a:t>
             </a:r>
           </a:p>
           <a:p>
             <a:pPr>
               <a:spcAft>
-                <a:spcPts val="1200"/>
+                <a:spcPts val="1000"/>
               </a:spcAft>
-              <a:defRPr sz="1100">
+              <a:defRPr sz="1500">
                 <a:solidFill>
                   <a:srgbClr val="212121"/>
                 </a:solidFill>
               </a:defRPr>
             </a:pPr>
             <a:r>
-              <a:t>3.    Meta Platforms, Inc. (2024). React documentation. https://react.dev</a:t>
+              <a:rPr dirty="0"/>
+              <a:t>▸  DeepSeek AI integrated for intelligent complaint classification (OpenAI, 2024).</a:t>
             </a:r>
           </a:p>
           <a:p>
             <a:pPr>
               <a:spcAft>
-                <a:spcPts val="1200"/>
+                <a:spcPts val="1000"/>
               </a:spcAft>
-              <a:defRPr sz="1100">
+              <a:defRPr sz="1500">
                 <a:solidFill>
                   <a:srgbClr val="212121"/>
                 </a:solidFill>
               </a:defRPr>
             </a:pPr>
             <a:r>
-              <a:t>4.    OpenAI. (2024). DeepSeek API documentation. https://api-docs.deepseek.com</a:t>
+              <a:rPr dirty="0"/>
+              <a:t>▸  Full end-to-end workflow now functional: complaint </a:t>
+            </a:r>
+            <a:r>
+              <a:rPr lang="en-NZ" dirty="0"/>
+              <a:t>-&gt;</a:t>
+            </a:r>
+            <a:r>
+              <a:rPr dirty="0"/>
+              <a:t> AI </a:t>
+            </a:r>
+            <a:r>
+              <a:rPr lang="en-NZ" dirty="0"/>
+              <a:t>-&gt;</a:t>
+            </a:r>
+            <a:r>
+              <a:rPr dirty="0"/>
+              <a:t> job </a:t>
+            </a:r>
+            <a:r>
+              <a:rPr lang="en-NZ" dirty="0"/>
+              <a:t>-&gt;</a:t>
+            </a:r>
+            <a:r>
+              <a:rPr dirty="0"/>
+              <a:t> assign </a:t>
+            </a:r>
+            <a:r>
+              <a:rPr lang="en-NZ" dirty="0"/>
+              <a:t>-&gt;</a:t>
+            </a:r>
+            <a:r>
+              <a:rPr dirty="0"/>
+              <a:t> complete.</a:t>
             </a:r>
           </a:p>
           <a:p>
             <a:pPr>
               <a:spcAft>
-                <a:spcPts val="1200"/>
+                <a:spcPts val="1000"/>
               </a:spcAft>
-              <a:defRPr sz="1100">
+              <a:defRPr sz="1500">
                 <a:solidFill>
                   <a:srgbClr val="212121"/>
                 </a:solidFill>
               </a:defRPr>
             </a:pPr>
             <a:r>
-              <a:t>5.    OWASP Foundation. (2021). Authentication cheat sheet. https://cheatsheetseries.owasp.org/cheatsheets/Authentication_Cheat_Sheet.html</a:t>
-            </a:r>
-          </a:p>
-          <a:p>
-            <a:pPr>
-              <a:spcAft>
-                <a:spcPts val="1200"/>
-              </a:spcAft>
-              <a:defRPr sz="1100">
-                <a:solidFill>
-                  <a:srgbClr val="212121"/>
-                </a:solidFill>
-              </a:defRPr>
-            </a:pPr>
-            <a:r>
-              <a:t>6.    Prisma Data, Inc. (2024). Prisma ORM documentation. https://www.prisma.io/docs</a:t>
-            </a:r>
-          </a:p>
-          <a:p>
-            <a:pPr>
-              <a:spcAft>
-                <a:spcPts val="1200"/>
-              </a:spcAft>
-              <a:defRPr sz="1100">
-                <a:solidFill>
-                  <a:srgbClr val="212121"/>
-                </a:solidFill>
-              </a:defRPr>
-            </a:pPr>
-            <a:r>
-              <a:t>7.    Sommerville, I. (2016). Software engineering (10th ed.). Pearson.</a:t>
-            </a:r>
-          </a:p>
-        </p:txBody>
-      </p:sp>
-      <p:sp>
-        <p:nvSpPr>
-          <p:cNvPr id="15" name="TextBox 14"/>
-          <p:cNvSpPr txBox="1"/>
-          <p:nvPr/>
-        </p:nvSpPr>
-        <p:spPr>
-          <a:xfrm>
-            <a:off x="777240" y="5989320"/>
-            <a:ext cx="7589520" cy="320040"/>
-          </a:xfrm>
-          <a:prstGeom prst="rect">
-            <a:avLst/>
-          </a:prstGeom>
-          <a:noFill/>
-        </p:spPr>
-        <p:txBody>
-          <a:bodyPr wrap="none">
-            <a:spAutoFit/>
-          </a:bodyPr>
-          <a:lstStyle/>
-          <a:p>
-            <a:pPr algn="ctr">
-              <a:defRPr sz="1000" b="0" i="1">
-                <a:solidFill>
-                  <a:srgbClr val="616161"/>
-                </a:solidFill>
-              </a:defRPr>
-            </a:pPr>
-            <a:r>
-              <a:t>Note: In-text citations follow APA 7th edition author-date format.</a:t>
+              <a:rPr dirty="0"/>
+              <a:t>▸  This is the final progress report </a:t>
+            </a:r>
+            <a:r>
+              <a:rPr lang="en-NZ" dirty="0"/>
+              <a:t>-</a:t>
+            </a:r>
+            <a:r>
+              <a:rPr dirty="0"/>
+              <a:t> all development objectives are complete.</a:t>
             </a:r>
           </a:p>
         </p:txBody>
@@ -13149,8 +13235,8 @@
 </p:sld>
 </file>
 
-<file path=ppt/slides/slide3.xml><?xml version="1.0" encoding="utf-8"?>
-<p:sld xmlns:a="http://schemas.openxmlformats.org/drawingml/2006/main" xmlns:p="http://schemas.openxmlformats.org/presentationml/2006/main" xmlns:r="http://schemas.openxmlformats.org/officeDocument/2006/relationships">
+<file path=ppt/slides/slide4.xml><?xml version="1.0" encoding="utf-8"?>
+<p:sld xmlns:a="http://schemas.openxmlformats.org/drawingml/2006/main" xmlns:r="http://schemas.openxmlformats.org/officeDocument/2006/relationships" xmlns:p="http://schemas.openxmlformats.org/presentationml/2006/main">
   <p:cSld>
     <p:bg>
       <p:bgPr>
@@ -13166,7 +13252,14 @@
         <p:cNvGrpSpPr/>
         <p:nvPr/>
       </p:nvGrpSpPr>
-      <p:grpSpPr/>
+      <p:grpSpPr>
+        <a:xfrm>
+          <a:off x="0" y="0"/>
+          <a:ext cx="0" cy="0"/>
+          <a:chOff x="0" y="0"/>
+          <a:chExt cx="0" cy="0"/>
+        </a:xfrm>
+      </p:grpSpPr>
       <p:sp>
         <p:nvSpPr>
           <p:cNvPr id="2" name="Rectangle 1"/>
@@ -13207,6 +13300,7 @@
           <a:lstStyle/>
           <a:p>
             <a:pPr algn="ctr"/>
+            <a:endParaRPr/>
           </a:p>
         </p:txBody>
       </p:sp>
@@ -13250,6 +13344,7 @@
           <a:lstStyle/>
           <a:p>
             <a:pPr algn="ctr"/>
+            <a:endParaRPr/>
           </a:p>
         </p:txBody>
       </p:sp>
@@ -13293,6 +13388,7 @@
           <a:lstStyle/>
           <a:p>
             <a:pPr algn="ctr"/>
+            <a:endParaRPr/>
           </a:p>
         </p:txBody>
       </p:sp>
@@ -13371,6 +13467,7 @@
           <a:lstStyle/>
           <a:p>
             <a:pPr algn="ctr"/>
+            <a:endParaRPr/>
           </a:p>
         </p:txBody>
       </p:sp>
@@ -13382,8 +13479,8 @@
         </p:nvSpPr>
         <p:spPr>
           <a:xfrm>
-            <a:off x="7406640" y="237744"/>
-            <a:ext cx="1417320" cy="274320"/>
+            <a:off x="7768089" y="237744"/>
+            <a:ext cx="694421" cy="230832"/>
           </a:xfrm>
           <a:prstGeom prst="rect">
             <a:avLst/>
@@ -13404,7 +13501,16 @@
               </a:defRPr>
             </a:pPr>
             <a:r>
-              <a:t>01 — INTRO</a:t>
+              <a:rPr dirty="0"/>
+              <a:t>01 </a:t>
+            </a:r>
+            <a:r>
+              <a:rPr lang="en-NZ" dirty="0"/>
+              <a:t>-</a:t>
+            </a:r>
+            <a:r>
+              <a:rPr dirty="0"/>
+              <a:t> INTRO</a:t>
             </a:r>
           </a:p>
         </p:txBody>
@@ -13439,7 +13545,7 @@
               </a:defRPr>
             </a:pPr>
             <a:r>
-              <a:t>Project Introduction</a:t>
+              <a:t>Phase 2 Objectives</a:t>
             </a:r>
           </a:p>
         </p:txBody>
@@ -13474,7 +13580,7 @@
               </a:defRPr>
             </a:pPr>
             <a:r>
-              <a:t>Phase 2 — Building on Report 1 Foundation</a:t>
+              <a:t>Deliverables Completed in Second Reporting Period</a:t>
             </a:r>
           </a:p>
         </p:txBody>
@@ -13519,6 +13625,7 @@
           <a:lstStyle/>
           <a:p>
             <a:pPr algn="ctr"/>
+            <a:endParaRPr/>
           </a:p>
         </p:txBody>
       </p:sp>
@@ -13622,7 +13729,7 @@
               </a:defRPr>
             </a:pPr>
             <a:r>
-              <a:t>3</a:t>
+              <a:t>4</a:t>
             </a:r>
           </a:p>
         </p:txBody>
@@ -13671,637 +13778,7 @@
           <a:lstStyle/>
           <a:p>
             <a:pPr algn="ctr"/>
-          </a:p>
-        </p:txBody>
-      </p:sp>
-      <p:sp>
-        <p:nvSpPr>
-          <p:cNvPr id="15" name="TextBox 14"/>
-          <p:cNvSpPr txBox="1"/>
-          <p:nvPr/>
-        </p:nvSpPr>
-        <p:spPr>
-          <a:xfrm>
-            <a:off x="777240" y="1325880"/>
-            <a:ext cx="7772400" cy="4937760"/>
-          </a:xfrm>
-          <a:prstGeom prst="rect">
-            <a:avLst/>
-          </a:prstGeom>
-          <a:noFill/>
-        </p:spPr>
-        <p:txBody>
-          <a:bodyPr wrap="square">
-            <a:spAutoFit/>
-          </a:bodyPr>
-          <a:lstStyle/>
-          <a:p>
-            <a:pPr>
-              <a:spcAft>
-                <a:spcPts val="1000"/>
-              </a:spcAft>
-              <a:defRPr sz="1500">
-                <a:solidFill>
-                  <a:srgbClr val="212121"/>
-                </a:solidFill>
-              </a:defRPr>
-            </a:pPr>
-            <a:r>
-              <a:t>▸  Progress Report 1 delivered: database, auth, admin, departments, and UI design.</a:t>
-            </a:r>
-          </a:p>
-          <a:p>
-            <a:pPr>
-              <a:spcAft>
-                <a:spcPts val="1000"/>
-              </a:spcAft>
-              <a:defRPr sz="1500">
-                <a:solidFill>
-                  <a:srgbClr val="212121"/>
-                </a:solidFill>
-              </a:defRPr>
-            </a:pPr>
-            <a:r>
-              <a:t>▸  Phase 2 focused on core business modules: customers, vehicles, and AI-powered jobs.</a:t>
-            </a:r>
-          </a:p>
-          <a:p>
-            <a:pPr>
-              <a:spcAft>
-                <a:spcPts val="1000"/>
-              </a:spcAft>
-              <a:defRPr sz="1500">
-                <a:solidFill>
-                  <a:srgbClr val="212121"/>
-                </a:solidFill>
-              </a:defRPr>
-            </a:pPr>
-            <a:r>
-              <a:t>▸  DeepSeek AI integrated for intelligent complaint classification (OpenAI, 2024).</a:t>
-            </a:r>
-          </a:p>
-          <a:p>
-            <a:pPr>
-              <a:spcAft>
-                <a:spcPts val="1000"/>
-              </a:spcAft>
-              <a:defRPr sz="1500">
-                <a:solidFill>
-                  <a:srgbClr val="212121"/>
-                </a:solidFill>
-              </a:defRPr>
-            </a:pPr>
-            <a:r>
-              <a:t>▸  Full end-to-end workflow now functional: complaint → AI → job → assign → complete.</a:t>
-            </a:r>
-          </a:p>
-          <a:p>
-            <a:pPr>
-              <a:spcAft>
-                <a:spcPts val="1000"/>
-              </a:spcAft>
-              <a:defRPr sz="1500">
-                <a:solidFill>
-                  <a:srgbClr val="212121"/>
-                </a:solidFill>
-              </a:defRPr>
-            </a:pPr>
-            <a:r>
-              <a:t>▸  This is the final progress report — all development objectives are complete.</a:t>
-            </a:r>
-          </a:p>
-        </p:txBody>
-      </p:sp>
-    </p:spTree>
-  </p:cSld>
-  <p:clrMapOvr>
-    <a:masterClrMapping/>
-  </p:clrMapOvr>
-</p:sld>
-</file>
-
-<file path=ppt/slides/slide4.xml><?xml version="1.0" encoding="utf-8"?>
-<p:sld xmlns:a="http://schemas.openxmlformats.org/drawingml/2006/main" xmlns:p="http://schemas.openxmlformats.org/presentationml/2006/main" xmlns:r="http://schemas.openxmlformats.org/officeDocument/2006/relationships">
-  <p:cSld>
-    <p:bg>
-      <p:bgPr>
-        <a:solidFill>
-          <a:srgbClr val="F8FAFC"/>
-        </a:solidFill>
-        <a:effectLst/>
-      </p:bgPr>
-    </p:bg>
-    <p:spTree>
-      <p:nvGrpSpPr>
-        <p:cNvPr id="1" name=""/>
-        <p:cNvGrpSpPr/>
-        <p:nvPr/>
-      </p:nvGrpSpPr>
-      <p:grpSpPr/>
-      <p:sp>
-        <p:nvSpPr>
-          <p:cNvPr id="2" name="Rectangle 1"/>
-          <p:cNvSpPr/>
-          <p:nvPr/>
-        </p:nvSpPr>
-        <p:spPr>
-          <a:xfrm>
-            <a:off x="0" y="0"/>
-            <a:ext cx="9144000" cy="960120"/>
-          </a:xfrm>
-          <a:prstGeom prst="rect">
-            <a:avLst/>
-          </a:prstGeom>
-          <a:solidFill>
-            <a:srgbClr val="0F2744"/>
-          </a:solidFill>
-          <a:ln>
-            <a:noFill/>
-          </a:ln>
-        </p:spPr>
-        <p:style>
-          <a:lnRef idx="1">
-            <a:schemeClr val="accent1"/>
-          </a:lnRef>
-          <a:fillRef idx="3">
-            <a:schemeClr val="accent1"/>
-          </a:fillRef>
-          <a:effectRef idx="2">
-            <a:schemeClr val="accent1"/>
-          </a:effectRef>
-          <a:fontRef idx="minor">
-            <a:schemeClr val="lt1"/>
-          </a:fontRef>
-        </p:style>
-        <p:txBody>
-          <a:bodyPr rtlCol="0" anchor="ctr"/>
-          <a:lstStyle/>
-          <a:p>
-            <a:pPr algn="ctr"/>
-          </a:p>
-        </p:txBody>
-      </p:sp>
-      <p:sp>
-        <p:nvSpPr>
-          <p:cNvPr id="3" name="Rectangle 2"/>
-          <p:cNvSpPr/>
-          <p:nvPr/>
-        </p:nvSpPr>
-        <p:spPr>
-          <a:xfrm>
-            <a:off x="0" y="960120"/>
-            <a:ext cx="9144000" cy="54864"/>
-          </a:xfrm>
-          <a:prstGeom prst="rect">
-            <a:avLst/>
-          </a:prstGeom>
-          <a:solidFill>
-            <a:srgbClr val="1976D2"/>
-          </a:solidFill>
-          <a:ln>
-            <a:noFill/>
-          </a:ln>
-        </p:spPr>
-        <p:style>
-          <a:lnRef idx="1">
-            <a:schemeClr val="accent1"/>
-          </a:lnRef>
-          <a:fillRef idx="3">
-            <a:schemeClr val="accent1"/>
-          </a:fillRef>
-          <a:effectRef idx="2">
-            <a:schemeClr val="accent1"/>
-          </a:effectRef>
-          <a:fontRef idx="minor">
-            <a:schemeClr val="lt1"/>
-          </a:fontRef>
-        </p:style>
-        <p:txBody>
-          <a:bodyPr rtlCol="0" anchor="ctr"/>
-          <a:lstStyle/>
-          <a:p>
-            <a:pPr algn="ctr"/>
-          </a:p>
-        </p:txBody>
-      </p:sp>
-      <p:sp>
-        <p:nvSpPr>
-          <p:cNvPr id="4" name="Oval 3"/>
-          <p:cNvSpPr/>
-          <p:nvPr/>
-        </p:nvSpPr>
-        <p:spPr>
-          <a:xfrm>
-            <a:off x="320040" y="164592"/>
-            <a:ext cx="594360" cy="594360"/>
-          </a:xfrm>
-          <a:prstGeom prst="ellipse">
-            <a:avLst/>
-          </a:prstGeom>
-          <a:solidFill>
-            <a:srgbClr val="1976D2"/>
-          </a:solidFill>
-          <a:ln>
-            <a:noFill/>
-          </a:ln>
-        </p:spPr>
-        <p:style>
-          <a:lnRef idx="1">
-            <a:schemeClr val="accent1"/>
-          </a:lnRef>
-          <a:fillRef idx="3">
-            <a:schemeClr val="accent1"/>
-          </a:fillRef>
-          <a:effectRef idx="2">
-            <a:schemeClr val="accent1"/>
-          </a:effectRef>
-          <a:fontRef idx="minor">
-            <a:schemeClr val="lt1"/>
-          </a:fontRef>
-        </p:style>
-        <p:txBody>
-          <a:bodyPr rtlCol="0" anchor="ctr"/>
-          <a:lstStyle/>
-          <a:p>
-            <a:pPr algn="ctr"/>
-          </a:p>
-        </p:txBody>
-      </p:sp>
-      <p:sp>
-        <p:nvSpPr>
-          <p:cNvPr id="5" name="TextBox 4"/>
-          <p:cNvSpPr txBox="1"/>
-          <p:nvPr/>
-        </p:nvSpPr>
-        <p:spPr>
-          <a:xfrm>
-            <a:off x="320040" y="256032"/>
-            <a:ext cx="594360" cy="411480"/>
-          </a:xfrm>
-          <a:prstGeom prst="rect">
-            <a:avLst/>
-          </a:prstGeom>
-          <a:noFill/>
-        </p:spPr>
-        <p:txBody>
-          <a:bodyPr wrap="none">
-            <a:spAutoFit/>
-          </a:bodyPr>
-          <a:lstStyle/>
-          <a:p>
-            <a:pPr algn="ctr">
-              <a:defRPr sz="1600" b="1" i="0">
-                <a:solidFill>
-                  <a:srgbClr val="FFFFFF"/>
-                </a:solidFill>
-              </a:defRPr>
-            </a:pPr>
-            <a:r>
-              <a:t>AR</a:t>
-            </a:r>
-          </a:p>
-        </p:txBody>
-      </p:sp>
-      <p:sp>
-        <p:nvSpPr>
-          <p:cNvPr id="6" name="Rectangle 5"/>
-          <p:cNvSpPr/>
-          <p:nvPr/>
-        </p:nvSpPr>
-        <p:spPr>
-          <a:xfrm>
-            <a:off x="7406640" y="201168"/>
-            <a:ext cx="1417320" cy="347472"/>
-          </a:xfrm>
-          <a:prstGeom prst="rect">
-            <a:avLst/>
-          </a:prstGeom>
-          <a:solidFill>
-            <a:srgbClr val="1976D2"/>
-          </a:solidFill>
-          <a:ln>
-            <a:noFill/>
-          </a:ln>
-        </p:spPr>
-        <p:style>
-          <a:lnRef idx="1">
-            <a:schemeClr val="accent1"/>
-          </a:lnRef>
-          <a:fillRef idx="3">
-            <a:schemeClr val="accent1"/>
-          </a:fillRef>
-          <a:effectRef idx="2">
-            <a:schemeClr val="accent1"/>
-          </a:effectRef>
-          <a:fontRef idx="minor">
-            <a:schemeClr val="lt1"/>
-          </a:fontRef>
-        </p:style>
-        <p:txBody>
-          <a:bodyPr rtlCol="0" anchor="ctr"/>
-          <a:lstStyle/>
-          <a:p>
-            <a:pPr algn="ctr"/>
-          </a:p>
-        </p:txBody>
-      </p:sp>
-      <p:sp>
-        <p:nvSpPr>
-          <p:cNvPr id="7" name="TextBox 6"/>
-          <p:cNvSpPr txBox="1"/>
-          <p:nvPr/>
-        </p:nvSpPr>
-        <p:spPr>
-          <a:xfrm>
-            <a:off x="7406640" y="237744"/>
-            <a:ext cx="1417320" cy="274320"/>
-          </a:xfrm>
-          <a:prstGeom prst="rect">
-            <a:avLst/>
-          </a:prstGeom>
-          <a:noFill/>
-        </p:spPr>
-        <p:txBody>
-          <a:bodyPr wrap="none">
-            <a:spAutoFit/>
-          </a:bodyPr>
-          <a:lstStyle/>
-          <a:p>
-            <a:pPr algn="ctr">
-              <a:defRPr sz="900" b="1" i="0">
-                <a:solidFill>
-                  <a:srgbClr val="FFFFFF"/>
-                </a:solidFill>
-              </a:defRPr>
-            </a:pPr>
-            <a:r>
-              <a:t>01 — INTRO</a:t>
-            </a:r>
-          </a:p>
-        </p:txBody>
-      </p:sp>
-      <p:sp>
-        <p:nvSpPr>
-          <p:cNvPr id="8" name="TextBox 7"/>
-          <p:cNvSpPr txBox="1"/>
-          <p:nvPr/>
-        </p:nvSpPr>
-        <p:spPr>
-          <a:xfrm>
-            <a:off x="1051560" y="137160"/>
-            <a:ext cx="6400800" cy="502920"/>
-          </a:xfrm>
-          <a:prstGeom prst="rect">
-            <a:avLst/>
-          </a:prstGeom>
-          <a:noFill/>
-        </p:spPr>
-        <p:txBody>
-          <a:bodyPr wrap="none">
-            <a:spAutoFit/>
-          </a:bodyPr>
-          <a:lstStyle/>
-          <a:p>
-            <a:pPr algn="l">
-              <a:defRPr sz="2400" b="1" i="0">
-                <a:solidFill>
-                  <a:srgbClr val="FFFFFF"/>
-                </a:solidFill>
-              </a:defRPr>
-            </a:pPr>
-            <a:r>
-              <a:t>Phase 2 Objectives</a:t>
-            </a:r>
-          </a:p>
-        </p:txBody>
-      </p:sp>
-      <p:sp>
-        <p:nvSpPr>
-          <p:cNvPr id="9" name="TextBox 8"/>
-          <p:cNvSpPr txBox="1"/>
-          <p:nvPr/>
-        </p:nvSpPr>
-        <p:spPr>
-          <a:xfrm>
-            <a:off x="1051560" y="594360"/>
-            <a:ext cx="6400800" cy="320040"/>
-          </a:xfrm>
-          <a:prstGeom prst="rect">
-            <a:avLst/>
-          </a:prstGeom>
-          <a:noFill/>
-        </p:spPr>
-        <p:txBody>
-          <a:bodyPr wrap="none">
-            <a:spAutoFit/>
-          </a:bodyPr>
-          <a:lstStyle/>
-          <a:p>
-            <a:pPr algn="l">
-              <a:defRPr sz="1200" b="0" i="0">
-                <a:solidFill>
-                  <a:srgbClr val="E3F2FD"/>
-                </a:solidFill>
-              </a:defRPr>
-            </a:pPr>
-            <a:r>
-              <a:t>Deliverables Completed in Second Reporting Period</a:t>
-            </a:r>
-          </a:p>
-        </p:txBody>
-      </p:sp>
-      <p:sp>
-        <p:nvSpPr>
-          <p:cNvPr id="10" name="Rectangle 9"/>
-          <p:cNvSpPr/>
-          <p:nvPr/>
-        </p:nvSpPr>
-        <p:spPr>
-          <a:xfrm>
-            <a:off x="0" y="6473952"/>
-            <a:ext cx="9144000" cy="384048"/>
-          </a:xfrm>
-          <a:prstGeom prst="rect">
-            <a:avLst/>
-          </a:prstGeom>
-          <a:solidFill>
-            <a:srgbClr val="0F2744"/>
-          </a:solidFill>
-          <a:ln>
-            <a:noFill/>
-          </a:ln>
-        </p:spPr>
-        <p:style>
-          <a:lnRef idx="1">
-            <a:schemeClr val="accent1"/>
-          </a:lnRef>
-          <a:fillRef idx="3">
-            <a:schemeClr val="accent1"/>
-          </a:fillRef>
-          <a:effectRef idx="2">
-            <a:schemeClr val="accent1"/>
-          </a:effectRef>
-          <a:fontRef idx="minor">
-            <a:schemeClr val="lt1"/>
-          </a:fontRef>
-        </p:style>
-        <p:txBody>
-          <a:bodyPr rtlCol="0" anchor="ctr"/>
-          <a:lstStyle/>
-          <a:p>
-            <a:pPr algn="ctr"/>
-          </a:p>
-        </p:txBody>
-      </p:sp>
-      <p:sp>
-        <p:nvSpPr>
-          <p:cNvPr id="11" name="TextBox 10"/>
-          <p:cNvSpPr txBox="1"/>
-          <p:nvPr/>
-        </p:nvSpPr>
-        <p:spPr>
-          <a:xfrm>
-            <a:off x="502920" y="6537960"/>
-            <a:ext cx="4572000" cy="274320"/>
-          </a:xfrm>
-          <a:prstGeom prst="rect">
-            <a:avLst/>
-          </a:prstGeom>
-          <a:noFill/>
-        </p:spPr>
-        <p:txBody>
-          <a:bodyPr wrap="none">
-            <a:spAutoFit/>
-          </a:bodyPr>
-          <a:lstStyle/>
-          <a:p>
-            <a:pPr algn="l">
-              <a:defRPr sz="900" b="0" i="0">
-                <a:solidFill>
-                  <a:srgbClr val="E3F2FD"/>
-                </a:solidFill>
-              </a:defRPr>
-            </a:pPr>
-            <a:r>
-              <a:t>AutoRepairAgent  |  Progress Report 2</a:t>
-            </a:r>
-          </a:p>
-        </p:txBody>
-      </p:sp>
-      <p:sp>
-        <p:nvSpPr>
-          <p:cNvPr id="12" name="TextBox 11"/>
-          <p:cNvSpPr txBox="1"/>
-          <p:nvPr/>
-        </p:nvSpPr>
-        <p:spPr>
-          <a:xfrm>
-            <a:off x="3200400" y="6537960"/>
-            <a:ext cx="2743200" cy="274320"/>
-          </a:xfrm>
-          <a:prstGeom prst="rect">
-            <a:avLst/>
-          </a:prstGeom>
-          <a:noFill/>
-        </p:spPr>
-        <p:txBody>
-          <a:bodyPr wrap="none">
-            <a:spAutoFit/>
-          </a:bodyPr>
-          <a:lstStyle/>
-          <a:p>
-            <a:pPr algn="ctr">
-              <a:defRPr sz="900" b="0" i="0">
-                <a:solidFill>
-                  <a:srgbClr val="BDBDBD"/>
-                </a:solidFill>
-              </a:defRPr>
-            </a:pPr>
-            <a:r>
-              <a:t>Introduction</a:t>
-            </a:r>
-          </a:p>
-        </p:txBody>
-      </p:sp>
-      <p:sp>
-        <p:nvSpPr>
-          <p:cNvPr id="13" name="TextBox 12"/>
-          <p:cNvSpPr txBox="1"/>
-          <p:nvPr/>
-        </p:nvSpPr>
-        <p:spPr>
-          <a:xfrm>
-            <a:off x="7772400" y="6537960"/>
-            <a:ext cx="914400" cy="274320"/>
-          </a:xfrm>
-          <a:prstGeom prst="rect">
-            <a:avLst/>
-          </a:prstGeom>
-          <a:noFill/>
-        </p:spPr>
-        <p:txBody>
-          <a:bodyPr wrap="none">
-            <a:spAutoFit/>
-          </a:bodyPr>
-          <a:lstStyle/>
-          <a:p>
-            <a:pPr algn="r">
-              <a:defRPr sz="900" b="1" i="0">
-                <a:solidFill>
-                  <a:srgbClr val="FFFFFF"/>
-                </a:solidFill>
-              </a:defRPr>
-            </a:pPr>
-            <a:r>
-              <a:t>4</a:t>
-            </a:r>
-          </a:p>
-        </p:txBody>
-      </p:sp>
-      <p:sp>
-        <p:nvSpPr>
-          <p:cNvPr id="14" name="Rounded Rectangle 13"/>
-          <p:cNvSpPr/>
-          <p:nvPr/>
-        </p:nvSpPr>
-        <p:spPr>
-          <a:xfrm>
-            <a:off x="502920" y="1143000"/>
-            <a:ext cx="8138160" cy="5257800"/>
-          </a:xfrm>
-          <a:prstGeom prst="roundRect">
-            <a:avLst>
-              <a:gd name="adj" fmla="val 5000"/>
-            </a:avLst>
-          </a:prstGeom>
-          <a:solidFill>
-            <a:srgbClr val="FFFFFF"/>
-          </a:solidFill>
-          <a:ln w="12700">
-            <a:solidFill>
-              <a:srgbClr val="BDBDBD"/>
-            </a:solidFill>
-          </a:ln>
-        </p:spPr>
-        <p:style>
-          <a:lnRef idx="1">
-            <a:schemeClr val="accent1"/>
-          </a:lnRef>
-          <a:fillRef idx="3">
-            <a:schemeClr val="accent1"/>
-          </a:fillRef>
-          <a:effectRef idx="2">
-            <a:schemeClr val="accent1"/>
-          </a:effectRef>
-          <a:fontRef idx="minor">
-            <a:schemeClr val="lt1"/>
-          </a:fontRef>
-        </p:style>
-        <p:txBody>
-          <a:bodyPr rtlCol="0" anchor="ctr"/>
-          <a:lstStyle/>
-          <a:p>
-            <a:pPr algn="ctr"/>
+            <a:endParaRPr/>
           </a:p>
         </p:txBody>
       </p:sp>
@@ -14324,9 +13801,27 @@
                 <a:tableStyleId>{5C22544A-7EE6-4342-B048-85BDC9FD1C3A}</a:tableStyleId>
               </a:tblPr>
               <a:tblGrid>
-                <a:gridCol w="548640"/>
-                <a:gridCol w="5394960"/>
-                <a:gridCol w="1371600"/>
+                <a:gridCol w="548640">
+                  <a:extLst>
+                    <a:ext uri="{9D8B030D-6E8A-4147-A177-3AD203B41FA5}">
+                      <a16:colId xmlns:a16="http://schemas.microsoft.com/office/drawing/2014/main" val="20000"/>
+                    </a:ext>
+                  </a:extLst>
+                </a:gridCol>
+                <a:gridCol w="5394960">
+                  <a:extLst>
+                    <a:ext uri="{9D8B030D-6E8A-4147-A177-3AD203B41FA5}">
+                      <a16:colId xmlns:a16="http://schemas.microsoft.com/office/drawing/2014/main" val="20001"/>
+                    </a:ext>
+                  </a:extLst>
+                </a:gridCol>
+                <a:gridCol w="1371600">
+                  <a:extLst>
+                    <a:ext uri="{9D8B030D-6E8A-4147-A177-3AD203B41FA5}">
+                      <a16:colId xmlns:a16="http://schemas.microsoft.com/office/drawing/2014/main" val="20002"/>
+                    </a:ext>
+                  </a:extLst>
+                </a:gridCol>
               </a:tblGrid>
               <a:tr h="411480">
                 <a:tc>
@@ -14342,6 +13837,7 @@
                         </a:defRPr>
                       </a:pPr>
                       <a:r>
+                        <a:rPr dirty="0"/>
                         <a:t>#</a:t>
                       </a:r>
                     </a:p>
@@ -14398,6 +13894,11 @@
                     </a:solidFill>
                   </a:tcPr>
                 </a:tc>
+                <a:extLst>
+                  <a:ext uri="{0D108BD9-81ED-4DB2-BD59-A6C34878D82A}">
+                    <a16:rowId xmlns:a16="http://schemas.microsoft.com/office/drawing/2014/main" val="10000"/>
+                  </a:ext>
+                </a:extLst>
               </a:tr>
               <a:tr h="411480">
                 <a:tc>
@@ -14469,6 +13970,11 @@
                     </a:solidFill>
                   </a:tcPr>
                 </a:tc>
+                <a:extLst>
+                  <a:ext uri="{0D108BD9-81ED-4DB2-BD59-A6C34878D82A}">
+                    <a16:rowId xmlns:a16="http://schemas.microsoft.com/office/drawing/2014/main" val="10001"/>
+                  </a:ext>
+                </a:extLst>
               </a:tr>
               <a:tr h="411480">
                 <a:tc>
@@ -14540,6 +14046,11 @@
                     </a:solidFill>
                   </a:tcPr>
                 </a:tc>
+                <a:extLst>
+                  <a:ext uri="{0D108BD9-81ED-4DB2-BD59-A6C34878D82A}">
+                    <a16:rowId xmlns:a16="http://schemas.microsoft.com/office/drawing/2014/main" val="10002"/>
+                  </a:ext>
+                </a:extLst>
               </a:tr>
               <a:tr h="411480">
                 <a:tc>
@@ -14611,6 +14122,11 @@
                     </a:solidFill>
                   </a:tcPr>
                 </a:tc>
+                <a:extLst>
+                  <a:ext uri="{0D108BD9-81ED-4DB2-BD59-A6C34878D82A}">
+                    <a16:rowId xmlns:a16="http://schemas.microsoft.com/office/drawing/2014/main" val="10003"/>
+                  </a:ext>
+                </a:extLst>
               </a:tr>
               <a:tr h="411480">
                 <a:tc>
@@ -14649,7 +14165,16 @@
                         </a:defRPr>
                       </a:pPr>
                       <a:r>
-                        <a:t>AI integration — DeepSeek API</a:t>
+                        <a:rPr dirty="0"/>
+                        <a:t>AI integration </a:t>
+                      </a:r>
+                      <a:r>
+                        <a:rPr lang="en-NZ" dirty="0"/>
+                        <a:t>-</a:t>
+                      </a:r>
+                      <a:r>
+                        <a:rPr dirty="0"/>
+                        <a:t> DeepSeek API</a:t>
                       </a:r>
                     </a:p>
                   </a:txBody>
@@ -14682,6 +14207,11 @@
                     </a:solidFill>
                   </a:tcPr>
                 </a:tc>
+                <a:extLst>
+                  <a:ext uri="{0D108BD9-81ED-4DB2-BD59-A6C34878D82A}">
+                    <a16:rowId xmlns:a16="http://schemas.microsoft.com/office/drawing/2014/main" val="10004"/>
+                  </a:ext>
+                </a:extLst>
               </a:tr>
               <a:tr h="411480">
                 <a:tc>
@@ -14753,6 +14283,11 @@
                     </a:solidFill>
                   </a:tcPr>
                 </a:tc>
+                <a:extLst>
+                  <a:ext uri="{0D108BD9-81ED-4DB2-BD59-A6C34878D82A}">
+                    <a16:rowId xmlns:a16="http://schemas.microsoft.com/office/drawing/2014/main" val="10005"/>
+                  </a:ext>
+                </a:extLst>
               </a:tr>
               <a:tr h="411480">
                 <a:tc>
@@ -14824,6 +14359,11 @@
                     </a:solidFill>
                   </a:tcPr>
                 </a:tc>
+                <a:extLst>
+                  <a:ext uri="{0D108BD9-81ED-4DB2-BD59-A6C34878D82A}">
+                    <a16:rowId xmlns:a16="http://schemas.microsoft.com/office/drawing/2014/main" val="10006"/>
+                  </a:ext>
+                </a:extLst>
               </a:tr>
               <a:tr h="411480">
                 <a:tc>
@@ -14895,6 +14435,11 @@
                     </a:solidFill>
                   </a:tcPr>
                 </a:tc>
+                <a:extLst>
+                  <a:ext uri="{0D108BD9-81ED-4DB2-BD59-A6C34878D82A}">
+                    <a16:rowId xmlns:a16="http://schemas.microsoft.com/office/drawing/2014/main" val="10007"/>
+                  </a:ext>
+                </a:extLst>
               </a:tr>
             </a:tbl>
           </a:graphicData>
@@ -14909,7 +14454,7 @@
 </file>
 
 <file path=ppt/slides/slide5.xml><?xml version="1.0" encoding="utf-8"?>
-<p:sld xmlns:a="http://schemas.openxmlformats.org/drawingml/2006/main" xmlns:p="http://schemas.openxmlformats.org/presentationml/2006/main" xmlns:r="http://schemas.openxmlformats.org/officeDocument/2006/relationships">
+<p:sld xmlns:a="http://schemas.openxmlformats.org/drawingml/2006/main" xmlns:r="http://schemas.openxmlformats.org/officeDocument/2006/relationships" xmlns:p="http://schemas.openxmlformats.org/presentationml/2006/main">
   <p:cSld>
     <p:bg>
       <p:bgPr>
@@ -14925,7 +14470,14 @@
         <p:cNvGrpSpPr/>
         <p:nvPr/>
       </p:nvGrpSpPr>
-      <p:grpSpPr/>
+      <p:grpSpPr>
+        <a:xfrm>
+          <a:off x="0" y="0"/>
+          <a:ext cx="0" cy="0"/>
+          <a:chOff x="0" y="0"/>
+          <a:chExt cx="0" cy="0"/>
+        </a:xfrm>
+      </p:grpSpPr>
       <p:sp>
         <p:nvSpPr>
           <p:cNvPr id="2" name="Rectangle 1"/>
@@ -14966,6 +14518,7 @@
           <a:lstStyle/>
           <a:p>
             <a:pPr algn="ctr"/>
+            <a:endParaRPr/>
           </a:p>
         </p:txBody>
       </p:sp>
@@ -15009,6 +14562,7 @@
           <a:lstStyle/>
           <a:p>
             <a:pPr algn="ctr"/>
+            <a:endParaRPr/>
           </a:p>
         </p:txBody>
       </p:sp>
@@ -15052,6 +14606,7 @@
           <a:lstStyle/>
           <a:p>
             <a:pPr algn="ctr"/>
+            <a:endParaRPr/>
           </a:p>
         </p:txBody>
       </p:sp>
@@ -15130,6 +14685,7 @@
           <a:lstStyle/>
           <a:p>
             <a:pPr algn="ctr"/>
+            <a:endParaRPr/>
           </a:p>
         </p:txBody>
       </p:sp>
@@ -15141,8 +14697,8 @@
         </p:nvSpPr>
         <p:spPr>
           <a:xfrm>
-            <a:off x="7406640" y="237744"/>
-            <a:ext cx="1417320" cy="274320"/>
+            <a:off x="7667100" y="237744"/>
+            <a:ext cx="896399" cy="230832"/>
           </a:xfrm>
           <a:prstGeom prst="rect">
             <a:avLst/>
@@ -15163,7 +14719,16 @@
               </a:defRPr>
             </a:pPr>
             <a:r>
-              <a:t>02 — PROGRESS</a:t>
+              <a:rPr dirty="0"/>
+              <a:t>02 </a:t>
+            </a:r>
+            <a:r>
+              <a:rPr lang="en-NZ" dirty="0"/>
+              <a:t>-</a:t>
+            </a:r>
+            <a:r>
+              <a:rPr dirty="0"/>
+              <a:t> PROGRESS</a:t>
             </a:r>
           </a:p>
         </p:txBody>
@@ -15278,6 +14843,7 @@
           <a:lstStyle/>
           <a:p>
             <a:pPr algn="ctr"/>
+            <a:endParaRPr/>
           </a:p>
         </p:txBody>
       </p:sp>
@@ -15430,6 +14996,7 @@
           <a:lstStyle/>
           <a:p>
             <a:pPr algn="ctr"/>
+            <a:endParaRPr/>
           </a:p>
         </p:txBody>
       </p:sp>
@@ -15442,7 +15009,7 @@
         <p:spPr>
           <a:xfrm>
             <a:off x="777240" y="1325880"/>
-            <a:ext cx="7772400" cy="4937760"/>
+            <a:ext cx="7772400" cy="2118529"/>
           </a:xfrm>
           <a:prstGeom prst="rect">
             <a:avLst/>
@@ -15466,7 +15033,16 @@
               </a:defRPr>
             </a:pPr>
             <a:r>
-              <a:t>▸  REST API: GET / POST / PUT / DELETE  /api/customers</a:t>
+              <a:rPr dirty="0"/>
+              <a:t>▸  REST API: GET / POST / PUT / DELETE  /</a:t>
+            </a:r>
+            <a:r>
+              <a:rPr dirty="0" err="1"/>
+              <a:t>api</a:t>
+            </a:r>
+            <a:r>
+              <a:rPr dirty="0"/>
+              <a:t>/customers</a:t>
             </a:r>
           </a:p>
           <a:p>
@@ -15481,6 +15057,7 @@
               </a:defRPr>
             </a:pPr>
             <a:r>
+              <a:rPr dirty="0"/>
               <a:t>▸  Fields: first name, last name, phone, email, address</a:t>
             </a:r>
           </a:p>
@@ -15496,6 +15073,7 @@
               </a:defRPr>
             </a:pPr>
             <a:r>
+              <a:rPr dirty="0"/>
               <a:t>▸  Accessible to ADMIN and JOB_ADVISOR roles via RBAC</a:t>
             </a:r>
           </a:p>
@@ -15511,7 +15089,8 @@
               </a:defRPr>
             </a:pPr>
             <a:r>
-              <a:t>▸  Zod validation on backend and React Hook Form on frontend</a:t>
+              <a:rPr dirty="0"/>
+              <a:t>▸ validation on backend and React Hook Form on frontend</a:t>
             </a:r>
           </a:p>
           <a:p>
@@ -15526,6 +15105,7 @@
               </a:defRPr>
             </a:pPr>
             <a:r>
+              <a:rPr dirty="0"/>
               <a:t>▸  Customers linked to vehicles and customer portal accounts</a:t>
             </a:r>
           </a:p>
@@ -15541,6 +15121,7 @@
               </a:defRPr>
             </a:pPr>
             <a:r>
+              <a:rPr dirty="0"/>
               <a:t>▸  Audit logging for all customer create, update, delete actions</a:t>
             </a:r>
           </a:p>
@@ -15555,7 +15136,7 @@
 </file>
 
 <file path=ppt/slides/slide6.xml><?xml version="1.0" encoding="utf-8"?>
-<p:sld xmlns:a="http://schemas.openxmlformats.org/drawingml/2006/main" xmlns:p="http://schemas.openxmlformats.org/presentationml/2006/main" xmlns:r="http://schemas.openxmlformats.org/officeDocument/2006/relationships">
+<p:sld xmlns:a="http://schemas.openxmlformats.org/drawingml/2006/main" xmlns:r="http://schemas.openxmlformats.org/officeDocument/2006/relationships" xmlns:p="http://schemas.openxmlformats.org/presentationml/2006/main">
   <p:cSld>
     <p:bg>
       <p:bgPr>
@@ -15571,7 +15152,14 @@
         <p:cNvGrpSpPr/>
         <p:nvPr/>
       </p:nvGrpSpPr>
-      <p:grpSpPr/>
+      <p:grpSpPr>
+        <a:xfrm>
+          <a:off x="0" y="0"/>
+          <a:ext cx="0" cy="0"/>
+          <a:chOff x="0" y="0"/>
+          <a:chExt cx="0" cy="0"/>
+        </a:xfrm>
+      </p:grpSpPr>
       <p:sp>
         <p:nvSpPr>
           <p:cNvPr id="2" name="Rectangle 1"/>
@@ -15612,6 +15200,7 @@
           <a:lstStyle/>
           <a:p>
             <a:pPr algn="ctr"/>
+            <a:endParaRPr/>
           </a:p>
         </p:txBody>
       </p:sp>
@@ -15655,6 +15244,7 @@
           <a:lstStyle/>
           <a:p>
             <a:pPr algn="ctr"/>
+            <a:endParaRPr/>
           </a:p>
         </p:txBody>
       </p:sp>
@@ -15698,6 +15288,7 @@
           <a:lstStyle/>
           <a:p>
             <a:pPr algn="ctr"/>
+            <a:endParaRPr/>
           </a:p>
         </p:txBody>
       </p:sp>
@@ -15776,6 +15367,7 @@
           <a:lstStyle/>
           <a:p>
             <a:pPr algn="ctr"/>
+            <a:endParaRPr/>
           </a:p>
         </p:txBody>
       </p:sp>
@@ -15787,8 +15379,8 @@
         </p:nvSpPr>
         <p:spPr>
           <a:xfrm>
-            <a:off x="7406640" y="237744"/>
-            <a:ext cx="1417320" cy="274320"/>
+            <a:off x="7667100" y="237744"/>
+            <a:ext cx="896399" cy="230832"/>
           </a:xfrm>
           <a:prstGeom prst="rect">
             <a:avLst/>
@@ -15809,7 +15401,16 @@
               </a:defRPr>
             </a:pPr>
             <a:r>
-              <a:t>02 — PROGRESS</a:t>
+              <a:rPr dirty="0"/>
+              <a:t>02 </a:t>
+            </a:r>
+            <a:r>
+              <a:rPr lang="en-NZ" dirty="0"/>
+              <a:t>-</a:t>
+            </a:r>
+            <a:r>
+              <a:rPr dirty="0"/>
+              <a:t> PROGRESS</a:t>
             </a:r>
           </a:p>
         </p:txBody>
@@ -15924,6 +15525,7 @@
           <a:lstStyle/>
           <a:p>
             <a:pPr algn="ctr"/>
+            <a:endParaRPr/>
           </a:p>
         </p:txBody>
       </p:sp>
@@ -16076,6 +15678,7 @@
           <a:lstStyle/>
           <a:p>
             <a:pPr algn="ctr"/>
+            <a:endParaRPr/>
           </a:p>
         </p:txBody>
       </p:sp>
@@ -16147,6 +15750,7 @@
           <a:lstStyle/>
           <a:p>
             <a:pPr algn="ctr"/>
+            <a:endParaRPr/>
           </a:p>
         </p:txBody>
       </p:sp>
@@ -16194,7 +15798,7 @@
 </file>
 
 <file path=ppt/slides/slide7.xml><?xml version="1.0" encoding="utf-8"?>
-<p:sld xmlns:a="http://schemas.openxmlformats.org/drawingml/2006/main" xmlns:p="http://schemas.openxmlformats.org/presentationml/2006/main" xmlns:r="http://schemas.openxmlformats.org/officeDocument/2006/relationships">
+<p:sld xmlns:a="http://schemas.openxmlformats.org/drawingml/2006/main" xmlns:r="http://schemas.openxmlformats.org/officeDocument/2006/relationships" xmlns:p="http://schemas.openxmlformats.org/presentationml/2006/main">
   <p:cSld>
     <p:bg>
       <p:bgPr>
@@ -16210,7 +15814,14 @@
         <p:cNvGrpSpPr/>
         <p:nvPr/>
       </p:nvGrpSpPr>
-      <p:grpSpPr/>
+      <p:grpSpPr>
+        <a:xfrm>
+          <a:off x="0" y="0"/>
+          <a:ext cx="0" cy="0"/>
+          <a:chOff x="0" y="0"/>
+          <a:chExt cx="0" cy="0"/>
+        </a:xfrm>
+      </p:grpSpPr>
       <p:sp>
         <p:nvSpPr>
           <p:cNvPr id="2" name="Rectangle 1"/>
@@ -16251,6 +15862,7 @@
           <a:lstStyle/>
           <a:p>
             <a:pPr algn="ctr"/>
+            <a:endParaRPr/>
           </a:p>
         </p:txBody>
       </p:sp>
@@ -16294,6 +15906,7 @@
           <a:lstStyle/>
           <a:p>
             <a:pPr algn="ctr"/>
+            <a:endParaRPr/>
           </a:p>
         </p:txBody>
       </p:sp>
@@ -16337,6 +15950,7 @@
           <a:lstStyle/>
           <a:p>
             <a:pPr algn="ctr"/>
+            <a:endParaRPr/>
           </a:p>
         </p:txBody>
       </p:sp>
@@ -16415,6 +16029,7 @@
           <a:lstStyle/>
           <a:p>
             <a:pPr algn="ctr"/>
+            <a:endParaRPr/>
           </a:p>
         </p:txBody>
       </p:sp>
@@ -16426,8 +16041,8 @@
         </p:nvSpPr>
         <p:spPr>
           <a:xfrm>
-            <a:off x="7406640" y="237744"/>
-            <a:ext cx="1417320" cy="274320"/>
+            <a:off x="7667100" y="237744"/>
+            <a:ext cx="896399" cy="230832"/>
           </a:xfrm>
           <a:prstGeom prst="rect">
             <a:avLst/>
@@ -16448,7 +16063,16 @@
               </a:defRPr>
             </a:pPr>
             <a:r>
-              <a:t>02 — PROGRESS</a:t>
+              <a:rPr dirty="0"/>
+              <a:t>02 </a:t>
+            </a:r>
+            <a:r>
+              <a:rPr lang="en-NZ" dirty="0"/>
+              <a:t>-</a:t>
+            </a:r>
+            <a:r>
+              <a:rPr dirty="0"/>
+              <a:t> PROGRESS</a:t>
             </a:r>
           </a:p>
         </p:txBody>
@@ -16563,6 +16187,7 @@
           <a:lstStyle/>
           <a:p>
             <a:pPr algn="ctr"/>
+            <a:endParaRPr/>
           </a:p>
         </p:txBody>
       </p:sp>
@@ -16715,6 +16340,7 @@
           <a:lstStyle/>
           <a:p>
             <a:pPr algn="ctr"/>
+            <a:endParaRPr/>
           </a:p>
         </p:txBody>
       </p:sp>
@@ -16840,7 +16466,7 @@
 </file>
 
 <file path=ppt/slides/slide8.xml><?xml version="1.0" encoding="utf-8"?>
-<p:sld xmlns:a="http://schemas.openxmlformats.org/drawingml/2006/main" xmlns:p="http://schemas.openxmlformats.org/presentationml/2006/main" xmlns:r="http://schemas.openxmlformats.org/officeDocument/2006/relationships">
+<p:sld xmlns:a="http://schemas.openxmlformats.org/drawingml/2006/main" xmlns:r="http://schemas.openxmlformats.org/officeDocument/2006/relationships" xmlns:p="http://schemas.openxmlformats.org/presentationml/2006/main">
   <p:cSld>
     <p:bg>
       <p:bgPr>
@@ -16856,7 +16482,14 @@
         <p:cNvGrpSpPr/>
         <p:nvPr/>
       </p:nvGrpSpPr>
-      <p:grpSpPr/>
+      <p:grpSpPr>
+        <a:xfrm>
+          <a:off x="0" y="0"/>
+          <a:ext cx="0" cy="0"/>
+          <a:chOff x="0" y="0"/>
+          <a:chExt cx="0" cy="0"/>
+        </a:xfrm>
+      </p:grpSpPr>
       <p:sp>
         <p:nvSpPr>
           <p:cNvPr id="2" name="Rectangle 1"/>
@@ -16897,6 +16530,7 @@
           <a:lstStyle/>
           <a:p>
             <a:pPr algn="ctr"/>
+            <a:endParaRPr/>
           </a:p>
         </p:txBody>
       </p:sp>
@@ -16940,6 +16574,7 @@
           <a:lstStyle/>
           <a:p>
             <a:pPr algn="ctr"/>
+            <a:endParaRPr/>
           </a:p>
         </p:txBody>
       </p:sp>
@@ -16983,6 +16618,7 @@
           <a:lstStyle/>
           <a:p>
             <a:pPr algn="ctr"/>
+            <a:endParaRPr/>
           </a:p>
         </p:txBody>
       </p:sp>
@@ -17061,6 +16697,7 @@
           <a:lstStyle/>
           <a:p>
             <a:pPr algn="ctr"/>
+            <a:endParaRPr/>
           </a:p>
         </p:txBody>
       </p:sp>
@@ -17072,8 +16709,8 @@
         </p:nvSpPr>
         <p:spPr>
           <a:xfrm>
-            <a:off x="7406640" y="237744"/>
-            <a:ext cx="1417320" cy="274320"/>
+            <a:off x="7667100" y="237744"/>
+            <a:ext cx="896399" cy="230832"/>
           </a:xfrm>
           <a:prstGeom prst="rect">
             <a:avLst/>
@@ -17094,7 +16731,16 @@
               </a:defRPr>
             </a:pPr>
             <a:r>
-              <a:t>02 — PROGRESS</a:t>
+              <a:rPr dirty="0"/>
+              <a:t>02 </a:t>
+            </a:r>
+            <a:r>
+              <a:rPr lang="en-NZ" dirty="0"/>
+              <a:t>-</a:t>
+            </a:r>
+            <a:r>
+              <a:rPr dirty="0"/>
+              <a:t> PROGRESS</a:t>
             </a:r>
           </a:p>
         </p:txBody>
@@ -17209,6 +16855,7 @@
           <a:lstStyle/>
           <a:p>
             <a:pPr algn="ctr"/>
+            <a:endParaRPr/>
           </a:p>
         </p:txBody>
       </p:sp>
@@ -17361,6 +17008,7 @@
           <a:lstStyle/>
           <a:p>
             <a:pPr algn="ctr"/>
+            <a:endParaRPr/>
           </a:p>
         </p:txBody>
       </p:sp>
@@ -17432,6 +17080,7 @@
           <a:lstStyle/>
           <a:p>
             <a:pPr algn="ctr"/>
+            <a:endParaRPr/>
           </a:p>
         </p:txBody>
       </p:sp>
@@ -17479,7 +17128,7 @@
 </file>
 
 <file path=ppt/slides/slide9.xml><?xml version="1.0" encoding="utf-8"?>
-<p:sld xmlns:a="http://schemas.openxmlformats.org/drawingml/2006/main" xmlns:p="http://schemas.openxmlformats.org/presentationml/2006/main" xmlns:r="http://schemas.openxmlformats.org/officeDocument/2006/relationships">
+<p:sld xmlns:a="http://schemas.openxmlformats.org/drawingml/2006/main" xmlns:r="http://schemas.openxmlformats.org/officeDocument/2006/relationships" xmlns:p="http://schemas.openxmlformats.org/presentationml/2006/main">
   <p:cSld>
     <p:bg>
       <p:bgPr>
@@ -17495,7 +17144,14 @@
         <p:cNvGrpSpPr/>
         <p:nvPr/>
       </p:nvGrpSpPr>
-      <p:grpSpPr/>
+      <p:grpSpPr>
+        <a:xfrm>
+          <a:off x="0" y="0"/>
+          <a:ext cx="0" cy="0"/>
+          <a:chOff x="0" y="0"/>
+          <a:chExt cx="0" cy="0"/>
+        </a:xfrm>
+      </p:grpSpPr>
       <p:sp>
         <p:nvSpPr>
           <p:cNvPr id="2" name="Rectangle 1"/>
@@ -17536,6 +17192,7 @@
           <a:lstStyle/>
           <a:p>
             <a:pPr algn="ctr"/>
+            <a:endParaRPr/>
           </a:p>
         </p:txBody>
       </p:sp>
@@ -17579,6 +17236,7 @@
           <a:lstStyle/>
           <a:p>
             <a:pPr algn="ctr"/>
+            <a:endParaRPr/>
           </a:p>
         </p:txBody>
       </p:sp>
@@ -17622,6 +17280,7 @@
           <a:lstStyle/>
           <a:p>
             <a:pPr algn="ctr"/>
+            <a:endParaRPr/>
           </a:p>
         </p:txBody>
       </p:sp>
@@ -17700,6 +17359,7 @@
           <a:lstStyle/>
           <a:p>
             <a:pPr algn="ctr"/>
+            <a:endParaRPr/>
           </a:p>
         </p:txBody>
       </p:sp>
@@ -17711,8 +17371,8 @@
         </p:nvSpPr>
         <p:spPr>
           <a:xfrm>
-            <a:off x="7406640" y="237744"/>
-            <a:ext cx="1417320" cy="274320"/>
+            <a:off x="7667100" y="237744"/>
+            <a:ext cx="896399" cy="230832"/>
           </a:xfrm>
           <a:prstGeom prst="rect">
             <a:avLst/>
@@ -17733,7 +17393,16 @@
               </a:defRPr>
             </a:pPr>
             <a:r>
-              <a:t>02 — PROGRESS</a:t>
+              <a:rPr dirty="0"/>
+              <a:t>02 </a:t>
+            </a:r>
+            <a:r>
+              <a:rPr lang="en-NZ" dirty="0"/>
+              <a:t>-</a:t>
+            </a:r>
+            <a:r>
+              <a:rPr dirty="0"/>
+              <a:t> PROGRESS</a:t>
             </a:r>
           </a:p>
         </p:txBody>
@@ -17848,6 +17517,7 @@
           <a:lstStyle/>
           <a:p>
             <a:pPr algn="ctr"/>
+            <a:endParaRPr/>
           </a:p>
         </p:txBody>
       </p:sp>
@@ -18000,6 +17670,7 @@
           <a:lstStyle/>
           <a:p>
             <a:pPr algn="ctr"/>
+            <a:endParaRPr/>
           </a:p>
         </p:txBody>
       </p:sp>
@@ -18012,7 +17683,7 @@
         <p:spPr>
           <a:xfrm>
             <a:off x="777240" y="1325880"/>
-            <a:ext cx="7772400" cy="4937760"/>
+            <a:ext cx="7772400" cy="2118529"/>
           </a:xfrm>
           <a:prstGeom prst="rect">
             <a:avLst/>
@@ -18036,7 +17707,24 @@
               </a:defRPr>
             </a:pPr>
             <a:r>
-              <a:t>▸  POST /api/jobs/analyze — accepts vehicle registration + complaint text</a:t>
+              <a:rPr dirty="0"/>
+              <a:t>▸  POST /</a:t>
+            </a:r>
+            <a:r>
+              <a:rPr dirty="0" err="1"/>
+              <a:t>api</a:t>
+            </a:r>
+            <a:r>
+              <a:rPr dirty="0"/>
+              <a:t>/jobs/analyze </a:t>
+            </a:r>
+            <a:r>
+              <a:rPr lang="en-NZ" dirty="0"/>
+              <a:t>-</a:t>
+            </a:r>
+            <a:r>
+              <a:rPr dirty="0"/>
+              <a:t> accepts vehicle registration + complaint text</a:t>
             </a:r>
           </a:p>
           <a:p>
@@ -18051,7 +17739,16 @@
               </a:defRPr>
             </a:pPr>
             <a:r>
-              <a:t>▸  DeepSeekAIService calls DeepSeek Chat Completions API</a:t>
+              <a:rPr dirty="0"/>
+              <a:t>▸  </a:t>
+            </a:r>
+            <a:r>
+              <a:rPr dirty="0" err="1"/>
+              <a:t>DeepSeekAIService</a:t>
+            </a:r>
+            <a:r>
+              <a:rPr dirty="0"/>
+              <a:t> calls DeepSeek Chat Completions API</a:t>
             </a:r>
           </a:p>
           <a:p>
@@ -18066,6 +17763,7 @@
               </a:defRPr>
             </a:pPr>
             <a:r>
+              <a:rPr dirty="0"/>
               <a:t>▸  AI extracts individual issues and classifies into 5 departments</a:t>
             </a:r>
           </a:p>
@@ -18081,6 +17779,7 @@
               </a:defRPr>
             </a:pPr>
             <a:r>
+              <a:rPr dirty="0"/>
               <a:t>▸  Returns structured JSON: issue, department, confidence, explanation</a:t>
             </a:r>
           </a:p>
@@ -18096,6 +17795,7 @@
               </a:defRPr>
             </a:pPr>
             <a:r>
+              <a:rPr dirty="0"/>
               <a:t>▸  Keyword-based fallback classifier when API is unavailable</a:t>
             </a:r>
           </a:p>
@@ -18111,6 +17811,7 @@
               </a:defRPr>
             </a:pPr>
             <a:r>
+              <a:rPr dirty="0"/>
               <a:t>▸  One job created per identified issue with unique job number</a:t>
             </a:r>
           </a:p>
